--- a/docs/content/05-teaching-resources/slides/network-cabling/04-testing-certification-and-troubleshooting.pptx
+++ b/docs/content/05-teaching-resources/slides/network-cabling/04-testing-certification-and-troubleshooting.pptx
@@ -16,6 +16,12 @@
     <p:sldId id="264" r:id="rId16"/>
     <p:sldId id="265" r:id="rId17"/>
     <p:sldId id="266" r:id="rId18"/>
+    <p:sldId id="267" r:id="rId19"/>
+    <p:sldId id="268" r:id="rId20"/>
+    <p:sldId id="269" r:id="rId21"/>
+    <p:sldId id="270" r:id="rId22"/>
+    <p:sldId id="271" r:id="rId23"/>
+    <p:sldId id="272" r:id="rId24"/>
   </p:sldIdLst>
   <p:sldSz cx="12191695" cy="6858000" type="screen4x3"/>
   <p:notesSz cx="6858000" cy="9144000"/>
@@ -512,7 +518,22 @@
           <a:lstStyle/>
           <a:p>
             <a:r>
-              <a:t>Follow a test plan (scope, approach, resources, schedule), then interpret results against manufacturer tolerances.</a:t>
+              <a:t>Answers:</a:t>
+            </a:r>
+          </a:p>
+          <a:p>
+            <a:r>
+              <a:t>1. A break in a wire so current can't flow.</a:t>
+            </a:r>
+          </a:p>
+          <a:p>
+            <a:r>
+              <a:t>2. E.g. interference, damaged cable, bad connectors.</a:t>
+            </a:r>
+          </a:p>
+          <a:p>
+            <a:r>
+              <a:t>3. E.g. a broken pair, since gigabit needs all four pairs.</a:t>
             </a:r>
           </a:p>
         </p:txBody>
@@ -582,7 +603,7 @@
           <a:lstStyle/>
           <a:p>
             <a:r>
-              <a:t>Give students a few minutes to answer on mini whiteboards or paper, then reveal the answers on the next slide.</a:t>
+              <a:t>Follow a test plan (scope, approach, resources, schedule), then interpret results against manufacturer tolerances.</a:t>
             </a:r>
           </a:p>
         </p:txBody>
@@ -652,7 +673,22 @@
           <a:lstStyle/>
           <a:p>
             <a:r>
-              <a:t>Talk through any answers the class found difficult.</a:t>
+              <a:t>Answers:</a:t>
+            </a:r>
+          </a:p>
+          <a:p>
+            <a:r>
+              <a:t>1. Near-end crosstalk.</a:t>
+            </a:r>
+          </a:p>
+          <a:p>
+            <a:r>
+              <a:t>2. A loss test with a light source and power meter.</a:t>
+            </a:r>
+          </a:p>
+          <a:p>
+            <a:r>
+              <a:t>3. It proves the installation meets the standard and supports the warranty.</a:t>
             </a:r>
           </a:p>
         </p:txBody>
@@ -722,7 +758,22 @@
           <a:lstStyle/>
           <a:p>
             <a:r>
-              <a:t>Prepare leads with a split pair, a reversed pair, an open conductor and one good lead.</a:t>
+              <a:t>Answers:</a:t>
+            </a:r>
+          </a:p>
+          <a:p>
+            <a:r>
+              <a:t>1. It makes fault-finding and changes much faster.</a:t>
+            </a:r>
+          </a:p>
+          <a:p>
+            <a:r>
+              <a:t>2. Any two: revisit costs, penalties, reputation, delayed payment, failed audits.</a:t>
+            </a:r>
+          </a:p>
+          <a:p>
+            <a:r>
+              <a:t>3. Untested faults cause failures and disruption later.</a:t>
             </a:r>
           </a:p>
         </p:txBody>
@@ -748,6 +799,216 @@
 </file>
 
 <file path=ppt/notesSlides/notesSlide5.xml><?xml version="1.0" encoding="utf-8"?>
+<p:notes xmlns:a="http://schemas.openxmlformats.org/drawingml/2006/main" xmlns:p="http://schemas.openxmlformats.org/presentationml/2006/main" xmlns:r="http://schemas.openxmlformats.org/officeDocument/2006/relationships">
+  <p:cSld>
+    <p:spTree>
+      <p:nvGrpSpPr>
+        <p:cNvPr id="1" name=""/>
+        <p:cNvGrpSpPr/>
+        <p:nvPr/>
+      </p:nvGrpSpPr>
+      <p:grpSpPr>
+        <a:xfrm>
+          <a:off x="0" y="0"/>
+          <a:ext cx="0" cy="0"/>
+          <a:chOff x="0" y="0"/>
+          <a:chExt cx="0" cy="0"/>
+        </a:xfrm>
+      </p:grpSpPr>
+      <p:sp>
+        <p:nvSpPr>
+          <p:cNvPr id="2" name="Slide Image Placeholder 1"/>
+          <p:cNvSpPr>
+            <a:spLocks noGrp="1"/>
+          </p:cNvSpPr>
+          <p:nvPr>
+            <p:ph type="sldImg" idx="2"/>
+          </p:nvPr>
+        </p:nvSpPr>
+        <p:spPr/>
+      </p:sp>
+      <p:sp>
+        <p:nvSpPr>
+          <p:cNvPr id="3" name="Notes Placeholder 2"/>
+          <p:cNvSpPr>
+            <a:spLocks noGrp="1"/>
+          </p:cNvSpPr>
+          <p:nvPr>
+            <p:ph type="body" idx="3" sz="quarter"/>
+          </p:nvPr>
+        </p:nvSpPr>
+        <p:spPr/>
+        <p:txBody>
+          <a:bodyPr/>
+          <a:lstStyle/>
+          <a:p>
+            <a:r>
+              <a:t>Give students a few minutes to answer on mini whiteboards or paper, then reveal the answers on the next slide.</a:t>
+            </a:r>
+          </a:p>
+        </p:txBody>
+      </p:sp>
+      <p:sp>
+        <p:nvSpPr>
+          <p:cNvPr id="4" name="Slide Number Placeholder 3"/>
+          <p:cNvSpPr>
+            <a:spLocks noGrp="1"/>
+          </p:cNvSpPr>
+          <p:nvPr>
+            <p:ph type="sldNum" idx="5" sz="quarter"/>
+          </p:nvPr>
+        </p:nvSpPr>
+        <p:spPr/>
+      </p:sp>
+    </p:spTree>
+  </p:cSld>
+  <p:clrMapOvr>
+    <a:masterClrMapping/>
+  </p:clrMapOvr>
+</p:notes>
+</file>
+
+<file path=ppt/notesSlides/notesSlide6.xml><?xml version="1.0" encoding="utf-8"?>
+<p:notes xmlns:a="http://schemas.openxmlformats.org/drawingml/2006/main" xmlns:p="http://schemas.openxmlformats.org/presentationml/2006/main" xmlns:r="http://schemas.openxmlformats.org/officeDocument/2006/relationships">
+  <p:cSld>
+    <p:spTree>
+      <p:nvGrpSpPr>
+        <p:cNvPr id="1" name=""/>
+        <p:cNvGrpSpPr/>
+        <p:nvPr/>
+      </p:nvGrpSpPr>
+      <p:grpSpPr>
+        <a:xfrm>
+          <a:off x="0" y="0"/>
+          <a:ext cx="0" cy="0"/>
+          <a:chOff x="0" y="0"/>
+          <a:chExt cx="0" cy="0"/>
+        </a:xfrm>
+      </p:grpSpPr>
+      <p:sp>
+        <p:nvSpPr>
+          <p:cNvPr id="2" name="Slide Image Placeholder 1"/>
+          <p:cNvSpPr>
+            <a:spLocks noGrp="1"/>
+          </p:cNvSpPr>
+          <p:nvPr>
+            <p:ph type="sldImg" idx="2"/>
+          </p:nvPr>
+        </p:nvSpPr>
+        <p:spPr/>
+      </p:sp>
+      <p:sp>
+        <p:nvSpPr>
+          <p:cNvPr id="3" name="Notes Placeholder 2"/>
+          <p:cNvSpPr>
+            <a:spLocks noGrp="1"/>
+          </p:cNvSpPr>
+          <p:nvPr>
+            <p:ph type="body" idx="3" sz="quarter"/>
+          </p:nvPr>
+        </p:nvSpPr>
+        <p:spPr/>
+        <p:txBody>
+          <a:bodyPr/>
+          <a:lstStyle/>
+          <a:p>
+            <a:r>
+              <a:t>Talk through any answers the class found difficult.</a:t>
+            </a:r>
+          </a:p>
+        </p:txBody>
+      </p:sp>
+      <p:sp>
+        <p:nvSpPr>
+          <p:cNvPr id="4" name="Slide Number Placeholder 3"/>
+          <p:cNvSpPr>
+            <a:spLocks noGrp="1"/>
+          </p:cNvSpPr>
+          <p:nvPr>
+            <p:ph type="sldNum" idx="5" sz="quarter"/>
+          </p:nvPr>
+        </p:nvSpPr>
+        <p:spPr/>
+      </p:sp>
+    </p:spTree>
+  </p:cSld>
+  <p:clrMapOvr>
+    <a:masterClrMapping/>
+  </p:clrMapOvr>
+</p:notes>
+</file>
+
+<file path=ppt/notesSlides/notesSlide7.xml><?xml version="1.0" encoding="utf-8"?>
+<p:notes xmlns:a="http://schemas.openxmlformats.org/drawingml/2006/main" xmlns:p="http://schemas.openxmlformats.org/presentationml/2006/main" xmlns:r="http://schemas.openxmlformats.org/officeDocument/2006/relationships">
+  <p:cSld>
+    <p:spTree>
+      <p:nvGrpSpPr>
+        <p:cNvPr id="1" name=""/>
+        <p:cNvGrpSpPr/>
+        <p:nvPr/>
+      </p:nvGrpSpPr>
+      <p:grpSpPr>
+        <a:xfrm>
+          <a:off x="0" y="0"/>
+          <a:ext cx="0" cy="0"/>
+          <a:chOff x="0" y="0"/>
+          <a:chExt cx="0" cy="0"/>
+        </a:xfrm>
+      </p:grpSpPr>
+      <p:sp>
+        <p:nvSpPr>
+          <p:cNvPr id="2" name="Slide Image Placeholder 1"/>
+          <p:cNvSpPr>
+            <a:spLocks noGrp="1"/>
+          </p:cNvSpPr>
+          <p:nvPr>
+            <p:ph type="sldImg" idx="2"/>
+          </p:nvPr>
+        </p:nvSpPr>
+        <p:spPr/>
+      </p:sp>
+      <p:sp>
+        <p:nvSpPr>
+          <p:cNvPr id="3" name="Notes Placeholder 2"/>
+          <p:cNvSpPr>
+            <a:spLocks noGrp="1"/>
+          </p:cNvSpPr>
+          <p:nvPr>
+            <p:ph type="body" idx="3" sz="quarter"/>
+          </p:nvPr>
+        </p:nvSpPr>
+        <p:spPr/>
+        <p:txBody>
+          <a:bodyPr/>
+          <a:lstStyle/>
+          <a:p>
+            <a:r>
+              <a:t>Prepare leads with a split pair, a reversed pair, an open conductor and one good lead.</a:t>
+            </a:r>
+          </a:p>
+        </p:txBody>
+      </p:sp>
+      <p:sp>
+        <p:nvSpPr>
+          <p:cNvPr id="4" name="Slide Number Placeholder 3"/>
+          <p:cNvSpPr>
+            <a:spLocks noGrp="1"/>
+          </p:cNvSpPr>
+          <p:nvPr>
+            <p:ph type="sldNum" idx="5" sz="quarter"/>
+          </p:nvPr>
+        </p:nvSpPr>
+        <p:spPr/>
+      </p:sp>
+    </p:spTree>
+  </p:cSld>
+  <p:clrMapOvr>
+    <a:masterClrMapping/>
+  </p:clrMapOvr>
+</p:notes>
+</file>
+
+<file path=ppt/notesSlides/notesSlide8.xml><?xml version="1.0" encoding="utf-8"?>
 <p:notes xmlns:a="http://schemas.openxmlformats.org/drawingml/2006/main" xmlns:p="http://schemas.openxmlformats.org/presentationml/2006/main" xmlns:r="http://schemas.openxmlformats.org/officeDocument/2006/relationships">
   <p:cSld>
     <p:spTree>
@@ -4196,7 +4457,7 @@
                 </a:solidFill>
                 <a:latin typeface="Cambria"/>
               </a:rPr>
-              <a:t>Activity: Fault-find the patch leads</a:t>
+              <a:t>Quick check: Certifying copper and fibre</a:t>
             </a:r>
           </a:p>
         </p:txBody>
@@ -4263,6 +4524,3157 @@
                 <a:latin typeface="Calibri"/>
               </a:rPr>
               <a:t>10</a:t>
+            </a:r>
+          </a:p>
+        </p:txBody>
+      </p:sp>
+      <p:sp>
+        <p:nvSpPr>
+          <p:cNvPr id="6" name="Oval 5"/>
+          <p:cNvSpPr/>
+          <p:nvPr/>
+        </p:nvSpPr>
+        <p:spPr>
+          <a:xfrm>
+            <a:off x="548640" y="1691640"/>
+            <a:ext cx="502920" cy="502920"/>
+          </a:xfrm>
+          <a:prstGeom prst="ellipse">
+            <a:avLst/>
+          </a:prstGeom>
+          <a:solidFill>
+            <a:srgbClr val="F2B705"/>
+          </a:solidFill>
+          <a:ln>
+            <a:noFill/>
+          </a:ln>
+          <a:effectLst/>
+        </p:spPr>
+        <p:style>
+          <a:lnRef idx="1">
+            <a:schemeClr val="accent1"/>
+          </a:lnRef>
+          <a:fillRef idx="3">
+            <a:schemeClr val="accent1"/>
+          </a:fillRef>
+          <a:effectRef idx="2">
+            <a:schemeClr val="accent1"/>
+          </a:effectRef>
+          <a:fontRef idx="minor">
+            <a:schemeClr val="lt1"/>
+          </a:fontRef>
+        </p:style>
+        <p:txBody>
+          <a:bodyPr rtlCol="0" anchor="ctr" lIns="0" rIns="0" tIns="0" bIns="0"/>
+          <a:lstStyle/>
+          <a:p>
+            <a:pPr algn="ctr"/>
+            <a:r>
+              <a:rPr sz="1600" b="1">
+                <a:solidFill>
+                  <a:srgbClr val="202122"/>
+                </a:solidFill>
+                <a:latin typeface="Calibri"/>
+              </a:rPr>
+              <a:t>1</a:t>
+            </a:r>
+          </a:p>
+        </p:txBody>
+      </p:sp>
+      <p:sp>
+        <p:nvSpPr>
+          <p:cNvPr id="7" name="TextBox 6"/>
+          <p:cNvSpPr txBox="1"/>
+          <p:nvPr/>
+        </p:nvSpPr>
+        <p:spPr>
+          <a:xfrm>
+            <a:off x="1371600" y="1645920"/>
+            <a:ext cx="10271455" cy="1188720"/>
+          </a:xfrm>
+          <a:prstGeom prst="rect">
+            <a:avLst/>
+          </a:prstGeom>
+          <a:noFill/>
+        </p:spPr>
+        <p:txBody>
+          <a:bodyPr wrap="square" anchor="t" lIns="0" rIns="0" tIns="0" bIns="0"/>
+          <a:lstStyle/>
+          <a:p>
+            <a:pPr algn="l"/>
+            <a:r>
+              <a:rPr sz="2400" b="0" i="0">
+                <a:solidFill>
+                  <a:srgbClr val="202122"/>
+                </a:solidFill>
+                <a:latin typeface="Calibri"/>
+              </a:rPr>
+              <a:t>What does NEXT stand for?</a:t>
+            </a:r>
+          </a:p>
+        </p:txBody>
+      </p:sp>
+      <p:sp>
+        <p:nvSpPr>
+          <p:cNvPr id="8" name="Oval 7"/>
+          <p:cNvSpPr/>
+          <p:nvPr/>
+        </p:nvSpPr>
+        <p:spPr>
+          <a:xfrm>
+            <a:off x="548640" y="3108960"/>
+            <a:ext cx="502920" cy="502920"/>
+          </a:xfrm>
+          <a:prstGeom prst="ellipse">
+            <a:avLst/>
+          </a:prstGeom>
+          <a:solidFill>
+            <a:srgbClr val="F2B705"/>
+          </a:solidFill>
+          <a:ln>
+            <a:noFill/>
+          </a:ln>
+          <a:effectLst/>
+        </p:spPr>
+        <p:style>
+          <a:lnRef idx="1">
+            <a:schemeClr val="accent1"/>
+          </a:lnRef>
+          <a:fillRef idx="3">
+            <a:schemeClr val="accent1"/>
+          </a:fillRef>
+          <a:effectRef idx="2">
+            <a:schemeClr val="accent1"/>
+          </a:effectRef>
+          <a:fontRef idx="minor">
+            <a:schemeClr val="lt1"/>
+          </a:fontRef>
+        </p:style>
+        <p:txBody>
+          <a:bodyPr rtlCol="0" anchor="ctr" lIns="0" rIns="0" tIns="0" bIns="0"/>
+          <a:lstStyle/>
+          <a:p>
+            <a:pPr algn="ctr"/>
+            <a:r>
+              <a:rPr sz="1600" b="1">
+                <a:solidFill>
+                  <a:srgbClr val="202122"/>
+                </a:solidFill>
+                <a:latin typeface="Calibri"/>
+              </a:rPr>
+              <a:t>2</a:t>
+            </a:r>
+          </a:p>
+        </p:txBody>
+      </p:sp>
+      <p:sp>
+        <p:nvSpPr>
+          <p:cNvPr id="9" name="TextBox 8"/>
+          <p:cNvSpPr txBox="1"/>
+          <p:nvPr/>
+        </p:nvSpPr>
+        <p:spPr>
+          <a:xfrm>
+            <a:off x="1371600" y="3063240"/>
+            <a:ext cx="10271455" cy="1188720"/>
+          </a:xfrm>
+          <a:prstGeom prst="rect">
+            <a:avLst/>
+          </a:prstGeom>
+          <a:noFill/>
+        </p:spPr>
+        <p:txBody>
+          <a:bodyPr wrap="square" anchor="t" lIns="0" rIns="0" tIns="0" bIns="0"/>
+          <a:lstStyle/>
+          <a:p>
+            <a:pPr algn="l"/>
+            <a:r>
+              <a:rPr sz="2400" b="0" i="0">
+                <a:solidFill>
+                  <a:srgbClr val="202122"/>
+                </a:solidFill>
+                <a:latin typeface="Calibri"/>
+              </a:rPr>
+              <a:t>What is a tier 1 fibre test?</a:t>
+            </a:r>
+          </a:p>
+        </p:txBody>
+      </p:sp>
+      <p:sp>
+        <p:nvSpPr>
+          <p:cNvPr id="10" name="Oval 9"/>
+          <p:cNvSpPr/>
+          <p:nvPr/>
+        </p:nvSpPr>
+        <p:spPr>
+          <a:xfrm>
+            <a:off x="548640" y="4526280"/>
+            <a:ext cx="502920" cy="502920"/>
+          </a:xfrm>
+          <a:prstGeom prst="ellipse">
+            <a:avLst/>
+          </a:prstGeom>
+          <a:solidFill>
+            <a:srgbClr val="F2B705"/>
+          </a:solidFill>
+          <a:ln>
+            <a:noFill/>
+          </a:ln>
+          <a:effectLst/>
+        </p:spPr>
+        <p:style>
+          <a:lnRef idx="1">
+            <a:schemeClr val="accent1"/>
+          </a:lnRef>
+          <a:fillRef idx="3">
+            <a:schemeClr val="accent1"/>
+          </a:fillRef>
+          <a:effectRef idx="2">
+            <a:schemeClr val="accent1"/>
+          </a:effectRef>
+          <a:fontRef idx="minor">
+            <a:schemeClr val="lt1"/>
+          </a:fontRef>
+        </p:style>
+        <p:txBody>
+          <a:bodyPr rtlCol="0" anchor="ctr" lIns="0" rIns="0" tIns="0" bIns="0"/>
+          <a:lstStyle/>
+          <a:p>
+            <a:pPr algn="ctr"/>
+            <a:r>
+              <a:rPr sz="1600" b="1">
+                <a:solidFill>
+                  <a:srgbClr val="202122"/>
+                </a:solidFill>
+                <a:latin typeface="Calibri"/>
+              </a:rPr>
+              <a:t>3</a:t>
+            </a:r>
+          </a:p>
+        </p:txBody>
+      </p:sp>
+      <p:sp>
+        <p:nvSpPr>
+          <p:cNvPr id="11" name="TextBox 10"/>
+          <p:cNvSpPr txBox="1"/>
+          <p:nvPr/>
+        </p:nvSpPr>
+        <p:spPr>
+          <a:xfrm>
+            <a:off x="1371600" y="4480560"/>
+            <a:ext cx="10271455" cy="1188720"/>
+          </a:xfrm>
+          <a:prstGeom prst="rect">
+            <a:avLst/>
+          </a:prstGeom>
+          <a:noFill/>
+        </p:spPr>
+        <p:txBody>
+          <a:bodyPr wrap="square" anchor="t" lIns="0" rIns="0" tIns="0" bIns="0"/>
+          <a:lstStyle/>
+          <a:p>
+            <a:pPr algn="l"/>
+            <a:r>
+              <a:rPr sz="2400" b="0" i="0">
+                <a:solidFill>
+                  <a:srgbClr val="202122"/>
+                </a:solidFill>
+                <a:latin typeface="Calibri"/>
+              </a:rPr>
+              <a:t>Why does certification matter to customers?</a:t>
+            </a:r>
+          </a:p>
+        </p:txBody>
+      </p:sp>
+      <p:sp>
+        <p:nvSpPr>
+          <p:cNvPr id="12" name="TextBox 11"/>
+          <p:cNvSpPr txBox="1"/>
+          <p:nvPr/>
+        </p:nvSpPr>
+        <p:spPr>
+          <a:xfrm>
+            <a:off x="548640" y="5852160"/>
+            <a:ext cx="11094415" cy="365760"/>
+          </a:xfrm>
+          <a:prstGeom prst="rect">
+            <a:avLst/>
+          </a:prstGeom>
+          <a:noFill/>
+        </p:spPr>
+        <p:txBody>
+          <a:bodyPr wrap="square" anchor="t" lIns="0" rIns="0" tIns="0" bIns="0"/>
+          <a:lstStyle/>
+          <a:p>
+            <a:pPr algn="l"/>
+            <a:r>
+              <a:rPr sz="1300" b="0" i="1">
+                <a:solidFill>
+                  <a:srgbClr val="54595D"/>
+                </a:solidFill>
+                <a:latin typeface="Calibri"/>
+              </a:rPr>
+              <a:t>Answer on mini whiteboards or in your book. Answers are in the speaker notes.</a:t>
+            </a:r>
+          </a:p>
+        </p:txBody>
+      </p:sp>
+    </p:spTree>
+  </p:cSld>
+  <p:clrMapOvr>
+    <a:masterClrMapping/>
+  </p:clrMapOvr>
+</p:sld>
+</file>
+
+<file path=ppt/slides/slide11.xml><?xml version="1.0" encoding="utf-8"?>
+<p:sld xmlns:a="http://schemas.openxmlformats.org/drawingml/2006/main" xmlns:p="http://schemas.openxmlformats.org/presentationml/2006/main" xmlns:r="http://schemas.openxmlformats.org/officeDocument/2006/relationships">
+  <p:cSld>
+    <p:bg>
+      <p:bgPr>
+        <a:solidFill>
+          <a:srgbClr val="FFFFFF"/>
+        </a:solidFill>
+        <a:effectLst/>
+      </p:bgPr>
+    </p:bg>
+    <p:spTree>
+      <p:nvGrpSpPr>
+        <p:cNvPr id="1" name=""/>
+        <p:cNvGrpSpPr/>
+        <p:nvPr/>
+      </p:nvGrpSpPr>
+      <p:grpSpPr/>
+      <p:sp>
+        <p:nvSpPr>
+          <p:cNvPr id="2" name="TextBox 1"/>
+          <p:cNvSpPr txBox="1"/>
+          <p:nvPr/>
+        </p:nvSpPr>
+        <p:spPr>
+          <a:xfrm>
+            <a:off x="548640" y="320040"/>
+            <a:ext cx="11094415" cy="274320"/>
+          </a:xfrm>
+          <a:prstGeom prst="rect">
+            <a:avLst/>
+          </a:prstGeom>
+          <a:noFill/>
+        </p:spPr>
+        <p:txBody>
+          <a:bodyPr wrap="square" anchor="t" lIns="0" rIns="0" tIns="0" bIns="0"/>
+          <a:lstStyle/>
+          <a:p>
+            <a:pPr algn="l"/>
+            <a:r>
+              <a:rPr sz="1100" b="1" i="0">
+                <a:solidFill>
+                  <a:srgbClr val="54595D"/>
+                </a:solidFill>
+                <a:latin typeface="Calibri"/>
+              </a:rPr>
+              <a:t>NETWORK CABLING  ·  Network Cabling Content Area 2</a:t>
+            </a:r>
+          </a:p>
+        </p:txBody>
+      </p:sp>
+      <p:sp>
+        <p:nvSpPr>
+          <p:cNvPr id="3" name="TextBox 2"/>
+          <p:cNvSpPr txBox="1"/>
+          <p:nvPr/>
+        </p:nvSpPr>
+        <p:spPr>
+          <a:xfrm>
+            <a:off x="548640" y="566928"/>
+            <a:ext cx="11094415" cy="822960"/>
+          </a:xfrm>
+          <a:prstGeom prst="rect">
+            <a:avLst/>
+          </a:prstGeom>
+          <a:noFill/>
+        </p:spPr>
+        <p:txBody>
+          <a:bodyPr wrap="square" anchor="ctr" lIns="0" rIns="0" tIns="0" bIns="0"/>
+          <a:lstStyle/>
+          <a:p>
+            <a:pPr algn="l"/>
+            <a:r>
+              <a:rPr sz="3200" b="1" i="0">
+                <a:solidFill>
+                  <a:srgbClr val="03306E"/>
+                </a:solidFill>
+                <a:latin typeface="Cambria"/>
+              </a:rPr>
+              <a:t>Why poor workmanship matters</a:t>
+            </a:r>
+          </a:p>
+        </p:txBody>
+      </p:sp>
+      <p:sp>
+        <p:nvSpPr>
+          <p:cNvPr id="4" name="TextBox 3"/>
+          <p:cNvSpPr txBox="1"/>
+          <p:nvPr/>
+        </p:nvSpPr>
+        <p:spPr>
+          <a:xfrm>
+            <a:off x="548640" y="6446520"/>
+            <a:ext cx="8229600" cy="274320"/>
+          </a:xfrm>
+          <a:prstGeom prst="rect">
+            <a:avLst/>
+          </a:prstGeom>
+          <a:noFill/>
+        </p:spPr>
+        <p:txBody>
+          <a:bodyPr wrap="square" anchor="t" lIns="0" rIns="0" tIns="0" bIns="0"/>
+          <a:lstStyle/>
+          <a:p>
+            <a:pPr algn="l"/>
+            <a:r>
+              <a:rPr sz="1000" b="0" i="0">
+                <a:solidFill>
+                  <a:srgbClr val="54595D"/>
+                </a:solidFill>
+                <a:latin typeface="Calibri"/>
+              </a:rPr>
+              <a:t>Digital Support and Security T Level  ·  Testing, Certification and Troubleshooting</a:t>
+            </a:r>
+          </a:p>
+        </p:txBody>
+      </p:sp>
+      <p:sp>
+        <p:nvSpPr>
+          <p:cNvPr id="5" name="TextBox 4"/>
+          <p:cNvSpPr txBox="1"/>
+          <p:nvPr/>
+        </p:nvSpPr>
+        <p:spPr>
+          <a:xfrm>
+            <a:off x="10728655" y="6446520"/>
+            <a:ext cx="914400" cy="274320"/>
+          </a:xfrm>
+          <a:prstGeom prst="rect">
+            <a:avLst/>
+          </a:prstGeom>
+          <a:noFill/>
+        </p:spPr>
+        <p:txBody>
+          <a:bodyPr wrap="square" anchor="t" lIns="0" rIns="0" tIns="0" bIns="0"/>
+          <a:lstStyle/>
+          <a:p>
+            <a:pPr algn="r"/>
+            <a:r>
+              <a:rPr sz="1000" b="0" i="0">
+                <a:solidFill>
+                  <a:srgbClr val="54595D"/>
+                </a:solidFill>
+                <a:latin typeface="Calibri"/>
+              </a:rPr>
+              <a:t>11</a:t>
+            </a:r>
+          </a:p>
+        </p:txBody>
+      </p:sp>
+      <p:sp>
+        <p:nvSpPr>
+          <p:cNvPr id="6" name="TextBox 5"/>
+          <p:cNvSpPr txBox="1"/>
+          <p:nvPr/>
+        </p:nvSpPr>
+        <p:spPr>
+          <a:xfrm>
+            <a:off x="548640" y="1554480"/>
+            <a:ext cx="6720840" cy="4617720"/>
+          </a:xfrm>
+          <a:prstGeom prst="rect">
+            <a:avLst/>
+          </a:prstGeom>
+          <a:noFill/>
+        </p:spPr>
+        <p:txBody>
+          <a:bodyPr wrap="square" lIns="0" rIns="0" tIns="0" bIns="0">
+            <a:spAutoFit/>
+          </a:bodyPr>
+          <a:lstStyle/>
+          <a:p>
+            <a:pPr>
+              <a:spcAft>
+                <a:spcPts val="1200"/>
+              </a:spcAft>
+            </a:pPr>
+            <a:r>
+              <a:rPr sz="2000" b="0">
+                <a:solidFill>
+                  <a:srgbClr val="202122"/>
+                </a:solidFill>
+                <a:latin typeface="Calibri"/>
+              </a:rPr>
+              <a:t>Cutting corners always costs more later.</a:t>
+            </a:r>
+          </a:p>
+          <a:p>
+            <a:pPr>
+              <a:spcAft>
+                <a:spcPts val="1200"/>
+              </a:spcAft>
+            </a:pPr>
+            <a:r>
+              <a:rPr sz="2000" b="0">
+                <a:solidFill>
+                  <a:srgbClr val="202122"/>
+                </a:solidFill>
+                <a:latin typeface="Calibri"/>
+              </a:rPr>
+              <a:t>For the network, poor workmanship means slower speeds, more interference, harder maintenance, shorter cable life and weaker security. Bad or missing labelling makes every future fault-find and change slower.</a:t>
+            </a:r>
+          </a:p>
+          <a:p>
+            <a:pPr>
+              <a:spcAft>
+                <a:spcPts val="1200"/>
+              </a:spcAft>
+            </a:pPr>
+            <a:r>
+              <a:rPr sz="2000" b="0">
+                <a:solidFill>
+                  <a:srgbClr val="202122"/>
+                </a:solidFill>
+                <a:latin typeface="Calibri"/>
+              </a:rPr>
+              <a:t>For the business, it means paying for revisits, penalties under the service level agreement and warranty, reputational damage, delayed payment and failed audits.</a:t>
+            </a:r>
+          </a:p>
+          <a:p>
+            <a:pPr>
+              <a:spcAft>
+                <a:spcPts val="1200"/>
+              </a:spcAft>
+            </a:pPr>
+            <a:r>
+              <a:rPr sz="2000" b="0">
+                <a:solidFill>
+                  <a:srgbClr val="202122"/>
+                </a:solidFill>
+                <a:latin typeface="Calibri"/>
+              </a:rPr>
+              <a:t>Not testing every cable risks equipment damage, early failures, disruption and errors nobody notices.</a:t>
+            </a:r>
+          </a:p>
+        </p:txBody>
+      </p:sp>
+      <p:sp>
+        <p:nvSpPr>
+          <p:cNvPr id="7" name="Rounded Rectangle 6"/>
+          <p:cNvSpPr/>
+          <p:nvPr/>
+        </p:nvSpPr>
+        <p:spPr>
+          <a:xfrm>
+            <a:off x="7772400" y="1554480"/>
+            <a:ext cx="3867912" cy="4526280"/>
+          </a:xfrm>
+          <a:prstGeom prst="roundRect">
+            <a:avLst>
+              <a:gd name="adj" fmla="val 8000"/>
+            </a:avLst>
+          </a:prstGeom>
+          <a:solidFill>
+            <a:srgbClr val="03306E"/>
+          </a:solidFill>
+          <a:ln>
+            <a:noFill/>
+          </a:ln>
+          <a:effectLst/>
+        </p:spPr>
+        <p:style>
+          <a:lnRef idx="1">
+            <a:schemeClr val="accent1"/>
+          </a:lnRef>
+          <a:fillRef idx="3">
+            <a:schemeClr val="accent1"/>
+          </a:fillRef>
+          <a:effectRef idx="2">
+            <a:schemeClr val="accent1"/>
+          </a:effectRef>
+          <a:fontRef idx="minor">
+            <a:schemeClr val="lt1"/>
+          </a:fontRef>
+        </p:style>
+        <p:txBody>
+          <a:bodyPr rtlCol="0" anchor="ctr"/>
+          <a:lstStyle/>
+          <a:p/>
+        </p:txBody>
+      </p:sp>
+      <p:sp>
+        <p:nvSpPr>
+          <p:cNvPr id="8" name="Oval 7"/>
+          <p:cNvSpPr/>
+          <p:nvPr/>
+        </p:nvSpPr>
+        <p:spPr>
+          <a:xfrm>
+            <a:off x="8046720" y="1828800"/>
+            <a:ext cx="548640" cy="548640"/>
+          </a:xfrm>
+          <a:prstGeom prst="ellipse">
+            <a:avLst/>
+          </a:prstGeom>
+          <a:solidFill>
+            <a:srgbClr val="F2B705"/>
+          </a:solidFill>
+          <a:ln>
+            <a:noFill/>
+          </a:ln>
+          <a:effectLst/>
+        </p:spPr>
+        <p:style>
+          <a:lnRef idx="1">
+            <a:schemeClr val="accent1"/>
+          </a:lnRef>
+          <a:fillRef idx="3">
+            <a:schemeClr val="accent1"/>
+          </a:fillRef>
+          <a:effectRef idx="2">
+            <a:schemeClr val="accent1"/>
+          </a:effectRef>
+          <a:fontRef idx="minor">
+            <a:schemeClr val="lt1"/>
+          </a:fontRef>
+        </p:style>
+        <p:txBody>
+          <a:bodyPr rtlCol="0" anchor="ctr" lIns="0" rIns="0" tIns="0" bIns="0"/>
+          <a:lstStyle/>
+          <a:p>
+            <a:pPr algn="ctr"/>
+            <a:r>
+              <a:rPr sz="1300" b="1">
+                <a:solidFill>
+                  <a:srgbClr val="202122"/>
+                </a:solidFill>
+                <a:latin typeface="Calibri"/>
+              </a:rPr>
+              <a:t>e.g.</a:t>
+            </a:r>
+          </a:p>
+        </p:txBody>
+      </p:sp>
+      <p:sp>
+        <p:nvSpPr>
+          <p:cNvPr id="9" name="TextBox 8"/>
+          <p:cNvSpPr txBox="1"/>
+          <p:nvPr/>
+        </p:nvSpPr>
+        <p:spPr>
+          <a:xfrm>
+            <a:off x="8046720" y="2560320"/>
+            <a:ext cx="3291840" cy="365760"/>
+          </a:xfrm>
+          <a:prstGeom prst="rect">
+            <a:avLst/>
+          </a:prstGeom>
+          <a:noFill/>
+        </p:spPr>
+        <p:txBody>
+          <a:bodyPr wrap="square" anchor="t" lIns="0" rIns="0" tIns="0" bIns="0"/>
+          <a:lstStyle/>
+          <a:p>
+            <a:pPr algn="l"/>
+            <a:r>
+              <a:rPr sz="1300" b="1" i="0">
+                <a:solidFill>
+                  <a:srgbClr val="A9C8F0"/>
+                </a:solidFill>
+                <a:latin typeface="Calibri"/>
+              </a:rPr>
+              <a:t>EXAMPLE</a:t>
+            </a:r>
+          </a:p>
+        </p:txBody>
+      </p:sp>
+      <p:sp>
+        <p:nvSpPr>
+          <p:cNvPr id="10" name="TextBox 9"/>
+          <p:cNvSpPr txBox="1"/>
+          <p:nvPr/>
+        </p:nvSpPr>
+        <p:spPr>
+          <a:xfrm>
+            <a:off x="8046720" y="2971800"/>
+            <a:ext cx="3291840" cy="2971800"/>
+          </a:xfrm>
+          <a:prstGeom prst="rect">
+            <a:avLst/>
+          </a:prstGeom>
+          <a:noFill/>
+        </p:spPr>
+        <p:txBody>
+          <a:bodyPr wrap="square" anchor="t" lIns="0" rIns="0" tIns="0" bIns="0"/>
+          <a:lstStyle/>
+          <a:p>
+            <a:pPr algn="l"/>
+            <a:r>
+              <a:rPr sz="1900" b="0" i="0">
+                <a:solidFill>
+                  <a:srgbClr val="FFFFFF"/>
+                </a:solidFill>
+                <a:latin typeface="Cambria"/>
+              </a:rPr>
+              <a:t>An installer skips testing to finish early. Three months later, intermittent faults on six desks mean a return visit, unpaid, and an unhappy client.</a:t>
+            </a:r>
+          </a:p>
+        </p:txBody>
+      </p:sp>
+    </p:spTree>
+  </p:cSld>
+  <p:clrMapOvr>
+    <a:masterClrMapping/>
+  </p:clrMapOvr>
+</p:sld>
+</file>
+
+<file path=ppt/slides/slide12.xml><?xml version="1.0" encoding="utf-8"?>
+<p:sld xmlns:a="http://schemas.openxmlformats.org/drawingml/2006/main" xmlns:p="http://schemas.openxmlformats.org/presentationml/2006/main" xmlns:r="http://schemas.openxmlformats.org/officeDocument/2006/relationships">
+  <p:cSld>
+    <p:bg>
+      <p:bgPr>
+        <a:solidFill>
+          <a:srgbClr val="FFFFFF"/>
+        </a:solidFill>
+        <a:effectLst/>
+      </p:bgPr>
+    </p:bg>
+    <p:spTree>
+      <p:nvGrpSpPr>
+        <p:cNvPr id="1" name=""/>
+        <p:cNvGrpSpPr/>
+        <p:nvPr/>
+      </p:nvGrpSpPr>
+      <p:grpSpPr/>
+      <p:sp>
+        <p:nvSpPr>
+          <p:cNvPr id="2" name="TextBox 1"/>
+          <p:cNvSpPr txBox="1"/>
+          <p:nvPr/>
+        </p:nvSpPr>
+        <p:spPr>
+          <a:xfrm>
+            <a:off x="548640" y="320040"/>
+            <a:ext cx="11094415" cy="274320"/>
+          </a:xfrm>
+          <a:prstGeom prst="rect">
+            <a:avLst/>
+          </a:prstGeom>
+          <a:noFill/>
+        </p:spPr>
+        <p:txBody>
+          <a:bodyPr wrap="square" anchor="t" lIns="0" rIns="0" tIns="0" bIns="0"/>
+          <a:lstStyle/>
+          <a:p>
+            <a:pPr algn="l"/>
+            <a:r>
+              <a:rPr sz="1100" b="1" i="0">
+                <a:solidFill>
+                  <a:srgbClr val="54595D"/>
+                </a:solidFill>
+                <a:latin typeface="Calibri"/>
+              </a:rPr>
+              <a:t>NETWORK CABLING  ·  Network Cabling Content Area 2</a:t>
+            </a:r>
+          </a:p>
+        </p:txBody>
+      </p:sp>
+      <p:sp>
+        <p:nvSpPr>
+          <p:cNvPr id="3" name="TextBox 2"/>
+          <p:cNvSpPr txBox="1"/>
+          <p:nvPr/>
+        </p:nvSpPr>
+        <p:spPr>
+          <a:xfrm>
+            <a:off x="548640" y="566928"/>
+            <a:ext cx="11094415" cy="822960"/>
+          </a:xfrm>
+          <a:prstGeom prst="rect">
+            <a:avLst/>
+          </a:prstGeom>
+          <a:noFill/>
+        </p:spPr>
+        <p:txBody>
+          <a:bodyPr wrap="square" anchor="ctr" lIns="0" rIns="0" tIns="0" bIns="0"/>
+          <a:lstStyle/>
+          <a:p>
+            <a:pPr algn="l"/>
+            <a:r>
+              <a:rPr sz="3200" b="1" i="0">
+                <a:solidFill>
+                  <a:srgbClr val="03306E"/>
+                </a:solidFill>
+                <a:latin typeface="Cambria"/>
+              </a:rPr>
+              <a:t>Why poor workmanship matters</a:t>
+            </a:r>
+          </a:p>
+        </p:txBody>
+      </p:sp>
+      <p:sp>
+        <p:nvSpPr>
+          <p:cNvPr id="4" name="TextBox 3"/>
+          <p:cNvSpPr txBox="1"/>
+          <p:nvPr/>
+        </p:nvSpPr>
+        <p:spPr>
+          <a:xfrm>
+            <a:off x="548640" y="6446520"/>
+            <a:ext cx="8229600" cy="274320"/>
+          </a:xfrm>
+          <a:prstGeom prst="rect">
+            <a:avLst/>
+          </a:prstGeom>
+          <a:noFill/>
+        </p:spPr>
+        <p:txBody>
+          <a:bodyPr wrap="square" anchor="t" lIns="0" rIns="0" tIns="0" bIns="0"/>
+          <a:lstStyle/>
+          <a:p>
+            <a:pPr algn="l"/>
+            <a:r>
+              <a:rPr sz="1000" b="0" i="0">
+                <a:solidFill>
+                  <a:srgbClr val="54595D"/>
+                </a:solidFill>
+                <a:latin typeface="Calibri"/>
+              </a:rPr>
+              <a:t>Digital Support and Security T Level  ·  Testing, Certification and Troubleshooting</a:t>
+            </a:r>
+          </a:p>
+        </p:txBody>
+      </p:sp>
+      <p:sp>
+        <p:nvSpPr>
+          <p:cNvPr id="5" name="TextBox 4"/>
+          <p:cNvSpPr txBox="1"/>
+          <p:nvPr/>
+        </p:nvSpPr>
+        <p:spPr>
+          <a:xfrm>
+            <a:off x="10728655" y="6446520"/>
+            <a:ext cx="914400" cy="274320"/>
+          </a:xfrm>
+          <a:prstGeom prst="rect">
+            <a:avLst/>
+          </a:prstGeom>
+          <a:noFill/>
+        </p:spPr>
+        <p:txBody>
+          <a:bodyPr wrap="square" anchor="t" lIns="0" rIns="0" tIns="0" bIns="0"/>
+          <a:lstStyle/>
+          <a:p>
+            <a:pPr algn="r"/>
+            <a:r>
+              <a:rPr sz="1000" b="0" i="0">
+                <a:solidFill>
+                  <a:srgbClr val="54595D"/>
+                </a:solidFill>
+                <a:latin typeface="Calibri"/>
+              </a:rPr>
+              <a:t>12</a:t>
+            </a:r>
+          </a:p>
+        </p:txBody>
+      </p:sp>
+      <p:sp>
+        <p:nvSpPr>
+          <p:cNvPr id="6" name="Rounded Rectangle 5"/>
+          <p:cNvSpPr/>
+          <p:nvPr/>
+        </p:nvSpPr>
+        <p:spPr>
+          <a:xfrm>
+            <a:off x="548640" y="1600200"/>
+            <a:ext cx="5364327" cy="640080"/>
+          </a:xfrm>
+          <a:prstGeom prst="roundRect">
+            <a:avLst>
+              <a:gd name="adj" fmla="val 15000"/>
+            </a:avLst>
+          </a:prstGeom>
+          <a:solidFill>
+            <a:srgbClr val="03306E"/>
+          </a:solidFill>
+          <a:ln>
+            <a:noFill/>
+          </a:ln>
+          <a:effectLst/>
+        </p:spPr>
+        <p:style>
+          <a:lnRef idx="1">
+            <a:schemeClr val="accent1"/>
+          </a:lnRef>
+          <a:fillRef idx="3">
+            <a:schemeClr val="accent1"/>
+          </a:fillRef>
+          <a:effectRef idx="2">
+            <a:schemeClr val="accent1"/>
+          </a:effectRef>
+          <a:fontRef idx="minor">
+            <a:schemeClr val="lt1"/>
+          </a:fontRef>
+        </p:style>
+        <p:txBody>
+          <a:bodyPr rtlCol="0" anchor="ctr"/>
+          <a:lstStyle/>
+          <a:p/>
+        </p:txBody>
+      </p:sp>
+      <p:sp>
+        <p:nvSpPr>
+          <p:cNvPr id="7" name="TextBox 6"/>
+          <p:cNvSpPr txBox="1"/>
+          <p:nvPr/>
+        </p:nvSpPr>
+        <p:spPr>
+          <a:xfrm>
+            <a:off x="777240" y="1600200"/>
+            <a:ext cx="4907127" cy="640080"/>
+          </a:xfrm>
+          <a:prstGeom prst="rect">
+            <a:avLst/>
+          </a:prstGeom>
+          <a:noFill/>
+        </p:spPr>
+        <p:txBody>
+          <a:bodyPr wrap="square" anchor="ctr" lIns="0" rIns="0" tIns="0" bIns="0"/>
+          <a:lstStyle/>
+          <a:p>
+            <a:pPr algn="l"/>
+            <a:r>
+              <a:rPr sz="2000" b="1" i="0">
+                <a:solidFill>
+                  <a:srgbClr val="FFFFFF"/>
+                </a:solidFill>
+                <a:latin typeface="Calibri"/>
+              </a:rPr>
+              <a:t>Network consequences</a:t>
+            </a:r>
+          </a:p>
+        </p:txBody>
+      </p:sp>
+      <p:sp>
+        <p:nvSpPr>
+          <p:cNvPr id="8" name="Rounded Rectangle 7"/>
+          <p:cNvSpPr/>
+          <p:nvPr/>
+        </p:nvSpPr>
+        <p:spPr>
+          <a:xfrm>
+            <a:off x="548640" y="2377440"/>
+            <a:ext cx="5364327" cy="3794760"/>
+          </a:xfrm>
+          <a:prstGeom prst="roundRect">
+            <a:avLst>
+              <a:gd name="adj" fmla="val 4000"/>
+            </a:avLst>
+          </a:prstGeom>
+          <a:solidFill>
+            <a:srgbClr val="EAF3FF"/>
+          </a:solidFill>
+          <a:ln>
+            <a:noFill/>
+          </a:ln>
+          <a:effectLst/>
+        </p:spPr>
+        <p:style>
+          <a:lnRef idx="1">
+            <a:schemeClr val="accent1"/>
+          </a:lnRef>
+          <a:fillRef idx="3">
+            <a:schemeClr val="accent1"/>
+          </a:fillRef>
+          <a:effectRef idx="2">
+            <a:schemeClr val="accent1"/>
+          </a:effectRef>
+          <a:fontRef idx="minor">
+            <a:schemeClr val="lt1"/>
+          </a:fontRef>
+        </p:style>
+        <p:txBody>
+          <a:bodyPr rtlCol="0" anchor="ctr"/>
+          <a:lstStyle/>
+          <a:p/>
+        </p:txBody>
+      </p:sp>
+      <p:sp>
+        <p:nvSpPr>
+          <p:cNvPr id="9" name="TextBox 8"/>
+          <p:cNvSpPr txBox="1"/>
+          <p:nvPr/>
+        </p:nvSpPr>
+        <p:spPr>
+          <a:xfrm>
+            <a:off x="822959" y="2606040"/>
+            <a:ext cx="4815687" cy="3337560"/>
+          </a:xfrm>
+          <a:prstGeom prst="rect">
+            <a:avLst/>
+          </a:prstGeom>
+          <a:noFill/>
+        </p:spPr>
+        <p:txBody>
+          <a:bodyPr wrap="square" lIns="0" rIns="0" tIns="0" bIns="0">
+            <a:spAutoFit/>
+          </a:bodyPr>
+          <a:lstStyle/>
+          <a:p>
+            <a:pPr marL="274320" indent="-274320">
+              <a:spcAft>
+                <a:spcPts val="990"/>
+              </a:spcAft>
+              <a:buClr>
+                <a:srgbClr val="0645AD"/>
+              </a:buClr>
+              <a:buFont typeface="Arial"/>
+              <a:buChar char="•"/>
+            </a:pPr>
+            <a:r>
+              <a:rPr sz="2200" b="0">
+                <a:solidFill>
+                  <a:srgbClr val="202122"/>
+                </a:solidFill>
+                <a:latin typeface="Calibri"/>
+              </a:rPr>
+              <a:t>Slower speeds and more interference</a:t>
+            </a:r>
+          </a:p>
+          <a:p>
+            <a:pPr marL="274320" indent="-274320">
+              <a:spcAft>
+                <a:spcPts val="990"/>
+              </a:spcAft>
+              <a:buClr>
+                <a:srgbClr val="0645AD"/>
+              </a:buClr>
+              <a:buFont typeface="Arial"/>
+              <a:buChar char="•"/>
+            </a:pPr>
+            <a:r>
+              <a:rPr sz="2200" b="0">
+                <a:solidFill>
+                  <a:srgbClr val="202122"/>
+                </a:solidFill>
+                <a:latin typeface="Calibri"/>
+              </a:rPr>
+              <a:t>Harder maintenance and shorter cable life</a:t>
+            </a:r>
+          </a:p>
+          <a:p>
+            <a:pPr marL="274320" indent="-274320">
+              <a:spcAft>
+                <a:spcPts val="990"/>
+              </a:spcAft>
+              <a:buClr>
+                <a:srgbClr val="0645AD"/>
+              </a:buClr>
+              <a:buFont typeface="Arial"/>
+              <a:buChar char="•"/>
+            </a:pPr>
+            <a:r>
+              <a:rPr sz="2200" b="0">
+                <a:solidFill>
+                  <a:srgbClr val="202122"/>
+                </a:solidFill>
+                <a:latin typeface="Calibri"/>
+              </a:rPr>
+              <a:t>Weaker security</a:t>
+            </a:r>
+          </a:p>
+          <a:p>
+            <a:pPr marL="274320" indent="-274320">
+              <a:spcAft>
+                <a:spcPts val="990"/>
+              </a:spcAft>
+              <a:buClr>
+                <a:srgbClr val="0645AD"/>
+              </a:buClr>
+              <a:buFont typeface="Arial"/>
+              <a:buChar char="•"/>
+            </a:pPr>
+            <a:r>
+              <a:rPr sz="2200" b="0">
+                <a:solidFill>
+                  <a:srgbClr val="202122"/>
+                </a:solidFill>
+                <a:latin typeface="Calibri"/>
+              </a:rPr>
+              <a:t>Bad labelling slows every future fault-find</a:t>
+            </a:r>
+          </a:p>
+        </p:txBody>
+      </p:sp>
+      <p:sp>
+        <p:nvSpPr>
+          <p:cNvPr id="10" name="Rounded Rectangle 9"/>
+          <p:cNvSpPr/>
+          <p:nvPr/>
+        </p:nvSpPr>
+        <p:spPr>
+          <a:xfrm>
+            <a:off x="6278727" y="1600200"/>
+            <a:ext cx="5364327" cy="640080"/>
+          </a:xfrm>
+          <a:prstGeom prst="roundRect">
+            <a:avLst>
+              <a:gd name="adj" fmla="val 15000"/>
+            </a:avLst>
+          </a:prstGeom>
+          <a:solidFill>
+            <a:srgbClr val="0645AD"/>
+          </a:solidFill>
+          <a:ln>
+            <a:noFill/>
+          </a:ln>
+          <a:effectLst/>
+        </p:spPr>
+        <p:style>
+          <a:lnRef idx="1">
+            <a:schemeClr val="accent1"/>
+          </a:lnRef>
+          <a:fillRef idx="3">
+            <a:schemeClr val="accent1"/>
+          </a:fillRef>
+          <a:effectRef idx="2">
+            <a:schemeClr val="accent1"/>
+          </a:effectRef>
+          <a:fontRef idx="minor">
+            <a:schemeClr val="lt1"/>
+          </a:fontRef>
+        </p:style>
+        <p:txBody>
+          <a:bodyPr rtlCol="0" anchor="ctr"/>
+          <a:lstStyle/>
+          <a:p/>
+        </p:txBody>
+      </p:sp>
+      <p:sp>
+        <p:nvSpPr>
+          <p:cNvPr id="11" name="TextBox 10"/>
+          <p:cNvSpPr txBox="1"/>
+          <p:nvPr/>
+        </p:nvSpPr>
+        <p:spPr>
+          <a:xfrm>
+            <a:off x="6507327" y="1600200"/>
+            <a:ext cx="4907127" cy="640080"/>
+          </a:xfrm>
+          <a:prstGeom prst="rect">
+            <a:avLst/>
+          </a:prstGeom>
+          <a:noFill/>
+        </p:spPr>
+        <p:txBody>
+          <a:bodyPr wrap="square" anchor="ctr" lIns="0" rIns="0" tIns="0" bIns="0"/>
+          <a:lstStyle/>
+          <a:p>
+            <a:pPr algn="l"/>
+            <a:r>
+              <a:rPr sz="2000" b="1" i="0">
+                <a:solidFill>
+                  <a:srgbClr val="FFFFFF"/>
+                </a:solidFill>
+                <a:latin typeface="Calibri"/>
+              </a:rPr>
+              <a:t>Business consequences</a:t>
+            </a:r>
+          </a:p>
+        </p:txBody>
+      </p:sp>
+      <p:sp>
+        <p:nvSpPr>
+          <p:cNvPr id="12" name="Rounded Rectangle 11"/>
+          <p:cNvSpPr/>
+          <p:nvPr/>
+        </p:nvSpPr>
+        <p:spPr>
+          <a:xfrm>
+            <a:off x="6278727" y="2377440"/>
+            <a:ext cx="5364327" cy="3794760"/>
+          </a:xfrm>
+          <a:prstGeom prst="roundRect">
+            <a:avLst>
+              <a:gd name="adj" fmla="val 4000"/>
+            </a:avLst>
+          </a:prstGeom>
+          <a:solidFill>
+            <a:srgbClr val="EAF3FF"/>
+          </a:solidFill>
+          <a:ln>
+            <a:noFill/>
+          </a:ln>
+          <a:effectLst/>
+        </p:spPr>
+        <p:style>
+          <a:lnRef idx="1">
+            <a:schemeClr val="accent1"/>
+          </a:lnRef>
+          <a:fillRef idx="3">
+            <a:schemeClr val="accent1"/>
+          </a:fillRef>
+          <a:effectRef idx="2">
+            <a:schemeClr val="accent1"/>
+          </a:effectRef>
+          <a:fontRef idx="minor">
+            <a:schemeClr val="lt1"/>
+          </a:fontRef>
+        </p:style>
+        <p:txBody>
+          <a:bodyPr rtlCol="0" anchor="ctr"/>
+          <a:lstStyle/>
+          <a:p/>
+        </p:txBody>
+      </p:sp>
+      <p:sp>
+        <p:nvSpPr>
+          <p:cNvPr id="13" name="TextBox 12"/>
+          <p:cNvSpPr txBox="1"/>
+          <p:nvPr/>
+        </p:nvSpPr>
+        <p:spPr>
+          <a:xfrm>
+            <a:off x="6553047" y="2606040"/>
+            <a:ext cx="4815687" cy="3337560"/>
+          </a:xfrm>
+          <a:prstGeom prst="rect">
+            <a:avLst/>
+          </a:prstGeom>
+          <a:noFill/>
+        </p:spPr>
+        <p:txBody>
+          <a:bodyPr wrap="square" lIns="0" rIns="0" tIns="0" bIns="0">
+            <a:spAutoFit/>
+          </a:bodyPr>
+          <a:lstStyle/>
+          <a:p>
+            <a:pPr marL="274320" indent="-274320">
+              <a:spcAft>
+                <a:spcPts val="990"/>
+              </a:spcAft>
+              <a:buClr>
+                <a:srgbClr val="0645AD"/>
+              </a:buClr>
+              <a:buFont typeface="Arial"/>
+              <a:buChar char="•"/>
+            </a:pPr>
+            <a:r>
+              <a:rPr sz="2200" b="0">
+                <a:solidFill>
+                  <a:srgbClr val="202122"/>
+                </a:solidFill>
+                <a:latin typeface="Calibri"/>
+              </a:rPr>
+              <a:t>Cost of revisits</a:t>
+            </a:r>
+          </a:p>
+          <a:p>
+            <a:pPr marL="274320" indent="-274320">
+              <a:spcAft>
+                <a:spcPts val="990"/>
+              </a:spcAft>
+              <a:buClr>
+                <a:srgbClr val="0645AD"/>
+              </a:buClr>
+              <a:buFont typeface="Arial"/>
+              <a:buChar char="•"/>
+            </a:pPr>
+            <a:r>
+              <a:rPr sz="2200" b="0">
+                <a:solidFill>
+                  <a:srgbClr val="202122"/>
+                </a:solidFill>
+                <a:latin typeface="Calibri"/>
+              </a:rPr>
+              <a:t>SLA and warranty penalties</a:t>
+            </a:r>
+          </a:p>
+          <a:p>
+            <a:pPr marL="274320" indent="-274320">
+              <a:spcAft>
+                <a:spcPts val="990"/>
+              </a:spcAft>
+              <a:buClr>
+                <a:srgbClr val="0645AD"/>
+              </a:buClr>
+              <a:buFont typeface="Arial"/>
+              <a:buChar char="•"/>
+            </a:pPr>
+            <a:r>
+              <a:rPr sz="2200" b="0">
+                <a:solidFill>
+                  <a:srgbClr val="202122"/>
+                </a:solidFill>
+                <a:latin typeface="Calibri"/>
+              </a:rPr>
+              <a:t>Reputational damage and delayed payment</a:t>
+            </a:r>
+          </a:p>
+          <a:p>
+            <a:pPr marL="274320" indent="-274320">
+              <a:spcAft>
+                <a:spcPts val="990"/>
+              </a:spcAft>
+              <a:buClr>
+                <a:srgbClr val="0645AD"/>
+              </a:buClr>
+              <a:buFont typeface="Arial"/>
+              <a:buChar char="•"/>
+            </a:pPr>
+            <a:r>
+              <a:rPr sz="2200" b="0">
+                <a:solidFill>
+                  <a:srgbClr val="202122"/>
+                </a:solidFill>
+                <a:latin typeface="Calibri"/>
+              </a:rPr>
+              <a:t>Failed audits</a:t>
+            </a:r>
+          </a:p>
+        </p:txBody>
+      </p:sp>
+    </p:spTree>
+  </p:cSld>
+  <p:clrMapOvr>
+    <a:masterClrMapping/>
+  </p:clrMapOvr>
+</p:sld>
+</file>
+
+<file path=ppt/slides/slide13.xml><?xml version="1.0" encoding="utf-8"?>
+<p:sld xmlns:a="http://schemas.openxmlformats.org/drawingml/2006/main" xmlns:p="http://schemas.openxmlformats.org/presentationml/2006/main" xmlns:r="http://schemas.openxmlformats.org/officeDocument/2006/relationships">
+  <p:cSld>
+    <p:bg>
+      <p:bgPr>
+        <a:solidFill>
+          <a:srgbClr val="FFFFFF"/>
+        </a:solidFill>
+        <a:effectLst/>
+      </p:bgPr>
+    </p:bg>
+    <p:spTree>
+      <p:nvGrpSpPr>
+        <p:cNvPr id="1" name=""/>
+        <p:cNvGrpSpPr/>
+        <p:nvPr/>
+      </p:nvGrpSpPr>
+      <p:grpSpPr/>
+      <p:sp>
+        <p:nvSpPr>
+          <p:cNvPr id="2" name="TextBox 1"/>
+          <p:cNvSpPr txBox="1"/>
+          <p:nvPr/>
+        </p:nvSpPr>
+        <p:spPr>
+          <a:xfrm>
+            <a:off x="548640" y="320040"/>
+            <a:ext cx="11094415" cy="274320"/>
+          </a:xfrm>
+          <a:prstGeom prst="rect">
+            <a:avLst/>
+          </a:prstGeom>
+          <a:noFill/>
+        </p:spPr>
+        <p:txBody>
+          <a:bodyPr wrap="square" anchor="t" lIns="0" rIns="0" tIns="0" bIns="0"/>
+          <a:lstStyle/>
+          <a:p>
+            <a:pPr algn="l"/>
+            <a:r>
+              <a:rPr sz="1100" b="1" i="0">
+                <a:solidFill>
+                  <a:srgbClr val="54595D"/>
+                </a:solidFill>
+                <a:latin typeface="Calibri"/>
+              </a:rPr>
+              <a:t>NETWORK CABLING  ·  Network Cabling Content Area 2</a:t>
+            </a:r>
+          </a:p>
+        </p:txBody>
+      </p:sp>
+      <p:sp>
+        <p:nvSpPr>
+          <p:cNvPr id="3" name="TextBox 2"/>
+          <p:cNvSpPr txBox="1"/>
+          <p:nvPr/>
+        </p:nvSpPr>
+        <p:spPr>
+          <a:xfrm>
+            <a:off x="548640" y="566928"/>
+            <a:ext cx="11094415" cy="822960"/>
+          </a:xfrm>
+          <a:prstGeom prst="rect">
+            <a:avLst/>
+          </a:prstGeom>
+          <a:noFill/>
+        </p:spPr>
+        <p:txBody>
+          <a:bodyPr wrap="square" anchor="ctr" lIns="0" rIns="0" tIns="0" bIns="0"/>
+          <a:lstStyle/>
+          <a:p>
+            <a:pPr algn="l"/>
+            <a:r>
+              <a:rPr sz="3200" b="1" i="0">
+                <a:solidFill>
+                  <a:srgbClr val="03306E"/>
+                </a:solidFill>
+                <a:latin typeface="Cambria"/>
+              </a:rPr>
+              <a:t>Quick check: Why poor workmanship matters</a:t>
+            </a:r>
+          </a:p>
+        </p:txBody>
+      </p:sp>
+      <p:sp>
+        <p:nvSpPr>
+          <p:cNvPr id="4" name="TextBox 3"/>
+          <p:cNvSpPr txBox="1"/>
+          <p:nvPr/>
+        </p:nvSpPr>
+        <p:spPr>
+          <a:xfrm>
+            <a:off x="548640" y="6446520"/>
+            <a:ext cx="8229600" cy="274320"/>
+          </a:xfrm>
+          <a:prstGeom prst="rect">
+            <a:avLst/>
+          </a:prstGeom>
+          <a:noFill/>
+        </p:spPr>
+        <p:txBody>
+          <a:bodyPr wrap="square" anchor="t" lIns="0" rIns="0" tIns="0" bIns="0"/>
+          <a:lstStyle/>
+          <a:p>
+            <a:pPr algn="l"/>
+            <a:r>
+              <a:rPr sz="1000" b="0" i="0">
+                <a:solidFill>
+                  <a:srgbClr val="54595D"/>
+                </a:solidFill>
+                <a:latin typeface="Calibri"/>
+              </a:rPr>
+              <a:t>Digital Support and Security T Level  ·  Testing, Certification and Troubleshooting</a:t>
+            </a:r>
+          </a:p>
+        </p:txBody>
+      </p:sp>
+      <p:sp>
+        <p:nvSpPr>
+          <p:cNvPr id="5" name="TextBox 4"/>
+          <p:cNvSpPr txBox="1"/>
+          <p:nvPr/>
+        </p:nvSpPr>
+        <p:spPr>
+          <a:xfrm>
+            <a:off x="10728655" y="6446520"/>
+            <a:ext cx="914400" cy="274320"/>
+          </a:xfrm>
+          <a:prstGeom prst="rect">
+            <a:avLst/>
+          </a:prstGeom>
+          <a:noFill/>
+        </p:spPr>
+        <p:txBody>
+          <a:bodyPr wrap="square" anchor="t" lIns="0" rIns="0" tIns="0" bIns="0"/>
+          <a:lstStyle/>
+          <a:p>
+            <a:pPr algn="r"/>
+            <a:r>
+              <a:rPr sz="1000" b="0" i="0">
+                <a:solidFill>
+                  <a:srgbClr val="54595D"/>
+                </a:solidFill>
+                <a:latin typeface="Calibri"/>
+              </a:rPr>
+              <a:t>13</a:t>
+            </a:r>
+          </a:p>
+        </p:txBody>
+      </p:sp>
+      <p:sp>
+        <p:nvSpPr>
+          <p:cNvPr id="6" name="Oval 5"/>
+          <p:cNvSpPr/>
+          <p:nvPr/>
+        </p:nvSpPr>
+        <p:spPr>
+          <a:xfrm>
+            <a:off x="548640" y="1691640"/>
+            <a:ext cx="502920" cy="502920"/>
+          </a:xfrm>
+          <a:prstGeom prst="ellipse">
+            <a:avLst/>
+          </a:prstGeom>
+          <a:solidFill>
+            <a:srgbClr val="F2B705"/>
+          </a:solidFill>
+          <a:ln>
+            <a:noFill/>
+          </a:ln>
+          <a:effectLst/>
+        </p:spPr>
+        <p:style>
+          <a:lnRef idx="1">
+            <a:schemeClr val="accent1"/>
+          </a:lnRef>
+          <a:fillRef idx="3">
+            <a:schemeClr val="accent1"/>
+          </a:fillRef>
+          <a:effectRef idx="2">
+            <a:schemeClr val="accent1"/>
+          </a:effectRef>
+          <a:fontRef idx="minor">
+            <a:schemeClr val="lt1"/>
+          </a:fontRef>
+        </p:style>
+        <p:txBody>
+          <a:bodyPr rtlCol="0" anchor="ctr" lIns="0" rIns="0" tIns="0" bIns="0"/>
+          <a:lstStyle/>
+          <a:p>
+            <a:pPr algn="ctr"/>
+            <a:r>
+              <a:rPr sz="1600" b="1">
+                <a:solidFill>
+                  <a:srgbClr val="202122"/>
+                </a:solidFill>
+                <a:latin typeface="Calibri"/>
+              </a:rPr>
+              <a:t>1</a:t>
+            </a:r>
+          </a:p>
+        </p:txBody>
+      </p:sp>
+      <p:sp>
+        <p:nvSpPr>
+          <p:cNvPr id="7" name="TextBox 6"/>
+          <p:cNvSpPr txBox="1"/>
+          <p:nvPr/>
+        </p:nvSpPr>
+        <p:spPr>
+          <a:xfrm>
+            <a:off x="1371600" y="1645920"/>
+            <a:ext cx="10271455" cy="1188720"/>
+          </a:xfrm>
+          <a:prstGeom prst="rect">
+            <a:avLst/>
+          </a:prstGeom>
+          <a:noFill/>
+        </p:spPr>
+        <p:txBody>
+          <a:bodyPr wrap="square" anchor="t" lIns="0" rIns="0" tIns="0" bIns="0"/>
+          <a:lstStyle/>
+          <a:p>
+            <a:pPr algn="l"/>
+            <a:r>
+              <a:rPr sz="2400" b="0" i="0">
+                <a:solidFill>
+                  <a:srgbClr val="202122"/>
+                </a:solidFill>
+                <a:latin typeface="Calibri"/>
+              </a:rPr>
+              <a:t>Why does labelling matter?</a:t>
+            </a:r>
+          </a:p>
+        </p:txBody>
+      </p:sp>
+      <p:sp>
+        <p:nvSpPr>
+          <p:cNvPr id="8" name="Oval 7"/>
+          <p:cNvSpPr/>
+          <p:nvPr/>
+        </p:nvSpPr>
+        <p:spPr>
+          <a:xfrm>
+            <a:off x="548640" y="3108960"/>
+            <a:ext cx="502920" cy="502920"/>
+          </a:xfrm>
+          <a:prstGeom prst="ellipse">
+            <a:avLst/>
+          </a:prstGeom>
+          <a:solidFill>
+            <a:srgbClr val="F2B705"/>
+          </a:solidFill>
+          <a:ln>
+            <a:noFill/>
+          </a:ln>
+          <a:effectLst/>
+        </p:spPr>
+        <p:style>
+          <a:lnRef idx="1">
+            <a:schemeClr val="accent1"/>
+          </a:lnRef>
+          <a:fillRef idx="3">
+            <a:schemeClr val="accent1"/>
+          </a:fillRef>
+          <a:effectRef idx="2">
+            <a:schemeClr val="accent1"/>
+          </a:effectRef>
+          <a:fontRef idx="minor">
+            <a:schemeClr val="lt1"/>
+          </a:fontRef>
+        </p:style>
+        <p:txBody>
+          <a:bodyPr rtlCol="0" anchor="ctr" lIns="0" rIns="0" tIns="0" bIns="0"/>
+          <a:lstStyle/>
+          <a:p>
+            <a:pPr algn="ctr"/>
+            <a:r>
+              <a:rPr sz="1600" b="1">
+                <a:solidFill>
+                  <a:srgbClr val="202122"/>
+                </a:solidFill>
+                <a:latin typeface="Calibri"/>
+              </a:rPr>
+              <a:t>2</a:t>
+            </a:r>
+          </a:p>
+        </p:txBody>
+      </p:sp>
+      <p:sp>
+        <p:nvSpPr>
+          <p:cNvPr id="9" name="TextBox 8"/>
+          <p:cNvSpPr txBox="1"/>
+          <p:nvPr/>
+        </p:nvSpPr>
+        <p:spPr>
+          <a:xfrm>
+            <a:off x="1371600" y="3063240"/>
+            <a:ext cx="10271455" cy="1188720"/>
+          </a:xfrm>
+          <a:prstGeom prst="rect">
+            <a:avLst/>
+          </a:prstGeom>
+          <a:noFill/>
+        </p:spPr>
+        <p:txBody>
+          <a:bodyPr wrap="square" anchor="t" lIns="0" rIns="0" tIns="0" bIns="0"/>
+          <a:lstStyle/>
+          <a:p>
+            <a:pPr algn="l"/>
+            <a:r>
+              <a:rPr sz="2400" b="0" i="0">
+                <a:solidFill>
+                  <a:srgbClr val="202122"/>
+                </a:solidFill>
+                <a:latin typeface="Calibri"/>
+              </a:rPr>
+              <a:t>Give two business consequences of poor workmanship.</a:t>
+            </a:r>
+          </a:p>
+        </p:txBody>
+      </p:sp>
+      <p:sp>
+        <p:nvSpPr>
+          <p:cNvPr id="10" name="Oval 9"/>
+          <p:cNvSpPr/>
+          <p:nvPr/>
+        </p:nvSpPr>
+        <p:spPr>
+          <a:xfrm>
+            <a:off x="548640" y="4526280"/>
+            <a:ext cx="502920" cy="502920"/>
+          </a:xfrm>
+          <a:prstGeom prst="ellipse">
+            <a:avLst/>
+          </a:prstGeom>
+          <a:solidFill>
+            <a:srgbClr val="F2B705"/>
+          </a:solidFill>
+          <a:ln>
+            <a:noFill/>
+          </a:ln>
+          <a:effectLst/>
+        </p:spPr>
+        <p:style>
+          <a:lnRef idx="1">
+            <a:schemeClr val="accent1"/>
+          </a:lnRef>
+          <a:fillRef idx="3">
+            <a:schemeClr val="accent1"/>
+          </a:fillRef>
+          <a:effectRef idx="2">
+            <a:schemeClr val="accent1"/>
+          </a:effectRef>
+          <a:fontRef idx="minor">
+            <a:schemeClr val="lt1"/>
+          </a:fontRef>
+        </p:style>
+        <p:txBody>
+          <a:bodyPr rtlCol="0" anchor="ctr" lIns="0" rIns="0" tIns="0" bIns="0"/>
+          <a:lstStyle/>
+          <a:p>
+            <a:pPr algn="ctr"/>
+            <a:r>
+              <a:rPr sz="1600" b="1">
+                <a:solidFill>
+                  <a:srgbClr val="202122"/>
+                </a:solidFill>
+                <a:latin typeface="Calibri"/>
+              </a:rPr>
+              <a:t>3</a:t>
+            </a:r>
+          </a:p>
+        </p:txBody>
+      </p:sp>
+      <p:sp>
+        <p:nvSpPr>
+          <p:cNvPr id="11" name="TextBox 10"/>
+          <p:cNvSpPr txBox="1"/>
+          <p:nvPr/>
+        </p:nvSpPr>
+        <p:spPr>
+          <a:xfrm>
+            <a:off x="1371600" y="4480560"/>
+            <a:ext cx="10271455" cy="1188720"/>
+          </a:xfrm>
+          <a:prstGeom prst="rect">
+            <a:avLst/>
+          </a:prstGeom>
+          <a:noFill/>
+        </p:spPr>
+        <p:txBody>
+          <a:bodyPr wrap="square" anchor="t" lIns="0" rIns="0" tIns="0" bIns="0"/>
+          <a:lstStyle/>
+          <a:p>
+            <a:pPr algn="l"/>
+            <a:r>
+              <a:rPr sz="2400" b="0" i="0">
+                <a:solidFill>
+                  <a:srgbClr val="202122"/>
+                </a:solidFill>
+                <a:latin typeface="Calibri"/>
+              </a:rPr>
+              <a:t>Why test every cable, not a sample?</a:t>
+            </a:r>
+          </a:p>
+        </p:txBody>
+      </p:sp>
+      <p:sp>
+        <p:nvSpPr>
+          <p:cNvPr id="12" name="TextBox 11"/>
+          <p:cNvSpPr txBox="1"/>
+          <p:nvPr/>
+        </p:nvSpPr>
+        <p:spPr>
+          <a:xfrm>
+            <a:off x="548640" y="5852160"/>
+            <a:ext cx="11094415" cy="365760"/>
+          </a:xfrm>
+          <a:prstGeom prst="rect">
+            <a:avLst/>
+          </a:prstGeom>
+          <a:noFill/>
+        </p:spPr>
+        <p:txBody>
+          <a:bodyPr wrap="square" anchor="t" lIns="0" rIns="0" tIns="0" bIns="0"/>
+          <a:lstStyle/>
+          <a:p>
+            <a:pPr algn="l"/>
+            <a:r>
+              <a:rPr sz="1300" b="0" i="1">
+                <a:solidFill>
+                  <a:srgbClr val="54595D"/>
+                </a:solidFill>
+                <a:latin typeface="Calibri"/>
+              </a:rPr>
+              <a:t>Answer on mini whiteboards or in your book. Answers are in the speaker notes.</a:t>
+            </a:r>
+          </a:p>
+        </p:txBody>
+      </p:sp>
+    </p:spTree>
+  </p:cSld>
+  <p:clrMapOvr>
+    <a:masterClrMapping/>
+  </p:clrMapOvr>
+</p:sld>
+</file>
+
+<file path=ppt/slides/slide14.xml><?xml version="1.0" encoding="utf-8"?>
+<p:sld xmlns:a="http://schemas.openxmlformats.org/drawingml/2006/main" xmlns:p="http://schemas.openxmlformats.org/presentationml/2006/main" xmlns:r="http://schemas.openxmlformats.org/officeDocument/2006/relationships">
+  <p:cSld>
+    <p:bg>
+      <p:bgPr>
+        <a:solidFill>
+          <a:srgbClr val="FFFFFF"/>
+        </a:solidFill>
+        <a:effectLst/>
+      </p:bgPr>
+    </p:bg>
+    <p:spTree>
+      <p:nvGrpSpPr>
+        <p:cNvPr id="1" name=""/>
+        <p:cNvGrpSpPr/>
+        <p:nvPr/>
+      </p:nvGrpSpPr>
+      <p:grpSpPr/>
+      <p:sp>
+        <p:nvSpPr>
+          <p:cNvPr id="2" name="TextBox 1"/>
+          <p:cNvSpPr txBox="1"/>
+          <p:nvPr/>
+        </p:nvSpPr>
+        <p:spPr>
+          <a:xfrm>
+            <a:off x="548640" y="320040"/>
+            <a:ext cx="11094415" cy="274320"/>
+          </a:xfrm>
+          <a:prstGeom prst="rect">
+            <a:avLst/>
+          </a:prstGeom>
+          <a:noFill/>
+        </p:spPr>
+        <p:txBody>
+          <a:bodyPr wrap="square" anchor="t" lIns="0" rIns="0" tIns="0" bIns="0"/>
+          <a:lstStyle/>
+          <a:p>
+            <a:pPr algn="l"/>
+            <a:r>
+              <a:rPr sz="1100" b="1" i="0">
+                <a:solidFill>
+                  <a:srgbClr val="54595D"/>
+                </a:solidFill>
+                <a:latin typeface="Calibri"/>
+              </a:rPr>
+              <a:t>NETWORK CABLING  ·  Network Cabling Content Area 2</a:t>
+            </a:r>
+          </a:p>
+        </p:txBody>
+      </p:sp>
+      <p:sp>
+        <p:nvSpPr>
+          <p:cNvPr id="3" name="TextBox 2"/>
+          <p:cNvSpPr txBox="1"/>
+          <p:nvPr/>
+        </p:nvSpPr>
+        <p:spPr>
+          <a:xfrm>
+            <a:off x="548640" y="566928"/>
+            <a:ext cx="11094415" cy="822960"/>
+          </a:xfrm>
+          <a:prstGeom prst="rect">
+            <a:avLst/>
+          </a:prstGeom>
+          <a:noFill/>
+        </p:spPr>
+        <p:txBody>
+          <a:bodyPr wrap="square" anchor="ctr" lIns="0" rIns="0" tIns="0" bIns="0"/>
+          <a:lstStyle/>
+          <a:p>
+            <a:pPr algn="l"/>
+            <a:r>
+              <a:rPr sz="3200" b="1" i="0">
+                <a:solidFill>
+                  <a:srgbClr val="03306E"/>
+                </a:solidFill>
+                <a:latin typeface="Cambria"/>
+              </a:rPr>
+              <a:t>Check your understanding</a:t>
+            </a:r>
+          </a:p>
+        </p:txBody>
+      </p:sp>
+      <p:sp>
+        <p:nvSpPr>
+          <p:cNvPr id="4" name="TextBox 3"/>
+          <p:cNvSpPr txBox="1"/>
+          <p:nvPr/>
+        </p:nvSpPr>
+        <p:spPr>
+          <a:xfrm>
+            <a:off x="548640" y="6446520"/>
+            <a:ext cx="8229600" cy="274320"/>
+          </a:xfrm>
+          <a:prstGeom prst="rect">
+            <a:avLst/>
+          </a:prstGeom>
+          <a:noFill/>
+        </p:spPr>
+        <p:txBody>
+          <a:bodyPr wrap="square" anchor="t" lIns="0" rIns="0" tIns="0" bIns="0"/>
+          <a:lstStyle/>
+          <a:p>
+            <a:pPr algn="l"/>
+            <a:r>
+              <a:rPr sz="1000" b="0" i="0">
+                <a:solidFill>
+                  <a:srgbClr val="54595D"/>
+                </a:solidFill>
+                <a:latin typeface="Calibri"/>
+              </a:rPr>
+              <a:t>Digital Support and Security T Level  ·  Testing, Certification and Troubleshooting</a:t>
+            </a:r>
+          </a:p>
+        </p:txBody>
+      </p:sp>
+      <p:sp>
+        <p:nvSpPr>
+          <p:cNvPr id="5" name="TextBox 4"/>
+          <p:cNvSpPr txBox="1"/>
+          <p:nvPr/>
+        </p:nvSpPr>
+        <p:spPr>
+          <a:xfrm>
+            <a:off x="10728655" y="6446520"/>
+            <a:ext cx="914400" cy="274320"/>
+          </a:xfrm>
+          <a:prstGeom prst="rect">
+            <a:avLst/>
+          </a:prstGeom>
+          <a:noFill/>
+        </p:spPr>
+        <p:txBody>
+          <a:bodyPr wrap="square" anchor="t" lIns="0" rIns="0" tIns="0" bIns="0"/>
+          <a:lstStyle/>
+          <a:p>
+            <a:pPr algn="r"/>
+            <a:r>
+              <a:rPr sz="1000" b="0" i="0">
+                <a:solidFill>
+                  <a:srgbClr val="54595D"/>
+                </a:solidFill>
+                <a:latin typeface="Calibri"/>
+              </a:rPr>
+              <a:t>14</a:t>
+            </a:r>
+          </a:p>
+        </p:txBody>
+      </p:sp>
+      <p:sp>
+        <p:nvSpPr>
+          <p:cNvPr id="6" name="Oval 5"/>
+          <p:cNvSpPr/>
+          <p:nvPr/>
+        </p:nvSpPr>
+        <p:spPr>
+          <a:xfrm>
+            <a:off x="548640" y="1618488"/>
+            <a:ext cx="411480" cy="411480"/>
+          </a:xfrm>
+          <a:prstGeom prst="ellipse">
+            <a:avLst/>
+          </a:prstGeom>
+          <a:solidFill>
+            <a:srgbClr val="F2B705"/>
+          </a:solidFill>
+          <a:ln>
+            <a:noFill/>
+          </a:ln>
+          <a:effectLst/>
+        </p:spPr>
+        <p:style>
+          <a:lnRef idx="1">
+            <a:schemeClr val="accent1"/>
+          </a:lnRef>
+          <a:fillRef idx="3">
+            <a:schemeClr val="accent1"/>
+          </a:fillRef>
+          <a:effectRef idx="2">
+            <a:schemeClr val="accent1"/>
+          </a:effectRef>
+          <a:fontRef idx="minor">
+            <a:schemeClr val="lt1"/>
+          </a:fontRef>
+        </p:style>
+        <p:txBody>
+          <a:bodyPr rtlCol="0" anchor="ctr" lIns="0" rIns="0" tIns="0" bIns="0"/>
+          <a:lstStyle/>
+          <a:p>
+            <a:pPr algn="ctr"/>
+            <a:r>
+              <a:rPr sz="1400" b="1">
+                <a:solidFill>
+                  <a:srgbClr val="202122"/>
+                </a:solidFill>
+                <a:latin typeface="Calibri"/>
+              </a:rPr>
+              <a:t>1</a:t>
+            </a:r>
+          </a:p>
+        </p:txBody>
+      </p:sp>
+      <p:sp>
+        <p:nvSpPr>
+          <p:cNvPr id="7" name="TextBox 6"/>
+          <p:cNvSpPr txBox="1"/>
+          <p:nvPr/>
+        </p:nvSpPr>
+        <p:spPr>
+          <a:xfrm>
+            <a:off x="1234440" y="1600200"/>
+            <a:ext cx="10408615" cy="791870"/>
+          </a:xfrm>
+          <a:prstGeom prst="rect">
+            <a:avLst/>
+          </a:prstGeom>
+          <a:noFill/>
+        </p:spPr>
+        <p:txBody>
+          <a:bodyPr wrap="square" anchor="t" lIns="0" rIns="0" tIns="0" bIns="0"/>
+          <a:lstStyle/>
+          <a:p>
+            <a:pPr algn="l"/>
+            <a:r>
+              <a:rPr sz="2200" b="0" i="0">
+                <a:solidFill>
+                  <a:srgbClr val="202122"/>
+                </a:solidFill>
+                <a:latin typeface="Calibri"/>
+              </a:rPr>
+              <a:t>What is the difference between predictive and reactive maintenance?</a:t>
+            </a:r>
+          </a:p>
+        </p:txBody>
+      </p:sp>
+      <p:sp>
+        <p:nvSpPr>
+          <p:cNvPr id="8" name="Oval 7"/>
+          <p:cNvSpPr/>
+          <p:nvPr/>
+        </p:nvSpPr>
+        <p:spPr>
+          <a:xfrm>
+            <a:off x="548640" y="2574950"/>
+            <a:ext cx="411480" cy="411480"/>
+          </a:xfrm>
+          <a:prstGeom prst="ellipse">
+            <a:avLst/>
+          </a:prstGeom>
+          <a:solidFill>
+            <a:srgbClr val="F2B705"/>
+          </a:solidFill>
+          <a:ln>
+            <a:noFill/>
+          </a:ln>
+          <a:effectLst/>
+        </p:spPr>
+        <p:style>
+          <a:lnRef idx="1">
+            <a:schemeClr val="accent1"/>
+          </a:lnRef>
+          <a:fillRef idx="3">
+            <a:schemeClr val="accent1"/>
+          </a:fillRef>
+          <a:effectRef idx="2">
+            <a:schemeClr val="accent1"/>
+          </a:effectRef>
+          <a:fontRef idx="minor">
+            <a:schemeClr val="lt1"/>
+          </a:fontRef>
+        </p:style>
+        <p:txBody>
+          <a:bodyPr rtlCol="0" anchor="ctr" lIns="0" rIns="0" tIns="0" bIns="0"/>
+          <a:lstStyle/>
+          <a:p>
+            <a:pPr algn="ctr"/>
+            <a:r>
+              <a:rPr sz="1400" b="1">
+                <a:solidFill>
+                  <a:srgbClr val="202122"/>
+                </a:solidFill>
+                <a:latin typeface="Calibri"/>
+              </a:rPr>
+              <a:t>2</a:t>
+            </a:r>
+          </a:p>
+        </p:txBody>
+      </p:sp>
+      <p:sp>
+        <p:nvSpPr>
+          <p:cNvPr id="9" name="TextBox 8"/>
+          <p:cNvSpPr txBox="1"/>
+          <p:nvPr/>
+        </p:nvSpPr>
+        <p:spPr>
+          <a:xfrm>
+            <a:off x="1234440" y="2556662"/>
+            <a:ext cx="10408615" cy="791870"/>
+          </a:xfrm>
+          <a:prstGeom prst="rect">
+            <a:avLst/>
+          </a:prstGeom>
+          <a:noFill/>
+        </p:spPr>
+        <p:txBody>
+          <a:bodyPr wrap="square" anchor="t" lIns="0" rIns="0" tIns="0" bIns="0"/>
+          <a:lstStyle/>
+          <a:p>
+            <a:pPr algn="l"/>
+            <a:r>
+              <a:rPr sz="2200" b="0" i="0">
+                <a:solidFill>
+                  <a:srgbClr val="202122"/>
+                </a:solidFill>
+                <a:latin typeface="Calibri"/>
+              </a:rPr>
+              <a:t>Name two physical cabling failures.</a:t>
+            </a:r>
+          </a:p>
+        </p:txBody>
+      </p:sp>
+      <p:sp>
+        <p:nvSpPr>
+          <p:cNvPr id="10" name="Oval 9"/>
+          <p:cNvSpPr/>
+          <p:nvPr/>
+        </p:nvSpPr>
+        <p:spPr>
+          <a:xfrm>
+            <a:off x="548640" y="3531412"/>
+            <a:ext cx="411480" cy="411480"/>
+          </a:xfrm>
+          <a:prstGeom prst="ellipse">
+            <a:avLst/>
+          </a:prstGeom>
+          <a:solidFill>
+            <a:srgbClr val="F2B705"/>
+          </a:solidFill>
+          <a:ln>
+            <a:noFill/>
+          </a:ln>
+          <a:effectLst/>
+        </p:spPr>
+        <p:style>
+          <a:lnRef idx="1">
+            <a:schemeClr val="accent1"/>
+          </a:lnRef>
+          <a:fillRef idx="3">
+            <a:schemeClr val="accent1"/>
+          </a:fillRef>
+          <a:effectRef idx="2">
+            <a:schemeClr val="accent1"/>
+          </a:effectRef>
+          <a:fontRef idx="minor">
+            <a:schemeClr val="lt1"/>
+          </a:fontRef>
+        </p:style>
+        <p:txBody>
+          <a:bodyPr rtlCol="0" anchor="ctr" lIns="0" rIns="0" tIns="0" bIns="0"/>
+          <a:lstStyle/>
+          <a:p>
+            <a:pPr algn="ctr"/>
+            <a:r>
+              <a:rPr sz="1400" b="1">
+                <a:solidFill>
+                  <a:srgbClr val="202122"/>
+                </a:solidFill>
+                <a:latin typeface="Calibri"/>
+              </a:rPr>
+              <a:t>3</a:t>
+            </a:r>
+          </a:p>
+        </p:txBody>
+      </p:sp>
+      <p:sp>
+        <p:nvSpPr>
+          <p:cNvPr id="11" name="TextBox 10"/>
+          <p:cNvSpPr txBox="1"/>
+          <p:nvPr/>
+        </p:nvSpPr>
+        <p:spPr>
+          <a:xfrm>
+            <a:off x="1234440" y="3513124"/>
+            <a:ext cx="10408615" cy="791870"/>
+          </a:xfrm>
+          <a:prstGeom prst="rect">
+            <a:avLst/>
+          </a:prstGeom>
+          <a:noFill/>
+        </p:spPr>
+        <p:txBody>
+          <a:bodyPr wrap="square" anchor="t" lIns="0" rIns="0" tIns="0" bIns="0"/>
+          <a:lstStyle/>
+          <a:p>
+            <a:pPr algn="l"/>
+            <a:r>
+              <a:rPr sz="2200" b="0" i="0">
+                <a:solidFill>
+                  <a:srgbClr val="202122"/>
+                </a:solidFill>
+                <a:latin typeface="Calibri"/>
+              </a:rPr>
+              <a:t>What does NEXT stand for?</a:t>
+            </a:r>
+          </a:p>
+        </p:txBody>
+      </p:sp>
+      <p:sp>
+        <p:nvSpPr>
+          <p:cNvPr id="12" name="Oval 11"/>
+          <p:cNvSpPr/>
+          <p:nvPr/>
+        </p:nvSpPr>
+        <p:spPr>
+          <a:xfrm>
+            <a:off x="548640" y="4487875"/>
+            <a:ext cx="411480" cy="411480"/>
+          </a:xfrm>
+          <a:prstGeom prst="ellipse">
+            <a:avLst/>
+          </a:prstGeom>
+          <a:solidFill>
+            <a:srgbClr val="F2B705"/>
+          </a:solidFill>
+          <a:ln>
+            <a:noFill/>
+          </a:ln>
+          <a:effectLst/>
+        </p:spPr>
+        <p:style>
+          <a:lnRef idx="1">
+            <a:schemeClr val="accent1"/>
+          </a:lnRef>
+          <a:fillRef idx="3">
+            <a:schemeClr val="accent1"/>
+          </a:fillRef>
+          <a:effectRef idx="2">
+            <a:schemeClr val="accent1"/>
+          </a:effectRef>
+          <a:fontRef idx="minor">
+            <a:schemeClr val="lt1"/>
+          </a:fontRef>
+        </p:style>
+        <p:txBody>
+          <a:bodyPr rtlCol="0" anchor="ctr" lIns="0" rIns="0" tIns="0" bIns="0"/>
+          <a:lstStyle/>
+          <a:p>
+            <a:pPr algn="ctr"/>
+            <a:r>
+              <a:rPr sz="1400" b="1">
+                <a:solidFill>
+                  <a:srgbClr val="202122"/>
+                </a:solidFill>
+                <a:latin typeface="Calibri"/>
+              </a:rPr>
+              <a:t>4</a:t>
+            </a:r>
+          </a:p>
+        </p:txBody>
+      </p:sp>
+      <p:sp>
+        <p:nvSpPr>
+          <p:cNvPr id="13" name="TextBox 12"/>
+          <p:cNvSpPr txBox="1"/>
+          <p:nvPr/>
+        </p:nvSpPr>
+        <p:spPr>
+          <a:xfrm>
+            <a:off x="1234440" y="4469587"/>
+            <a:ext cx="10408615" cy="791870"/>
+          </a:xfrm>
+          <a:prstGeom prst="rect">
+            <a:avLst/>
+          </a:prstGeom>
+          <a:noFill/>
+        </p:spPr>
+        <p:txBody>
+          <a:bodyPr wrap="square" anchor="t" lIns="0" rIns="0" tIns="0" bIns="0"/>
+          <a:lstStyle/>
+          <a:p>
+            <a:pPr algn="l"/>
+            <a:r>
+              <a:rPr sz="2200" b="0" i="0">
+                <a:solidFill>
+                  <a:srgbClr val="202122"/>
+                </a:solidFill>
+                <a:latin typeface="Calibri"/>
+              </a:rPr>
+              <a:t>Which tool locates a break along a fibre?</a:t>
+            </a:r>
+          </a:p>
+        </p:txBody>
+      </p:sp>
+      <p:sp>
+        <p:nvSpPr>
+          <p:cNvPr id="14" name="Oval 13"/>
+          <p:cNvSpPr/>
+          <p:nvPr/>
+        </p:nvSpPr>
+        <p:spPr>
+          <a:xfrm>
+            <a:off x="548640" y="5444337"/>
+            <a:ext cx="411480" cy="411480"/>
+          </a:xfrm>
+          <a:prstGeom prst="ellipse">
+            <a:avLst/>
+          </a:prstGeom>
+          <a:solidFill>
+            <a:srgbClr val="F2B705"/>
+          </a:solidFill>
+          <a:ln>
+            <a:noFill/>
+          </a:ln>
+          <a:effectLst/>
+        </p:spPr>
+        <p:style>
+          <a:lnRef idx="1">
+            <a:schemeClr val="accent1"/>
+          </a:lnRef>
+          <a:fillRef idx="3">
+            <a:schemeClr val="accent1"/>
+          </a:fillRef>
+          <a:effectRef idx="2">
+            <a:schemeClr val="accent1"/>
+          </a:effectRef>
+          <a:fontRef idx="minor">
+            <a:schemeClr val="lt1"/>
+          </a:fontRef>
+        </p:style>
+        <p:txBody>
+          <a:bodyPr rtlCol="0" anchor="ctr" lIns="0" rIns="0" tIns="0" bIns="0"/>
+          <a:lstStyle/>
+          <a:p>
+            <a:pPr algn="ctr"/>
+            <a:r>
+              <a:rPr sz="1400" b="1">
+                <a:solidFill>
+                  <a:srgbClr val="202122"/>
+                </a:solidFill>
+                <a:latin typeface="Calibri"/>
+              </a:rPr>
+              <a:t>5</a:t>
+            </a:r>
+          </a:p>
+        </p:txBody>
+      </p:sp>
+      <p:sp>
+        <p:nvSpPr>
+          <p:cNvPr id="15" name="TextBox 14"/>
+          <p:cNvSpPr txBox="1"/>
+          <p:nvPr/>
+        </p:nvSpPr>
+        <p:spPr>
+          <a:xfrm>
+            <a:off x="1234440" y="5426049"/>
+            <a:ext cx="10408615" cy="791870"/>
+          </a:xfrm>
+          <a:prstGeom prst="rect">
+            <a:avLst/>
+          </a:prstGeom>
+          <a:noFill/>
+        </p:spPr>
+        <p:txBody>
+          <a:bodyPr wrap="square" anchor="t" lIns="0" rIns="0" tIns="0" bIns="0"/>
+          <a:lstStyle/>
+          <a:p>
+            <a:pPr algn="l"/>
+            <a:r>
+              <a:rPr sz="2200" b="0" i="0">
+                <a:solidFill>
+                  <a:srgbClr val="202122"/>
+                </a:solidFill>
+                <a:latin typeface="Calibri"/>
+              </a:rPr>
+              <a:t>Give one business consequence of failing certification.</a:t>
+            </a:r>
+          </a:p>
+        </p:txBody>
+      </p:sp>
+    </p:spTree>
+  </p:cSld>
+  <p:clrMapOvr>
+    <a:masterClrMapping/>
+  </p:clrMapOvr>
+</p:sld>
+</file>
+
+<file path=ppt/slides/slide15.xml><?xml version="1.0" encoding="utf-8"?>
+<p:sld xmlns:a="http://schemas.openxmlformats.org/drawingml/2006/main" xmlns:p="http://schemas.openxmlformats.org/presentationml/2006/main" xmlns:r="http://schemas.openxmlformats.org/officeDocument/2006/relationships">
+  <p:cSld>
+    <p:bg>
+      <p:bgPr>
+        <a:solidFill>
+          <a:srgbClr val="FFFFFF"/>
+        </a:solidFill>
+        <a:effectLst/>
+      </p:bgPr>
+    </p:bg>
+    <p:spTree>
+      <p:nvGrpSpPr>
+        <p:cNvPr id="1" name=""/>
+        <p:cNvGrpSpPr/>
+        <p:nvPr/>
+      </p:nvGrpSpPr>
+      <p:grpSpPr/>
+      <p:sp>
+        <p:nvSpPr>
+          <p:cNvPr id="2" name="TextBox 1"/>
+          <p:cNvSpPr txBox="1"/>
+          <p:nvPr/>
+        </p:nvSpPr>
+        <p:spPr>
+          <a:xfrm>
+            <a:off x="548640" y="320040"/>
+            <a:ext cx="11094415" cy="274320"/>
+          </a:xfrm>
+          <a:prstGeom prst="rect">
+            <a:avLst/>
+          </a:prstGeom>
+          <a:noFill/>
+        </p:spPr>
+        <p:txBody>
+          <a:bodyPr wrap="square" anchor="t" lIns="0" rIns="0" tIns="0" bIns="0"/>
+          <a:lstStyle/>
+          <a:p>
+            <a:pPr algn="l"/>
+            <a:r>
+              <a:rPr sz="1100" b="1" i="0">
+                <a:solidFill>
+                  <a:srgbClr val="54595D"/>
+                </a:solidFill>
+                <a:latin typeface="Calibri"/>
+              </a:rPr>
+              <a:t>NETWORK CABLING  ·  Network Cabling Content Area 2</a:t>
+            </a:r>
+          </a:p>
+        </p:txBody>
+      </p:sp>
+      <p:sp>
+        <p:nvSpPr>
+          <p:cNvPr id="3" name="TextBox 2"/>
+          <p:cNvSpPr txBox="1"/>
+          <p:nvPr/>
+        </p:nvSpPr>
+        <p:spPr>
+          <a:xfrm>
+            <a:off x="548640" y="566928"/>
+            <a:ext cx="11094415" cy="822960"/>
+          </a:xfrm>
+          <a:prstGeom prst="rect">
+            <a:avLst/>
+          </a:prstGeom>
+          <a:noFill/>
+        </p:spPr>
+        <p:txBody>
+          <a:bodyPr wrap="square" anchor="ctr" lIns="0" rIns="0" tIns="0" bIns="0"/>
+          <a:lstStyle/>
+          <a:p>
+            <a:pPr algn="l"/>
+            <a:r>
+              <a:rPr sz="3200" b="1" i="0">
+                <a:solidFill>
+                  <a:srgbClr val="03306E"/>
+                </a:solidFill>
+                <a:latin typeface="Cambria"/>
+              </a:rPr>
+              <a:t>Answers</a:t>
+            </a:r>
+          </a:p>
+        </p:txBody>
+      </p:sp>
+      <p:sp>
+        <p:nvSpPr>
+          <p:cNvPr id="4" name="TextBox 3"/>
+          <p:cNvSpPr txBox="1"/>
+          <p:nvPr/>
+        </p:nvSpPr>
+        <p:spPr>
+          <a:xfrm>
+            <a:off x="548640" y="6446520"/>
+            <a:ext cx="8229600" cy="274320"/>
+          </a:xfrm>
+          <a:prstGeom prst="rect">
+            <a:avLst/>
+          </a:prstGeom>
+          <a:noFill/>
+        </p:spPr>
+        <p:txBody>
+          <a:bodyPr wrap="square" anchor="t" lIns="0" rIns="0" tIns="0" bIns="0"/>
+          <a:lstStyle/>
+          <a:p>
+            <a:pPr algn="l"/>
+            <a:r>
+              <a:rPr sz="1000" b="0" i="0">
+                <a:solidFill>
+                  <a:srgbClr val="54595D"/>
+                </a:solidFill>
+                <a:latin typeface="Calibri"/>
+              </a:rPr>
+              <a:t>Digital Support and Security T Level  ·  Testing, Certification and Troubleshooting</a:t>
+            </a:r>
+          </a:p>
+        </p:txBody>
+      </p:sp>
+      <p:sp>
+        <p:nvSpPr>
+          <p:cNvPr id="5" name="TextBox 4"/>
+          <p:cNvSpPr txBox="1"/>
+          <p:nvPr/>
+        </p:nvSpPr>
+        <p:spPr>
+          <a:xfrm>
+            <a:off x="10728655" y="6446520"/>
+            <a:ext cx="914400" cy="274320"/>
+          </a:xfrm>
+          <a:prstGeom prst="rect">
+            <a:avLst/>
+          </a:prstGeom>
+          <a:noFill/>
+        </p:spPr>
+        <p:txBody>
+          <a:bodyPr wrap="square" anchor="t" lIns="0" rIns="0" tIns="0" bIns="0"/>
+          <a:lstStyle/>
+          <a:p>
+            <a:pPr algn="r"/>
+            <a:r>
+              <a:rPr sz="1000" b="0" i="0">
+                <a:solidFill>
+                  <a:srgbClr val="54595D"/>
+                </a:solidFill>
+                <a:latin typeface="Calibri"/>
+              </a:rPr>
+              <a:t>15</a:t>
+            </a:r>
+          </a:p>
+        </p:txBody>
+      </p:sp>
+      <p:sp>
+        <p:nvSpPr>
+          <p:cNvPr id="6" name="Oval 5"/>
+          <p:cNvSpPr/>
+          <p:nvPr/>
+        </p:nvSpPr>
+        <p:spPr>
+          <a:xfrm>
+            <a:off x="548640" y="1618488"/>
+            <a:ext cx="411480" cy="411480"/>
+          </a:xfrm>
+          <a:prstGeom prst="ellipse">
+            <a:avLst/>
+          </a:prstGeom>
+          <a:solidFill>
+            <a:srgbClr val="F2B705"/>
+          </a:solidFill>
+          <a:ln>
+            <a:noFill/>
+          </a:ln>
+          <a:effectLst/>
+        </p:spPr>
+        <p:style>
+          <a:lnRef idx="1">
+            <a:schemeClr val="accent1"/>
+          </a:lnRef>
+          <a:fillRef idx="3">
+            <a:schemeClr val="accent1"/>
+          </a:fillRef>
+          <a:effectRef idx="2">
+            <a:schemeClr val="accent1"/>
+          </a:effectRef>
+          <a:fontRef idx="minor">
+            <a:schemeClr val="lt1"/>
+          </a:fontRef>
+        </p:style>
+        <p:txBody>
+          <a:bodyPr rtlCol="0" anchor="ctr" lIns="0" rIns="0" tIns="0" bIns="0"/>
+          <a:lstStyle/>
+          <a:p>
+            <a:pPr algn="ctr"/>
+            <a:r>
+              <a:rPr sz="1400" b="1">
+                <a:solidFill>
+                  <a:srgbClr val="202122"/>
+                </a:solidFill>
+                <a:latin typeface="Calibri"/>
+              </a:rPr>
+              <a:t>1</a:t>
+            </a:r>
+          </a:p>
+        </p:txBody>
+      </p:sp>
+      <p:sp>
+        <p:nvSpPr>
+          <p:cNvPr id="7" name="TextBox 6"/>
+          <p:cNvSpPr txBox="1"/>
+          <p:nvPr/>
+        </p:nvSpPr>
+        <p:spPr>
+          <a:xfrm>
+            <a:off x="1234440" y="1600200"/>
+            <a:ext cx="10408615" cy="791870"/>
+          </a:xfrm>
+          <a:prstGeom prst="rect">
+            <a:avLst/>
+          </a:prstGeom>
+          <a:noFill/>
+        </p:spPr>
+        <p:txBody>
+          <a:bodyPr wrap="square" anchor="t" lIns="0" rIns="0" tIns="0" bIns="0"/>
+          <a:lstStyle/>
+          <a:p>
+            <a:pPr algn="l"/>
+            <a:r>
+              <a:rPr sz="1800" b="0" i="0">
+                <a:solidFill>
+                  <a:srgbClr val="54595D"/>
+                </a:solidFill>
+                <a:latin typeface="Calibri"/>
+              </a:rPr>
+              <a:t>What is the difference between predictive and reactive maintenance?</a:t>
+            </a:r>
+          </a:p>
+          <a:p>
+            <a:r>
+              <a:rPr sz="1800" b="1">
+                <a:solidFill>
+                  <a:srgbClr val="03306E"/>
+                </a:solidFill>
+                <a:latin typeface="Calibri"/>
+              </a:rPr>
+              <a:t>Predictive replaces before failure; reactive runs to failure.</a:t>
+            </a:r>
+          </a:p>
+        </p:txBody>
+      </p:sp>
+      <p:sp>
+        <p:nvSpPr>
+          <p:cNvPr id="8" name="Oval 7"/>
+          <p:cNvSpPr/>
+          <p:nvPr/>
+        </p:nvSpPr>
+        <p:spPr>
+          <a:xfrm>
+            <a:off x="548640" y="2574950"/>
+            <a:ext cx="411480" cy="411480"/>
+          </a:xfrm>
+          <a:prstGeom prst="ellipse">
+            <a:avLst/>
+          </a:prstGeom>
+          <a:solidFill>
+            <a:srgbClr val="F2B705"/>
+          </a:solidFill>
+          <a:ln>
+            <a:noFill/>
+          </a:ln>
+          <a:effectLst/>
+        </p:spPr>
+        <p:style>
+          <a:lnRef idx="1">
+            <a:schemeClr val="accent1"/>
+          </a:lnRef>
+          <a:fillRef idx="3">
+            <a:schemeClr val="accent1"/>
+          </a:fillRef>
+          <a:effectRef idx="2">
+            <a:schemeClr val="accent1"/>
+          </a:effectRef>
+          <a:fontRef idx="minor">
+            <a:schemeClr val="lt1"/>
+          </a:fontRef>
+        </p:style>
+        <p:txBody>
+          <a:bodyPr rtlCol="0" anchor="ctr" lIns="0" rIns="0" tIns="0" bIns="0"/>
+          <a:lstStyle/>
+          <a:p>
+            <a:pPr algn="ctr"/>
+            <a:r>
+              <a:rPr sz="1400" b="1">
+                <a:solidFill>
+                  <a:srgbClr val="202122"/>
+                </a:solidFill>
+                <a:latin typeface="Calibri"/>
+              </a:rPr>
+              <a:t>2</a:t>
+            </a:r>
+          </a:p>
+        </p:txBody>
+      </p:sp>
+      <p:sp>
+        <p:nvSpPr>
+          <p:cNvPr id="9" name="TextBox 8"/>
+          <p:cNvSpPr txBox="1"/>
+          <p:nvPr/>
+        </p:nvSpPr>
+        <p:spPr>
+          <a:xfrm>
+            <a:off x="1234440" y="2556662"/>
+            <a:ext cx="10408615" cy="791870"/>
+          </a:xfrm>
+          <a:prstGeom prst="rect">
+            <a:avLst/>
+          </a:prstGeom>
+          <a:noFill/>
+        </p:spPr>
+        <p:txBody>
+          <a:bodyPr wrap="square" anchor="t" lIns="0" rIns="0" tIns="0" bIns="0"/>
+          <a:lstStyle/>
+          <a:p>
+            <a:pPr algn="l"/>
+            <a:r>
+              <a:rPr sz="1800" b="0" i="0">
+                <a:solidFill>
+                  <a:srgbClr val="54595D"/>
+                </a:solidFill>
+                <a:latin typeface="Calibri"/>
+              </a:rPr>
+              <a:t>Name two physical cabling failures.</a:t>
+            </a:r>
+          </a:p>
+          <a:p>
+            <a:r>
+              <a:rPr sz="1800" b="1">
+                <a:solidFill>
+                  <a:srgbClr val="03306E"/>
+                </a:solidFill>
+                <a:latin typeface="Calibri"/>
+              </a:rPr>
+              <a:t>Any two, e.g. wrong pin-out, open circuit, bent pins.</a:t>
+            </a:r>
+          </a:p>
+        </p:txBody>
+      </p:sp>
+      <p:sp>
+        <p:nvSpPr>
+          <p:cNvPr id="10" name="Oval 9"/>
+          <p:cNvSpPr/>
+          <p:nvPr/>
+        </p:nvSpPr>
+        <p:spPr>
+          <a:xfrm>
+            <a:off x="548640" y="3531412"/>
+            <a:ext cx="411480" cy="411480"/>
+          </a:xfrm>
+          <a:prstGeom prst="ellipse">
+            <a:avLst/>
+          </a:prstGeom>
+          <a:solidFill>
+            <a:srgbClr val="F2B705"/>
+          </a:solidFill>
+          <a:ln>
+            <a:noFill/>
+          </a:ln>
+          <a:effectLst/>
+        </p:spPr>
+        <p:style>
+          <a:lnRef idx="1">
+            <a:schemeClr val="accent1"/>
+          </a:lnRef>
+          <a:fillRef idx="3">
+            <a:schemeClr val="accent1"/>
+          </a:fillRef>
+          <a:effectRef idx="2">
+            <a:schemeClr val="accent1"/>
+          </a:effectRef>
+          <a:fontRef idx="minor">
+            <a:schemeClr val="lt1"/>
+          </a:fontRef>
+        </p:style>
+        <p:txBody>
+          <a:bodyPr rtlCol="0" anchor="ctr" lIns="0" rIns="0" tIns="0" bIns="0"/>
+          <a:lstStyle/>
+          <a:p>
+            <a:pPr algn="ctr"/>
+            <a:r>
+              <a:rPr sz="1400" b="1">
+                <a:solidFill>
+                  <a:srgbClr val="202122"/>
+                </a:solidFill>
+                <a:latin typeface="Calibri"/>
+              </a:rPr>
+              <a:t>3</a:t>
+            </a:r>
+          </a:p>
+        </p:txBody>
+      </p:sp>
+      <p:sp>
+        <p:nvSpPr>
+          <p:cNvPr id="11" name="TextBox 10"/>
+          <p:cNvSpPr txBox="1"/>
+          <p:nvPr/>
+        </p:nvSpPr>
+        <p:spPr>
+          <a:xfrm>
+            <a:off x="1234440" y="3513124"/>
+            <a:ext cx="10408615" cy="791870"/>
+          </a:xfrm>
+          <a:prstGeom prst="rect">
+            <a:avLst/>
+          </a:prstGeom>
+          <a:noFill/>
+        </p:spPr>
+        <p:txBody>
+          <a:bodyPr wrap="square" anchor="t" lIns="0" rIns="0" tIns="0" bIns="0"/>
+          <a:lstStyle/>
+          <a:p>
+            <a:pPr algn="l"/>
+            <a:r>
+              <a:rPr sz="1800" b="0" i="0">
+                <a:solidFill>
+                  <a:srgbClr val="54595D"/>
+                </a:solidFill>
+                <a:latin typeface="Calibri"/>
+              </a:rPr>
+              <a:t>What does NEXT stand for?</a:t>
+            </a:r>
+          </a:p>
+          <a:p>
+            <a:r>
+              <a:rPr sz="1800" b="1">
+                <a:solidFill>
+                  <a:srgbClr val="03306E"/>
+                </a:solidFill>
+                <a:latin typeface="Calibri"/>
+              </a:rPr>
+              <a:t>Near-end crosstalk.</a:t>
+            </a:r>
+          </a:p>
+        </p:txBody>
+      </p:sp>
+      <p:sp>
+        <p:nvSpPr>
+          <p:cNvPr id="12" name="Oval 11"/>
+          <p:cNvSpPr/>
+          <p:nvPr/>
+        </p:nvSpPr>
+        <p:spPr>
+          <a:xfrm>
+            <a:off x="548640" y="4487875"/>
+            <a:ext cx="411480" cy="411480"/>
+          </a:xfrm>
+          <a:prstGeom prst="ellipse">
+            <a:avLst/>
+          </a:prstGeom>
+          <a:solidFill>
+            <a:srgbClr val="F2B705"/>
+          </a:solidFill>
+          <a:ln>
+            <a:noFill/>
+          </a:ln>
+          <a:effectLst/>
+        </p:spPr>
+        <p:style>
+          <a:lnRef idx="1">
+            <a:schemeClr val="accent1"/>
+          </a:lnRef>
+          <a:fillRef idx="3">
+            <a:schemeClr val="accent1"/>
+          </a:fillRef>
+          <a:effectRef idx="2">
+            <a:schemeClr val="accent1"/>
+          </a:effectRef>
+          <a:fontRef idx="minor">
+            <a:schemeClr val="lt1"/>
+          </a:fontRef>
+        </p:style>
+        <p:txBody>
+          <a:bodyPr rtlCol="0" anchor="ctr" lIns="0" rIns="0" tIns="0" bIns="0"/>
+          <a:lstStyle/>
+          <a:p>
+            <a:pPr algn="ctr"/>
+            <a:r>
+              <a:rPr sz="1400" b="1">
+                <a:solidFill>
+                  <a:srgbClr val="202122"/>
+                </a:solidFill>
+                <a:latin typeface="Calibri"/>
+              </a:rPr>
+              <a:t>4</a:t>
+            </a:r>
+          </a:p>
+        </p:txBody>
+      </p:sp>
+      <p:sp>
+        <p:nvSpPr>
+          <p:cNvPr id="13" name="TextBox 12"/>
+          <p:cNvSpPr txBox="1"/>
+          <p:nvPr/>
+        </p:nvSpPr>
+        <p:spPr>
+          <a:xfrm>
+            <a:off x="1234440" y="4469587"/>
+            <a:ext cx="10408615" cy="791870"/>
+          </a:xfrm>
+          <a:prstGeom prst="rect">
+            <a:avLst/>
+          </a:prstGeom>
+          <a:noFill/>
+        </p:spPr>
+        <p:txBody>
+          <a:bodyPr wrap="square" anchor="t" lIns="0" rIns="0" tIns="0" bIns="0"/>
+          <a:lstStyle/>
+          <a:p>
+            <a:pPr algn="l"/>
+            <a:r>
+              <a:rPr sz="1800" b="0" i="0">
+                <a:solidFill>
+                  <a:srgbClr val="54595D"/>
+                </a:solidFill>
+                <a:latin typeface="Calibri"/>
+              </a:rPr>
+              <a:t>Which tool locates a break along a fibre?</a:t>
+            </a:r>
+          </a:p>
+          <a:p>
+            <a:r>
+              <a:rPr sz="1800" b="1">
+                <a:solidFill>
+                  <a:srgbClr val="03306E"/>
+                </a:solidFill>
+                <a:latin typeface="Calibri"/>
+              </a:rPr>
+              <a:t>An OTDR.</a:t>
+            </a:r>
+          </a:p>
+        </p:txBody>
+      </p:sp>
+      <p:sp>
+        <p:nvSpPr>
+          <p:cNvPr id="14" name="Oval 13"/>
+          <p:cNvSpPr/>
+          <p:nvPr/>
+        </p:nvSpPr>
+        <p:spPr>
+          <a:xfrm>
+            <a:off x="548640" y="5444337"/>
+            <a:ext cx="411480" cy="411480"/>
+          </a:xfrm>
+          <a:prstGeom prst="ellipse">
+            <a:avLst/>
+          </a:prstGeom>
+          <a:solidFill>
+            <a:srgbClr val="F2B705"/>
+          </a:solidFill>
+          <a:ln>
+            <a:noFill/>
+          </a:ln>
+          <a:effectLst/>
+        </p:spPr>
+        <p:style>
+          <a:lnRef idx="1">
+            <a:schemeClr val="accent1"/>
+          </a:lnRef>
+          <a:fillRef idx="3">
+            <a:schemeClr val="accent1"/>
+          </a:fillRef>
+          <a:effectRef idx="2">
+            <a:schemeClr val="accent1"/>
+          </a:effectRef>
+          <a:fontRef idx="minor">
+            <a:schemeClr val="lt1"/>
+          </a:fontRef>
+        </p:style>
+        <p:txBody>
+          <a:bodyPr rtlCol="0" anchor="ctr" lIns="0" rIns="0" tIns="0" bIns="0"/>
+          <a:lstStyle/>
+          <a:p>
+            <a:pPr algn="ctr"/>
+            <a:r>
+              <a:rPr sz="1400" b="1">
+                <a:solidFill>
+                  <a:srgbClr val="202122"/>
+                </a:solidFill>
+                <a:latin typeface="Calibri"/>
+              </a:rPr>
+              <a:t>5</a:t>
+            </a:r>
+          </a:p>
+        </p:txBody>
+      </p:sp>
+      <p:sp>
+        <p:nvSpPr>
+          <p:cNvPr id="15" name="TextBox 14"/>
+          <p:cNvSpPr txBox="1"/>
+          <p:nvPr/>
+        </p:nvSpPr>
+        <p:spPr>
+          <a:xfrm>
+            <a:off x="1234440" y="5426049"/>
+            <a:ext cx="10408615" cy="791870"/>
+          </a:xfrm>
+          <a:prstGeom prst="rect">
+            <a:avLst/>
+          </a:prstGeom>
+          <a:noFill/>
+        </p:spPr>
+        <p:txBody>
+          <a:bodyPr wrap="square" anchor="t" lIns="0" rIns="0" tIns="0" bIns="0"/>
+          <a:lstStyle/>
+          <a:p>
+            <a:pPr algn="l"/>
+            <a:r>
+              <a:rPr sz="1800" b="0" i="0">
+                <a:solidFill>
+                  <a:srgbClr val="54595D"/>
+                </a:solidFill>
+                <a:latin typeface="Calibri"/>
+              </a:rPr>
+              <a:t>Give one business consequence of failing certification.</a:t>
+            </a:r>
+          </a:p>
+          <a:p>
+            <a:r>
+              <a:rPr sz="1800" b="1">
+                <a:solidFill>
+                  <a:srgbClr val="03306E"/>
+                </a:solidFill>
+                <a:latin typeface="Calibri"/>
+              </a:rPr>
+              <a:t>E.g. revisit costs, SLA penalties, reputational damage.</a:t>
+            </a:r>
+          </a:p>
+        </p:txBody>
+      </p:sp>
+    </p:spTree>
+  </p:cSld>
+  <p:clrMapOvr>
+    <a:masterClrMapping/>
+  </p:clrMapOvr>
+</p:sld>
+</file>
+
+<file path=ppt/slides/slide16.xml><?xml version="1.0" encoding="utf-8"?>
+<p:sld xmlns:a="http://schemas.openxmlformats.org/drawingml/2006/main" xmlns:p="http://schemas.openxmlformats.org/presentationml/2006/main" xmlns:r="http://schemas.openxmlformats.org/officeDocument/2006/relationships">
+  <p:cSld>
+    <p:bg>
+      <p:bgPr>
+        <a:solidFill>
+          <a:srgbClr val="FFFFFF"/>
+        </a:solidFill>
+        <a:effectLst/>
+      </p:bgPr>
+    </p:bg>
+    <p:spTree>
+      <p:nvGrpSpPr>
+        <p:cNvPr id="1" name=""/>
+        <p:cNvGrpSpPr/>
+        <p:nvPr/>
+      </p:nvGrpSpPr>
+      <p:grpSpPr/>
+      <p:sp>
+        <p:nvSpPr>
+          <p:cNvPr id="2" name="TextBox 1"/>
+          <p:cNvSpPr txBox="1"/>
+          <p:nvPr/>
+        </p:nvSpPr>
+        <p:spPr>
+          <a:xfrm>
+            <a:off x="548640" y="320040"/>
+            <a:ext cx="11094415" cy="274320"/>
+          </a:xfrm>
+          <a:prstGeom prst="rect">
+            <a:avLst/>
+          </a:prstGeom>
+          <a:noFill/>
+        </p:spPr>
+        <p:txBody>
+          <a:bodyPr wrap="square" anchor="t" lIns="0" rIns="0" tIns="0" bIns="0"/>
+          <a:lstStyle/>
+          <a:p>
+            <a:pPr algn="l"/>
+            <a:r>
+              <a:rPr sz="1100" b="1" i="0">
+                <a:solidFill>
+                  <a:srgbClr val="54595D"/>
+                </a:solidFill>
+                <a:latin typeface="Calibri"/>
+              </a:rPr>
+              <a:t>NETWORK CABLING  ·  Network Cabling Content Area 2</a:t>
+            </a:r>
+          </a:p>
+        </p:txBody>
+      </p:sp>
+      <p:sp>
+        <p:nvSpPr>
+          <p:cNvPr id="3" name="TextBox 2"/>
+          <p:cNvSpPr txBox="1"/>
+          <p:nvPr/>
+        </p:nvSpPr>
+        <p:spPr>
+          <a:xfrm>
+            <a:off x="548640" y="566928"/>
+            <a:ext cx="11094415" cy="822960"/>
+          </a:xfrm>
+          <a:prstGeom prst="rect">
+            <a:avLst/>
+          </a:prstGeom>
+          <a:noFill/>
+        </p:spPr>
+        <p:txBody>
+          <a:bodyPr wrap="square" anchor="ctr" lIns="0" rIns="0" tIns="0" bIns="0"/>
+          <a:lstStyle/>
+          <a:p>
+            <a:pPr algn="l"/>
+            <a:r>
+              <a:rPr sz="3200" b="1" i="0">
+                <a:solidFill>
+                  <a:srgbClr val="03306E"/>
+                </a:solidFill>
+                <a:latin typeface="Cambria"/>
+              </a:rPr>
+              <a:t>Activity: Fault-find the patch leads</a:t>
+            </a:r>
+          </a:p>
+        </p:txBody>
+      </p:sp>
+      <p:sp>
+        <p:nvSpPr>
+          <p:cNvPr id="4" name="TextBox 3"/>
+          <p:cNvSpPr txBox="1"/>
+          <p:nvPr/>
+        </p:nvSpPr>
+        <p:spPr>
+          <a:xfrm>
+            <a:off x="548640" y="6446520"/>
+            <a:ext cx="8229600" cy="274320"/>
+          </a:xfrm>
+          <a:prstGeom prst="rect">
+            <a:avLst/>
+          </a:prstGeom>
+          <a:noFill/>
+        </p:spPr>
+        <p:txBody>
+          <a:bodyPr wrap="square" anchor="t" lIns="0" rIns="0" tIns="0" bIns="0"/>
+          <a:lstStyle/>
+          <a:p>
+            <a:pPr algn="l"/>
+            <a:r>
+              <a:rPr sz="1000" b="0" i="0">
+                <a:solidFill>
+                  <a:srgbClr val="54595D"/>
+                </a:solidFill>
+                <a:latin typeface="Calibri"/>
+              </a:rPr>
+              <a:t>Digital Support and Security T Level  ·  Testing, Certification and Troubleshooting</a:t>
+            </a:r>
+          </a:p>
+        </p:txBody>
+      </p:sp>
+      <p:sp>
+        <p:nvSpPr>
+          <p:cNvPr id="5" name="TextBox 4"/>
+          <p:cNvSpPr txBox="1"/>
+          <p:nvPr/>
+        </p:nvSpPr>
+        <p:spPr>
+          <a:xfrm>
+            <a:off x="10728655" y="6446520"/>
+            <a:ext cx="914400" cy="274320"/>
+          </a:xfrm>
+          <a:prstGeom prst="rect">
+            <a:avLst/>
+          </a:prstGeom>
+          <a:noFill/>
+        </p:spPr>
+        <p:txBody>
+          <a:bodyPr wrap="square" anchor="t" lIns="0" rIns="0" tIns="0" bIns="0"/>
+          <a:lstStyle/>
+          <a:p>
+            <a:pPr algn="r"/>
+            <a:r>
+              <a:rPr sz="1000" b="0" i="0">
+                <a:solidFill>
+                  <a:srgbClr val="54595D"/>
+                </a:solidFill>
+                <a:latin typeface="Calibri"/>
+              </a:rPr>
+              <a:t>16</a:t>
             </a:r>
           </a:p>
         </p:txBody>
@@ -4892,7 +8304,7 @@
 </p:sld>
 </file>
 
-<file path=ppt/slides/slide11.xml><?xml version="1.0" encoding="utf-8"?>
+<file path=ppt/slides/slide17.xml><?xml version="1.0" encoding="utf-8"?>
 <p:sld xmlns:a="http://schemas.openxmlformats.org/drawingml/2006/main" xmlns:p="http://schemas.openxmlformats.org/presentationml/2006/main" xmlns:r="http://schemas.openxmlformats.org/officeDocument/2006/relationships">
   <p:cSld>
     <p:bg>
@@ -7100,18 +10512,105 @@
       </p:sp>
       <p:sp>
         <p:nvSpPr>
-          <p:cNvPr id="6" name="Rounded Rectangle 5"/>
+          <p:cNvPr id="6" name="TextBox 5"/>
+          <p:cNvSpPr txBox="1"/>
+          <p:nvPr/>
+        </p:nvSpPr>
+        <p:spPr>
+          <a:xfrm>
+            <a:off x="548640" y="1554480"/>
+            <a:ext cx="6720840" cy="4617720"/>
+          </a:xfrm>
+          <a:prstGeom prst="rect">
+            <a:avLst/>
+          </a:prstGeom>
+          <a:noFill/>
+        </p:spPr>
+        <p:txBody>
+          <a:bodyPr wrap="square" lIns="0" rIns="0" tIns="0" bIns="0">
+            <a:spAutoFit/>
+          </a:bodyPr>
+          <a:lstStyle/>
+          <a:p>
+            <a:pPr>
+              <a:spcAft>
+                <a:spcPts val="1260"/>
+              </a:spcAft>
+            </a:pPr>
+            <a:r>
+              <a:rPr sz="2100" b="0">
+                <a:solidFill>
+                  <a:srgbClr val="202122"/>
+                </a:solidFill>
+                <a:latin typeface="Calibri"/>
+              </a:rPr>
+              <a:t>Cabling faults are either physical or technical.</a:t>
+            </a:r>
+          </a:p>
+          <a:p>
+            <a:pPr>
+              <a:spcAft>
+                <a:spcPts val="1260"/>
+              </a:spcAft>
+            </a:pPr>
+            <a:r>
+              <a:rPr sz="2100" b="0">
+                <a:solidFill>
+                  <a:srgbClr val="202122"/>
+                </a:solidFill>
+                <a:latin typeface="Calibri"/>
+              </a:rPr>
+              <a:t>Physical faults include the wrong cable type, incorrect pin-out, open circuits (a broken wire), shorts, bad ports, bent pins, cable damage, duplex or speed mismatches and the wrong containment.</a:t>
+            </a:r>
+          </a:p>
+          <a:p>
+            <a:pPr>
+              <a:spcAft>
+                <a:spcPts val="1260"/>
+              </a:spcAft>
+            </a:pPr>
+            <a:r>
+              <a:rPr sz="2100" b="0">
+                <a:solidFill>
+                  <a:srgbClr val="202122"/>
+                </a:solidFill>
+                <a:latin typeface="Calibri"/>
+              </a:rPr>
+              <a:t>Technical faults include attenuation, latency, jitter, crosstalk, electromagnetic interference, mismatched transceivers, transmit and receive fibres reversed, bottlenecks and hardware errors.</a:t>
+            </a:r>
+          </a:p>
+          <a:p>
+            <a:pPr>
+              <a:spcAft>
+                <a:spcPts val="1260"/>
+              </a:spcAft>
+            </a:pPr>
+            <a:r>
+              <a:rPr sz="2100" b="0">
+                <a:solidFill>
+                  <a:srgbClr val="202122"/>
+                </a:solidFill>
+                <a:latin typeface="Calibri"/>
+              </a:rPr>
+              <a:t>They show up as CRC errors, lost frames and packets, address conflicts and missing sequence numbers. Status LEDs are often the first clue.</a:t>
+            </a:r>
+          </a:p>
+        </p:txBody>
+      </p:sp>
+      <p:sp>
+        <p:nvSpPr>
+          <p:cNvPr id="7" name="Rounded Rectangle 6"/>
           <p:cNvSpPr/>
           <p:nvPr/>
         </p:nvSpPr>
         <p:spPr>
           <a:xfrm>
-            <a:off x="548640" y="1600200"/>
-            <a:ext cx="5364327" cy="640080"/>
+            <a:off x="7772400" y="1554480"/>
+            <a:ext cx="3867912" cy="4526280"/>
           </a:xfrm>
           <a:prstGeom prst="roundRect">
             <a:avLst>
-              <a:gd name="adj" fmla="val 15000"/>
+              <a:gd name="adj" fmla="val 8000"/>
             </a:avLst>
           </a:prstGeom>
           <a:solidFill>
@@ -7144,55 +10643,20 @@
       </p:sp>
       <p:sp>
         <p:nvSpPr>
-          <p:cNvPr id="7" name="TextBox 6"/>
-          <p:cNvSpPr txBox="1"/>
-          <p:nvPr/>
-        </p:nvSpPr>
-        <p:spPr>
-          <a:xfrm>
-            <a:off x="777240" y="1600200"/>
-            <a:ext cx="4907127" cy="640080"/>
-          </a:xfrm>
-          <a:prstGeom prst="rect">
-            <a:avLst/>
-          </a:prstGeom>
-          <a:noFill/>
-        </p:spPr>
-        <p:txBody>
-          <a:bodyPr wrap="square" anchor="ctr" lIns="0" rIns="0" tIns="0" bIns="0"/>
-          <a:lstStyle/>
-          <a:p>
-            <a:pPr algn="l"/>
-            <a:r>
-              <a:rPr sz="2000" b="1" i="0">
-                <a:solidFill>
-                  <a:srgbClr val="FFFFFF"/>
-                </a:solidFill>
-                <a:latin typeface="Calibri"/>
-              </a:rPr>
-              <a:t>Physical</a:t>
-            </a:r>
-          </a:p>
-        </p:txBody>
-      </p:sp>
-      <p:sp>
-        <p:nvSpPr>
-          <p:cNvPr id="8" name="Rounded Rectangle 7"/>
+          <p:cNvPr id="8" name="Oval 7"/>
           <p:cNvSpPr/>
           <p:nvPr/>
         </p:nvSpPr>
         <p:spPr>
           <a:xfrm>
-            <a:off x="548640" y="2377440"/>
-            <a:ext cx="5364327" cy="3794760"/>
-          </a:xfrm>
-          <a:prstGeom prst="roundRect">
-            <a:avLst>
-              <a:gd name="adj" fmla="val 4000"/>
-            </a:avLst>
+            <a:off x="8046720" y="1828800"/>
+            <a:ext cx="548640" cy="548640"/>
+          </a:xfrm>
+          <a:prstGeom prst="ellipse">
+            <a:avLst/>
           </a:prstGeom>
           <a:solidFill>
-            <a:srgbClr val="EAF3FF"/>
+            <a:srgbClr val="F2B705"/>
           </a:solidFill>
           <a:ln>
             <a:noFill/>
@@ -7214,9 +10678,20 @@
           </a:fontRef>
         </p:style>
         <p:txBody>
-          <a:bodyPr rtlCol="0" anchor="ctr"/>
-          <a:lstStyle/>
-          <a:p/>
+          <a:bodyPr rtlCol="0" anchor="ctr" lIns="0" rIns="0" tIns="0" bIns="0"/>
+          <a:lstStyle/>
+          <a:p>
+            <a:pPr algn="ctr"/>
+            <a:r>
+              <a:rPr sz="1300" b="1">
+                <a:solidFill>
+                  <a:srgbClr val="202122"/>
+                </a:solidFill>
+                <a:latin typeface="Calibri"/>
+              </a:rPr>
+              <a:t>e.g.</a:t>
+            </a:r>
+          </a:p>
         </p:txBody>
       </p:sp>
       <p:sp>
@@ -7227,371 +10702,60 @@
         </p:nvSpPr>
         <p:spPr>
           <a:xfrm>
-            <a:off x="822959" y="2606040"/>
-            <a:ext cx="4815687" cy="3337560"/>
-          </a:xfrm>
-          <a:prstGeom prst="rect">
-            <a:avLst/>
-          </a:prstGeom>
-          <a:noFill/>
-        </p:spPr>
-        <p:txBody>
-          <a:bodyPr wrap="square" lIns="0" rIns="0" tIns="0" bIns="0">
-            <a:spAutoFit/>
-          </a:bodyPr>
-          <a:lstStyle/>
-          <a:p>
-            <a:pPr marL="274320" indent="-274320">
-              <a:spcAft>
-                <a:spcPts val="990"/>
-              </a:spcAft>
-              <a:buClr>
-                <a:srgbClr val="0645AD"/>
-              </a:buClr>
-              <a:buFont typeface="Arial"/>
-              <a:buChar char="•"/>
-            </a:pPr>
-            <a:r>
-              <a:rPr sz="2200" b="0">
-                <a:solidFill>
-                  <a:srgbClr val="202122"/>
-                </a:solidFill>
-                <a:latin typeface="Calibri"/>
-              </a:rPr>
-              <a:t>Wrong cable type or pin-out</a:t>
-            </a:r>
-          </a:p>
-          <a:p>
-            <a:pPr marL="274320" indent="-274320">
-              <a:spcAft>
-                <a:spcPts val="990"/>
-              </a:spcAft>
-              <a:buClr>
-                <a:srgbClr val="0645AD"/>
-              </a:buClr>
-              <a:buFont typeface="Arial"/>
-              <a:buChar char="•"/>
-            </a:pPr>
-            <a:r>
-              <a:rPr sz="2200" b="0">
-                <a:solidFill>
-                  <a:srgbClr val="202122"/>
-                </a:solidFill>
-                <a:latin typeface="Calibri"/>
-              </a:rPr>
-              <a:t>Open or short circuit</a:t>
-            </a:r>
-          </a:p>
-          <a:p>
-            <a:pPr marL="274320" indent="-274320">
-              <a:spcAft>
-                <a:spcPts val="990"/>
-              </a:spcAft>
-              <a:buClr>
-                <a:srgbClr val="0645AD"/>
-              </a:buClr>
-              <a:buFont typeface="Arial"/>
-              <a:buChar char="•"/>
-            </a:pPr>
-            <a:r>
-              <a:rPr sz="2200" b="0">
-                <a:solidFill>
-                  <a:srgbClr val="202122"/>
-                </a:solidFill>
-                <a:latin typeface="Calibri"/>
-              </a:rPr>
-              <a:t>Bad port, bent pins, cable damage</a:t>
-            </a:r>
-          </a:p>
-          <a:p>
-            <a:pPr marL="274320" indent="-274320">
-              <a:spcAft>
-                <a:spcPts val="990"/>
-              </a:spcAft>
-              <a:buClr>
-                <a:srgbClr val="0645AD"/>
-              </a:buClr>
-              <a:buFont typeface="Arial"/>
-              <a:buChar char="•"/>
-            </a:pPr>
-            <a:r>
-              <a:rPr sz="2200" b="0">
-                <a:solidFill>
-                  <a:srgbClr val="202122"/>
-                </a:solidFill>
-                <a:latin typeface="Calibri"/>
-              </a:rPr>
-              <a:t>Duplex or speed mismatch</a:t>
-            </a:r>
-          </a:p>
-          <a:p>
-            <a:pPr marL="274320" indent="-274320">
-              <a:spcAft>
-                <a:spcPts val="990"/>
-              </a:spcAft>
-              <a:buClr>
-                <a:srgbClr val="0645AD"/>
-              </a:buClr>
-              <a:buFont typeface="Arial"/>
-              <a:buChar char="•"/>
-            </a:pPr>
-            <a:r>
-              <a:rPr sz="2200" b="0">
-                <a:solidFill>
-                  <a:srgbClr val="202122"/>
-                </a:solidFill>
-                <a:latin typeface="Calibri"/>
-              </a:rPr>
-              <a:t>Wrong containment</a:t>
-            </a:r>
-          </a:p>
-        </p:txBody>
-      </p:sp>
-      <p:sp>
-        <p:nvSpPr>
-          <p:cNvPr id="10" name="Rounded Rectangle 9"/>
-          <p:cNvSpPr/>
-          <p:nvPr/>
-        </p:nvSpPr>
-        <p:spPr>
-          <a:xfrm>
-            <a:off x="6278727" y="1600200"/>
-            <a:ext cx="5364327" cy="640080"/>
-          </a:xfrm>
-          <a:prstGeom prst="roundRect">
-            <a:avLst>
-              <a:gd name="adj" fmla="val 15000"/>
-            </a:avLst>
-          </a:prstGeom>
-          <a:solidFill>
-            <a:srgbClr val="0645AD"/>
-          </a:solidFill>
-          <a:ln>
-            <a:noFill/>
-          </a:ln>
-          <a:effectLst/>
-        </p:spPr>
-        <p:style>
-          <a:lnRef idx="1">
-            <a:schemeClr val="accent1"/>
-          </a:lnRef>
-          <a:fillRef idx="3">
-            <a:schemeClr val="accent1"/>
-          </a:fillRef>
-          <a:effectRef idx="2">
-            <a:schemeClr val="accent1"/>
-          </a:effectRef>
-          <a:fontRef idx="minor">
-            <a:schemeClr val="lt1"/>
-          </a:fontRef>
-        </p:style>
-        <p:txBody>
-          <a:bodyPr rtlCol="0" anchor="ctr"/>
-          <a:lstStyle/>
-          <a:p/>
-        </p:txBody>
-      </p:sp>
-      <p:sp>
-        <p:nvSpPr>
-          <p:cNvPr id="11" name="TextBox 10"/>
-          <p:cNvSpPr txBox="1"/>
-          <p:nvPr/>
-        </p:nvSpPr>
-        <p:spPr>
-          <a:xfrm>
-            <a:off x="6507327" y="1600200"/>
-            <a:ext cx="4907127" cy="640080"/>
-          </a:xfrm>
-          <a:prstGeom prst="rect">
-            <a:avLst/>
-          </a:prstGeom>
-          <a:noFill/>
-        </p:spPr>
-        <p:txBody>
-          <a:bodyPr wrap="square" anchor="ctr" lIns="0" rIns="0" tIns="0" bIns="0"/>
+            <a:off x="8046720" y="2560320"/>
+            <a:ext cx="3291840" cy="365760"/>
+          </a:xfrm>
+          <a:prstGeom prst="rect">
+            <a:avLst/>
+          </a:prstGeom>
+          <a:noFill/>
+        </p:spPr>
+        <p:txBody>
+          <a:bodyPr wrap="square" anchor="t" lIns="0" rIns="0" tIns="0" bIns="0"/>
           <a:lstStyle/>
           <a:p>
             <a:pPr algn="l"/>
             <a:r>
-              <a:rPr sz="2000" b="1" i="0">
+              <a:rPr sz="1300" b="1" i="0">
+                <a:solidFill>
+                  <a:srgbClr val="A9C8F0"/>
+                </a:solidFill>
+                <a:latin typeface="Calibri"/>
+              </a:rPr>
+              <a:t>EXAMPLE</a:t>
+            </a:r>
+          </a:p>
+        </p:txBody>
+      </p:sp>
+      <p:sp>
+        <p:nvSpPr>
+          <p:cNvPr id="10" name="TextBox 9"/>
+          <p:cNvSpPr txBox="1"/>
+          <p:nvPr/>
+        </p:nvSpPr>
+        <p:spPr>
+          <a:xfrm>
+            <a:off x="8046720" y="2971800"/>
+            <a:ext cx="3291840" cy="2971800"/>
+          </a:xfrm>
+          <a:prstGeom prst="rect">
+            <a:avLst/>
+          </a:prstGeom>
+          <a:noFill/>
+        </p:spPr>
+        <p:txBody>
+          <a:bodyPr wrap="square" anchor="t" lIns="0" rIns="0" tIns="0" bIns="0"/>
+          <a:lstStyle/>
+          <a:p>
+            <a:pPr algn="l"/>
+            <a:r>
+              <a:rPr sz="1900" b="0" i="0">
                 <a:solidFill>
                   <a:srgbClr val="FFFFFF"/>
                 </a:solidFill>
-                <a:latin typeface="Calibri"/>
-              </a:rPr>
-              <a:t>Technical</a:t>
-            </a:r>
-          </a:p>
-        </p:txBody>
-      </p:sp>
-      <p:sp>
-        <p:nvSpPr>
-          <p:cNvPr id="12" name="Rounded Rectangle 11"/>
-          <p:cNvSpPr/>
-          <p:nvPr/>
-        </p:nvSpPr>
-        <p:spPr>
-          <a:xfrm>
-            <a:off x="6278727" y="2377440"/>
-            <a:ext cx="5364327" cy="3794760"/>
-          </a:xfrm>
-          <a:prstGeom prst="roundRect">
-            <a:avLst>
-              <a:gd name="adj" fmla="val 4000"/>
-            </a:avLst>
-          </a:prstGeom>
-          <a:solidFill>
-            <a:srgbClr val="EAF3FF"/>
-          </a:solidFill>
-          <a:ln>
-            <a:noFill/>
-          </a:ln>
-          <a:effectLst/>
-        </p:spPr>
-        <p:style>
-          <a:lnRef idx="1">
-            <a:schemeClr val="accent1"/>
-          </a:lnRef>
-          <a:fillRef idx="3">
-            <a:schemeClr val="accent1"/>
-          </a:fillRef>
-          <a:effectRef idx="2">
-            <a:schemeClr val="accent1"/>
-          </a:effectRef>
-          <a:fontRef idx="minor">
-            <a:schemeClr val="lt1"/>
-          </a:fontRef>
-        </p:style>
-        <p:txBody>
-          <a:bodyPr rtlCol="0" anchor="ctr"/>
-          <a:lstStyle/>
-          <a:p/>
-        </p:txBody>
-      </p:sp>
-      <p:sp>
-        <p:nvSpPr>
-          <p:cNvPr id="13" name="TextBox 12"/>
-          <p:cNvSpPr txBox="1"/>
-          <p:nvPr/>
-        </p:nvSpPr>
-        <p:spPr>
-          <a:xfrm>
-            <a:off x="6553047" y="2606040"/>
-            <a:ext cx="4815687" cy="3337560"/>
-          </a:xfrm>
-          <a:prstGeom prst="rect">
-            <a:avLst/>
-          </a:prstGeom>
-          <a:noFill/>
-        </p:spPr>
-        <p:txBody>
-          <a:bodyPr wrap="square" lIns="0" rIns="0" tIns="0" bIns="0">
-            <a:spAutoFit/>
-          </a:bodyPr>
-          <a:lstStyle/>
-          <a:p>
-            <a:pPr marL="274320" indent="-274320">
-              <a:spcAft>
-                <a:spcPts val="945"/>
-              </a:spcAft>
-              <a:buClr>
-                <a:srgbClr val="0645AD"/>
-              </a:buClr>
-              <a:buFont typeface="Arial"/>
-              <a:buChar char="•"/>
-            </a:pPr>
-            <a:r>
-              <a:rPr sz="2100" b="0">
-                <a:solidFill>
-                  <a:srgbClr val="202122"/>
-                </a:solidFill>
-                <a:latin typeface="Calibri"/>
-              </a:rPr>
-              <a:t>Attenuation, latency, jitter</a:t>
-            </a:r>
-          </a:p>
-          <a:p>
-            <a:pPr marL="274320" indent="-274320">
-              <a:spcAft>
-                <a:spcPts val="945"/>
-              </a:spcAft>
-              <a:buClr>
-                <a:srgbClr val="0645AD"/>
-              </a:buClr>
-              <a:buFont typeface="Arial"/>
-              <a:buChar char="•"/>
-            </a:pPr>
-            <a:r>
-              <a:rPr sz="2100" b="0">
-                <a:solidFill>
-                  <a:srgbClr val="202122"/>
-                </a:solidFill>
-                <a:latin typeface="Calibri"/>
-              </a:rPr>
-              <a:t>Crosstalk and EMI</a:t>
-            </a:r>
-          </a:p>
-          <a:p>
-            <a:pPr marL="274320" indent="-274320">
-              <a:spcAft>
-                <a:spcPts val="945"/>
-              </a:spcAft>
-              <a:buClr>
-                <a:srgbClr val="0645AD"/>
-              </a:buClr>
-              <a:buFont typeface="Arial"/>
-              <a:buChar char="•"/>
-            </a:pPr>
-            <a:r>
-              <a:rPr sz="2100" b="0">
-                <a:solidFill>
-                  <a:srgbClr val="202122"/>
-                </a:solidFill>
-                <a:latin typeface="Calibri"/>
-              </a:rPr>
-              <a:t>Transceiver mismatch, TX/RX reversed</a:t>
-            </a:r>
-          </a:p>
-          <a:p>
-            <a:pPr marL="274320" indent="-274320">
-              <a:spcAft>
-                <a:spcPts val="945"/>
-              </a:spcAft>
-              <a:buClr>
-                <a:srgbClr val="0645AD"/>
-              </a:buClr>
-              <a:buFont typeface="Arial"/>
-              <a:buChar char="•"/>
-            </a:pPr>
-            <a:r>
-              <a:rPr sz="2100" b="0">
-                <a:solidFill>
-                  <a:srgbClr val="202122"/>
-                </a:solidFill>
-                <a:latin typeface="Calibri"/>
-              </a:rPr>
-              <a:t>Bottlenecks and hardware errors</a:t>
-            </a:r>
-          </a:p>
-          <a:p>
-            <a:pPr marL="274320" indent="-274320">
-              <a:spcAft>
-                <a:spcPts val="945"/>
-              </a:spcAft>
-              <a:buClr>
-                <a:srgbClr val="0645AD"/>
-              </a:buClr>
-              <a:buFont typeface="Arial"/>
-              <a:buChar char="•"/>
-            </a:pPr>
-            <a:r>
-              <a:rPr sz="2100" b="0">
-                <a:solidFill>
-                  <a:srgbClr val="202122"/>
-                </a:solidFill>
-                <a:latin typeface="Calibri"/>
-              </a:rPr>
-              <a:t>Spotted via CRC errors, lost packets, address conflicts</a:t>
+                <a:latin typeface="Cambria"/>
+              </a:rPr>
+              <a:t>A desk only connects at 100 Mbps instead of 1 Gbps. A test shows one pair broken: gigabit needs all four pairs, 100 Mbps only two.</a:t>
             </a:r>
           </a:p>
         </p:txBody>
@@ -7683,7 +10847,7 @@
                 </a:solidFill>
                 <a:latin typeface="Cambria"/>
               </a:rPr>
-              <a:t>Testing standards</a:t>
+              <a:t>Common failures</a:t>
             </a:r>
           </a:p>
         </p:txBody>
@@ -7750,6 +10914,1111 @@
                 <a:latin typeface="Calibri"/>
               </a:rPr>
               <a:t>5</a:t>
+            </a:r>
+          </a:p>
+        </p:txBody>
+      </p:sp>
+      <p:sp>
+        <p:nvSpPr>
+          <p:cNvPr id="6" name="Rounded Rectangle 5"/>
+          <p:cNvSpPr/>
+          <p:nvPr/>
+        </p:nvSpPr>
+        <p:spPr>
+          <a:xfrm>
+            <a:off x="548640" y="1600200"/>
+            <a:ext cx="5364327" cy="640080"/>
+          </a:xfrm>
+          <a:prstGeom prst="roundRect">
+            <a:avLst>
+              <a:gd name="adj" fmla="val 15000"/>
+            </a:avLst>
+          </a:prstGeom>
+          <a:solidFill>
+            <a:srgbClr val="03306E"/>
+          </a:solidFill>
+          <a:ln>
+            <a:noFill/>
+          </a:ln>
+          <a:effectLst/>
+        </p:spPr>
+        <p:style>
+          <a:lnRef idx="1">
+            <a:schemeClr val="accent1"/>
+          </a:lnRef>
+          <a:fillRef idx="3">
+            <a:schemeClr val="accent1"/>
+          </a:fillRef>
+          <a:effectRef idx="2">
+            <a:schemeClr val="accent1"/>
+          </a:effectRef>
+          <a:fontRef idx="minor">
+            <a:schemeClr val="lt1"/>
+          </a:fontRef>
+        </p:style>
+        <p:txBody>
+          <a:bodyPr rtlCol="0" anchor="ctr"/>
+          <a:lstStyle/>
+          <a:p/>
+        </p:txBody>
+      </p:sp>
+      <p:sp>
+        <p:nvSpPr>
+          <p:cNvPr id="7" name="TextBox 6"/>
+          <p:cNvSpPr txBox="1"/>
+          <p:nvPr/>
+        </p:nvSpPr>
+        <p:spPr>
+          <a:xfrm>
+            <a:off x="777240" y="1600200"/>
+            <a:ext cx="4907127" cy="640080"/>
+          </a:xfrm>
+          <a:prstGeom prst="rect">
+            <a:avLst/>
+          </a:prstGeom>
+          <a:noFill/>
+        </p:spPr>
+        <p:txBody>
+          <a:bodyPr wrap="square" anchor="ctr" lIns="0" rIns="0" tIns="0" bIns="0"/>
+          <a:lstStyle/>
+          <a:p>
+            <a:pPr algn="l"/>
+            <a:r>
+              <a:rPr sz="2000" b="1" i="0">
+                <a:solidFill>
+                  <a:srgbClr val="FFFFFF"/>
+                </a:solidFill>
+                <a:latin typeface="Calibri"/>
+              </a:rPr>
+              <a:t>Physical</a:t>
+            </a:r>
+          </a:p>
+        </p:txBody>
+      </p:sp>
+      <p:sp>
+        <p:nvSpPr>
+          <p:cNvPr id="8" name="Rounded Rectangle 7"/>
+          <p:cNvSpPr/>
+          <p:nvPr/>
+        </p:nvSpPr>
+        <p:spPr>
+          <a:xfrm>
+            <a:off x="548640" y="2377440"/>
+            <a:ext cx="5364327" cy="3794760"/>
+          </a:xfrm>
+          <a:prstGeom prst="roundRect">
+            <a:avLst>
+              <a:gd name="adj" fmla="val 4000"/>
+            </a:avLst>
+          </a:prstGeom>
+          <a:solidFill>
+            <a:srgbClr val="EAF3FF"/>
+          </a:solidFill>
+          <a:ln>
+            <a:noFill/>
+          </a:ln>
+          <a:effectLst/>
+        </p:spPr>
+        <p:style>
+          <a:lnRef idx="1">
+            <a:schemeClr val="accent1"/>
+          </a:lnRef>
+          <a:fillRef idx="3">
+            <a:schemeClr val="accent1"/>
+          </a:fillRef>
+          <a:effectRef idx="2">
+            <a:schemeClr val="accent1"/>
+          </a:effectRef>
+          <a:fontRef idx="minor">
+            <a:schemeClr val="lt1"/>
+          </a:fontRef>
+        </p:style>
+        <p:txBody>
+          <a:bodyPr rtlCol="0" anchor="ctr"/>
+          <a:lstStyle/>
+          <a:p/>
+        </p:txBody>
+      </p:sp>
+      <p:sp>
+        <p:nvSpPr>
+          <p:cNvPr id="9" name="TextBox 8"/>
+          <p:cNvSpPr txBox="1"/>
+          <p:nvPr/>
+        </p:nvSpPr>
+        <p:spPr>
+          <a:xfrm>
+            <a:off x="822959" y="2606040"/>
+            <a:ext cx="4815687" cy="3337560"/>
+          </a:xfrm>
+          <a:prstGeom prst="rect">
+            <a:avLst/>
+          </a:prstGeom>
+          <a:noFill/>
+        </p:spPr>
+        <p:txBody>
+          <a:bodyPr wrap="square" lIns="0" rIns="0" tIns="0" bIns="0">
+            <a:spAutoFit/>
+          </a:bodyPr>
+          <a:lstStyle/>
+          <a:p>
+            <a:pPr marL="274320" indent="-274320">
+              <a:spcAft>
+                <a:spcPts val="990"/>
+              </a:spcAft>
+              <a:buClr>
+                <a:srgbClr val="0645AD"/>
+              </a:buClr>
+              <a:buFont typeface="Arial"/>
+              <a:buChar char="•"/>
+            </a:pPr>
+            <a:r>
+              <a:rPr sz="2200" b="0">
+                <a:solidFill>
+                  <a:srgbClr val="202122"/>
+                </a:solidFill>
+                <a:latin typeface="Calibri"/>
+              </a:rPr>
+              <a:t>Wrong cable type or pin-out</a:t>
+            </a:r>
+          </a:p>
+          <a:p>
+            <a:pPr marL="274320" indent="-274320">
+              <a:spcAft>
+                <a:spcPts val="990"/>
+              </a:spcAft>
+              <a:buClr>
+                <a:srgbClr val="0645AD"/>
+              </a:buClr>
+              <a:buFont typeface="Arial"/>
+              <a:buChar char="•"/>
+            </a:pPr>
+            <a:r>
+              <a:rPr sz="2200" b="0">
+                <a:solidFill>
+                  <a:srgbClr val="202122"/>
+                </a:solidFill>
+                <a:latin typeface="Calibri"/>
+              </a:rPr>
+              <a:t>Open or short circuit</a:t>
+            </a:r>
+          </a:p>
+          <a:p>
+            <a:pPr marL="274320" indent="-274320">
+              <a:spcAft>
+                <a:spcPts val="990"/>
+              </a:spcAft>
+              <a:buClr>
+                <a:srgbClr val="0645AD"/>
+              </a:buClr>
+              <a:buFont typeface="Arial"/>
+              <a:buChar char="•"/>
+            </a:pPr>
+            <a:r>
+              <a:rPr sz="2200" b="0">
+                <a:solidFill>
+                  <a:srgbClr val="202122"/>
+                </a:solidFill>
+                <a:latin typeface="Calibri"/>
+              </a:rPr>
+              <a:t>Bad port, bent pins, cable damage</a:t>
+            </a:r>
+          </a:p>
+          <a:p>
+            <a:pPr marL="274320" indent="-274320">
+              <a:spcAft>
+                <a:spcPts val="990"/>
+              </a:spcAft>
+              <a:buClr>
+                <a:srgbClr val="0645AD"/>
+              </a:buClr>
+              <a:buFont typeface="Arial"/>
+              <a:buChar char="•"/>
+            </a:pPr>
+            <a:r>
+              <a:rPr sz="2200" b="0">
+                <a:solidFill>
+                  <a:srgbClr val="202122"/>
+                </a:solidFill>
+                <a:latin typeface="Calibri"/>
+              </a:rPr>
+              <a:t>Duplex or speed mismatch</a:t>
+            </a:r>
+          </a:p>
+          <a:p>
+            <a:pPr marL="274320" indent="-274320">
+              <a:spcAft>
+                <a:spcPts val="990"/>
+              </a:spcAft>
+              <a:buClr>
+                <a:srgbClr val="0645AD"/>
+              </a:buClr>
+              <a:buFont typeface="Arial"/>
+              <a:buChar char="•"/>
+            </a:pPr>
+            <a:r>
+              <a:rPr sz="2200" b="0">
+                <a:solidFill>
+                  <a:srgbClr val="202122"/>
+                </a:solidFill>
+                <a:latin typeface="Calibri"/>
+              </a:rPr>
+              <a:t>Wrong containment</a:t>
+            </a:r>
+          </a:p>
+        </p:txBody>
+      </p:sp>
+      <p:sp>
+        <p:nvSpPr>
+          <p:cNvPr id="10" name="Rounded Rectangle 9"/>
+          <p:cNvSpPr/>
+          <p:nvPr/>
+        </p:nvSpPr>
+        <p:spPr>
+          <a:xfrm>
+            <a:off x="6278727" y="1600200"/>
+            <a:ext cx="5364327" cy="640080"/>
+          </a:xfrm>
+          <a:prstGeom prst="roundRect">
+            <a:avLst>
+              <a:gd name="adj" fmla="val 15000"/>
+            </a:avLst>
+          </a:prstGeom>
+          <a:solidFill>
+            <a:srgbClr val="0645AD"/>
+          </a:solidFill>
+          <a:ln>
+            <a:noFill/>
+          </a:ln>
+          <a:effectLst/>
+        </p:spPr>
+        <p:style>
+          <a:lnRef idx="1">
+            <a:schemeClr val="accent1"/>
+          </a:lnRef>
+          <a:fillRef idx="3">
+            <a:schemeClr val="accent1"/>
+          </a:fillRef>
+          <a:effectRef idx="2">
+            <a:schemeClr val="accent1"/>
+          </a:effectRef>
+          <a:fontRef idx="minor">
+            <a:schemeClr val="lt1"/>
+          </a:fontRef>
+        </p:style>
+        <p:txBody>
+          <a:bodyPr rtlCol="0" anchor="ctr"/>
+          <a:lstStyle/>
+          <a:p/>
+        </p:txBody>
+      </p:sp>
+      <p:sp>
+        <p:nvSpPr>
+          <p:cNvPr id="11" name="TextBox 10"/>
+          <p:cNvSpPr txBox="1"/>
+          <p:nvPr/>
+        </p:nvSpPr>
+        <p:spPr>
+          <a:xfrm>
+            <a:off x="6507327" y="1600200"/>
+            <a:ext cx="4907127" cy="640080"/>
+          </a:xfrm>
+          <a:prstGeom prst="rect">
+            <a:avLst/>
+          </a:prstGeom>
+          <a:noFill/>
+        </p:spPr>
+        <p:txBody>
+          <a:bodyPr wrap="square" anchor="ctr" lIns="0" rIns="0" tIns="0" bIns="0"/>
+          <a:lstStyle/>
+          <a:p>
+            <a:pPr algn="l"/>
+            <a:r>
+              <a:rPr sz="2000" b="1" i="0">
+                <a:solidFill>
+                  <a:srgbClr val="FFFFFF"/>
+                </a:solidFill>
+                <a:latin typeface="Calibri"/>
+              </a:rPr>
+              <a:t>Technical</a:t>
+            </a:r>
+          </a:p>
+        </p:txBody>
+      </p:sp>
+      <p:sp>
+        <p:nvSpPr>
+          <p:cNvPr id="12" name="Rounded Rectangle 11"/>
+          <p:cNvSpPr/>
+          <p:nvPr/>
+        </p:nvSpPr>
+        <p:spPr>
+          <a:xfrm>
+            <a:off x="6278727" y="2377440"/>
+            <a:ext cx="5364327" cy="3794760"/>
+          </a:xfrm>
+          <a:prstGeom prst="roundRect">
+            <a:avLst>
+              <a:gd name="adj" fmla="val 4000"/>
+            </a:avLst>
+          </a:prstGeom>
+          <a:solidFill>
+            <a:srgbClr val="EAF3FF"/>
+          </a:solidFill>
+          <a:ln>
+            <a:noFill/>
+          </a:ln>
+          <a:effectLst/>
+        </p:spPr>
+        <p:style>
+          <a:lnRef idx="1">
+            <a:schemeClr val="accent1"/>
+          </a:lnRef>
+          <a:fillRef idx="3">
+            <a:schemeClr val="accent1"/>
+          </a:fillRef>
+          <a:effectRef idx="2">
+            <a:schemeClr val="accent1"/>
+          </a:effectRef>
+          <a:fontRef idx="minor">
+            <a:schemeClr val="lt1"/>
+          </a:fontRef>
+        </p:style>
+        <p:txBody>
+          <a:bodyPr rtlCol="0" anchor="ctr"/>
+          <a:lstStyle/>
+          <a:p/>
+        </p:txBody>
+      </p:sp>
+      <p:sp>
+        <p:nvSpPr>
+          <p:cNvPr id="13" name="TextBox 12"/>
+          <p:cNvSpPr txBox="1"/>
+          <p:nvPr/>
+        </p:nvSpPr>
+        <p:spPr>
+          <a:xfrm>
+            <a:off x="6553047" y="2606040"/>
+            <a:ext cx="4815687" cy="3337560"/>
+          </a:xfrm>
+          <a:prstGeom prst="rect">
+            <a:avLst/>
+          </a:prstGeom>
+          <a:noFill/>
+        </p:spPr>
+        <p:txBody>
+          <a:bodyPr wrap="square" lIns="0" rIns="0" tIns="0" bIns="0">
+            <a:spAutoFit/>
+          </a:bodyPr>
+          <a:lstStyle/>
+          <a:p>
+            <a:pPr marL="274320" indent="-274320">
+              <a:spcAft>
+                <a:spcPts val="945"/>
+              </a:spcAft>
+              <a:buClr>
+                <a:srgbClr val="0645AD"/>
+              </a:buClr>
+              <a:buFont typeface="Arial"/>
+              <a:buChar char="•"/>
+            </a:pPr>
+            <a:r>
+              <a:rPr sz="2100" b="0">
+                <a:solidFill>
+                  <a:srgbClr val="202122"/>
+                </a:solidFill>
+                <a:latin typeface="Calibri"/>
+              </a:rPr>
+              <a:t>Attenuation, latency, jitter</a:t>
+            </a:r>
+          </a:p>
+          <a:p>
+            <a:pPr marL="274320" indent="-274320">
+              <a:spcAft>
+                <a:spcPts val="945"/>
+              </a:spcAft>
+              <a:buClr>
+                <a:srgbClr val="0645AD"/>
+              </a:buClr>
+              <a:buFont typeface="Arial"/>
+              <a:buChar char="•"/>
+            </a:pPr>
+            <a:r>
+              <a:rPr sz="2100" b="0">
+                <a:solidFill>
+                  <a:srgbClr val="202122"/>
+                </a:solidFill>
+                <a:latin typeface="Calibri"/>
+              </a:rPr>
+              <a:t>Crosstalk and EMI</a:t>
+            </a:r>
+          </a:p>
+          <a:p>
+            <a:pPr marL="274320" indent="-274320">
+              <a:spcAft>
+                <a:spcPts val="945"/>
+              </a:spcAft>
+              <a:buClr>
+                <a:srgbClr val="0645AD"/>
+              </a:buClr>
+              <a:buFont typeface="Arial"/>
+              <a:buChar char="•"/>
+            </a:pPr>
+            <a:r>
+              <a:rPr sz="2100" b="0">
+                <a:solidFill>
+                  <a:srgbClr val="202122"/>
+                </a:solidFill>
+                <a:latin typeface="Calibri"/>
+              </a:rPr>
+              <a:t>Transceiver mismatch, TX/RX reversed</a:t>
+            </a:r>
+          </a:p>
+          <a:p>
+            <a:pPr marL="274320" indent="-274320">
+              <a:spcAft>
+                <a:spcPts val="945"/>
+              </a:spcAft>
+              <a:buClr>
+                <a:srgbClr val="0645AD"/>
+              </a:buClr>
+              <a:buFont typeface="Arial"/>
+              <a:buChar char="•"/>
+            </a:pPr>
+            <a:r>
+              <a:rPr sz="2100" b="0">
+                <a:solidFill>
+                  <a:srgbClr val="202122"/>
+                </a:solidFill>
+                <a:latin typeface="Calibri"/>
+              </a:rPr>
+              <a:t>Bottlenecks and hardware errors</a:t>
+            </a:r>
+          </a:p>
+          <a:p>
+            <a:pPr marL="274320" indent="-274320">
+              <a:spcAft>
+                <a:spcPts val="945"/>
+              </a:spcAft>
+              <a:buClr>
+                <a:srgbClr val="0645AD"/>
+              </a:buClr>
+              <a:buFont typeface="Arial"/>
+              <a:buChar char="•"/>
+            </a:pPr>
+            <a:r>
+              <a:rPr sz="2100" b="0">
+                <a:solidFill>
+                  <a:srgbClr val="202122"/>
+                </a:solidFill>
+                <a:latin typeface="Calibri"/>
+              </a:rPr>
+              <a:t>Spotted via CRC errors, lost packets, address conflicts</a:t>
+            </a:r>
+          </a:p>
+        </p:txBody>
+      </p:sp>
+    </p:spTree>
+  </p:cSld>
+  <p:clrMapOvr>
+    <a:masterClrMapping/>
+  </p:clrMapOvr>
+</p:sld>
+</file>
+
+<file path=ppt/slides/slide6.xml><?xml version="1.0" encoding="utf-8"?>
+<p:sld xmlns:a="http://schemas.openxmlformats.org/drawingml/2006/main" xmlns:p="http://schemas.openxmlformats.org/presentationml/2006/main" xmlns:r="http://schemas.openxmlformats.org/officeDocument/2006/relationships">
+  <p:cSld>
+    <p:bg>
+      <p:bgPr>
+        <a:solidFill>
+          <a:srgbClr val="FFFFFF"/>
+        </a:solidFill>
+        <a:effectLst/>
+      </p:bgPr>
+    </p:bg>
+    <p:spTree>
+      <p:nvGrpSpPr>
+        <p:cNvPr id="1" name=""/>
+        <p:cNvGrpSpPr/>
+        <p:nvPr/>
+      </p:nvGrpSpPr>
+      <p:grpSpPr/>
+      <p:sp>
+        <p:nvSpPr>
+          <p:cNvPr id="2" name="TextBox 1"/>
+          <p:cNvSpPr txBox="1"/>
+          <p:nvPr/>
+        </p:nvSpPr>
+        <p:spPr>
+          <a:xfrm>
+            <a:off x="548640" y="320040"/>
+            <a:ext cx="11094415" cy="274320"/>
+          </a:xfrm>
+          <a:prstGeom prst="rect">
+            <a:avLst/>
+          </a:prstGeom>
+          <a:noFill/>
+        </p:spPr>
+        <p:txBody>
+          <a:bodyPr wrap="square" anchor="t" lIns="0" rIns="0" tIns="0" bIns="0"/>
+          <a:lstStyle/>
+          <a:p>
+            <a:pPr algn="l"/>
+            <a:r>
+              <a:rPr sz="1100" b="1" i="0">
+                <a:solidFill>
+                  <a:srgbClr val="54595D"/>
+                </a:solidFill>
+                <a:latin typeface="Calibri"/>
+              </a:rPr>
+              <a:t>NETWORK CABLING  ·  Network Cabling Content Area 2</a:t>
+            </a:r>
+          </a:p>
+        </p:txBody>
+      </p:sp>
+      <p:sp>
+        <p:nvSpPr>
+          <p:cNvPr id="3" name="TextBox 2"/>
+          <p:cNvSpPr txBox="1"/>
+          <p:nvPr/>
+        </p:nvSpPr>
+        <p:spPr>
+          <a:xfrm>
+            <a:off x="548640" y="566928"/>
+            <a:ext cx="11094415" cy="822960"/>
+          </a:xfrm>
+          <a:prstGeom prst="rect">
+            <a:avLst/>
+          </a:prstGeom>
+          <a:noFill/>
+        </p:spPr>
+        <p:txBody>
+          <a:bodyPr wrap="square" anchor="ctr" lIns="0" rIns="0" tIns="0" bIns="0"/>
+          <a:lstStyle/>
+          <a:p>
+            <a:pPr algn="l"/>
+            <a:r>
+              <a:rPr sz="3200" b="1" i="0">
+                <a:solidFill>
+                  <a:srgbClr val="03306E"/>
+                </a:solidFill>
+                <a:latin typeface="Cambria"/>
+              </a:rPr>
+              <a:t>Quick check: Common failures</a:t>
+            </a:r>
+          </a:p>
+        </p:txBody>
+      </p:sp>
+      <p:sp>
+        <p:nvSpPr>
+          <p:cNvPr id="4" name="TextBox 3"/>
+          <p:cNvSpPr txBox="1"/>
+          <p:nvPr/>
+        </p:nvSpPr>
+        <p:spPr>
+          <a:xfrm>
+            <a:off x="548640" y="6446520"/>
+            <a:ext cx="8229600" cy="274320"/>
+          </a:xfrm>
+          <a:prstGeom prst="rect">
+            <a:avLst/>
+          </a:prstGeom>
+          <a:noFill/>
+        </p:spPr>
+        <p:txBody>
+          <a:bodyPr wrap="square" anchor="t" lIns="0" rIns="0" tIns="0" bIns="0"/>
+          <a:lstStyle/>
+          <a:p>
+            <a:pPr algn="l"/>
+            <a:r>
+              <a:rPr sz="1000" b="0" i="0">
+                <a:solidFill>
+                  <a:srgbClr val="54595D"/>
+                </a:solidFill>
+                <a:latin typeface="Calibri"/>
+              </a:rPr>
+              <a:t>Digital Support and Security T Level  ·  Testing, Certification and Troubleshooting</a:t>
+            </a:r>
+          </a:p>
+        </p:txBody>
+      </p:sp>
+      <p:sp>
+        <p:nvSpPr>
+          <p:cNvPr id="5" name="TextBox 4"/>
+          <p:cNvSpPr txBox="1"/>
+          <p:nvPr/>
+        </p:nvSpPr>
+        <p:spPr>
+          <a:xfrm>
+            <a:off x="10728655" y="6446520"/>
+            <a:ext cx="914400" cy="274320"/>
+          </a:xfrm>
+          <a:prstGeom prst="rect">
+            <a:avLst/>
+          </a:prstGeom>
+          <a:noFill/>
+        </p:spPr>
+        <p:txBody>
+          <a:bodyPr wrap="square" anchor="t" lIns="0" rIns="0" tIns="0" bIns="0"/>
+          <a:lstStyle/>
+          <a:p>
+            <a:pPr algn="r"/>
+            <a:r>
+              <a:rPr sz="1000" b="0" i="0">
+                <a:solidFill>
+                  <a:srgbClr val="54595D"/>
+                </a:solidFill>
+                <a:latin typeface="Calibri"/>
+              </a:rPr>
+              <a:t>6</a:t>
+            </a:r>
+          </a:p>
+        </p:txBody>
+      </p:sp>
+      <p:sp>
+        <p:nvSpPr>
+          <p:cNvPr id="6" name="Oval 5"/>
+          <p:cNvSpPr/>
+          <p:nvPr/>
+        </p:nvSpPr>
+        <p:spPr>
+          <a:xfrm>
+            <a:off x="548640" y="1691640"/>
+            <a:ext cx="502920" cy="502920"/>
+          </a:xfrm>
+          <a:prstGeom prst="ellipse">
+            <a:avLst/>
+          </a:prstGeom>
+          <a:solidFill>
+            <a:srgbClr val="F2B705"/>
+          </a:solidFill>
+          <a:ln>
+            <a:noFill/>
+          </a:ln>
+          <a:effectLst/>
+        </p:spPr>
+        <p:style>
+          <a:lnRef idx="1">
+            <a:schemeClr val="accent1"/>
+          </a:lnRef>
+          <a:fillRef idx="3">
+            <a:schemeClr val="accent1"/>
+          </a:fillRef>
+          <a:effectRef idx="2">
+            <a:schemeClr val="accent1"/>
+          </a:effectRef>
+          <a:fontRef idx="minor">
+            <a:schemeClr val="lt1"/>
+          </a:fontRef>
+        </p:style>
+        <p:txBody>
+          <a:bodyPr rtlCol="0" anchor="ctr" lIns="0" rIns="0" tIns="0" bIns="0"/>
+          <a:lstStyle/>
+          <a:p>
+            <a:pPr algn="ctr"/>
+            <a:r>
+              <a:rPr sz="1600" b="1">
+                <a:solidFill>
+                  <a:srgbClr val="202122"/>
+                </a:solidFill>
+                <a:latin typeface="Calibri"/>
+              </a:rPr>
+              <a:t>1</a:t>
+            </a:r>
+          </a:p>
+        </p:txBody>
+      </p:sp>
+      <p:sp>
+        <p:nvSpPr>
+          <p:cNvPr id="7" name="TextBox 6"/>
+          <p:cNvSpPr txBox="1"/>
+          <p:nvPr/>
+        </p:nvSpPr>
+        <p:spPr>
+          <a:xfrm>
+            <a:off x="1371600" y="1645920"/>
+            <a:ext cx="10271455" cy="1188720"/>
+          </a:xfrm>
+          <a:prstGeom prst="rect">
+            <a:avLst/>
+          </a:prstGeom>
+          <a:noFill/>
+        </p:spPr>
+        <p:txBody>
+          <a:bodyPr wrap="square" anchor="t" lIns="0" rIns="0" tIns="0" bIns="0"/>
+          <a:lstStyle/>
+          <a:p>
+            <a:pPr algn="l"/>
+            <a:r>
+              <a:rPr sz="2400" b="0" i="0">
+                <a:solidFill>
+                  <a:srgbClr val="202122"/>
+                </a:solidFill>
+                <a:latin typeface="Calibri"/>
+              </a:rPr>
+              <a:t>What is an open circuit?</a:t>
+            </a:r>
+          </a:p>
+        </p:txBody>
+      </p:sp>
+      <p:sp>
+        <p:nvSpPr>
+          <p:cNvPr id="8" name="Oval 7"/>
+          <p:cNvSpPr/>
+          <p:nvPr/>
+        </p:nvSpPr>
+        <p:spPr>
+          <a:xfrm>
+            <a:off x="548640" y="3108960"/>
+            <a:ext cx="502920" cy="502920"/>
+          </a:xfrm>
+          <a:prstGeom prst="ellipse">
+            <a:avLst/>
+          </a:prstGeom>
+          <a:solidFill>
+            <a:srgbClr val="F2B705"/>
+          </a:solidFill>
+          <a:ln>
+            <a:noFill/>
+          </a:ln>
+          <a:effectLst/>
+        </p:spPr>
+        <p:style>
+          <a:lnRef idx="1">
+            <a:schemeClr val="accent1"/>
+          </a:lnRef>
+          <a:fillRef idx="3">
+            <a:schemeClr val="accent1"/>
+          </a:fillRef>
+          <a:effectRef idx="2">
+            <a:schemeClr val="accent1"/>
+          </a:effectRef>
+          <a:fontRef idx="minor">
+            <a:schemeClr val="lt1"/>
+          </a:fontRef>
+        </p:style>
+        <p:txBody>
+          <a:bodyPr rtlCol="0" anchor="ctr" lIns="0" rIns="0" tIns="0" bIns="0"/>
+          <a:lstStyle/>
+          <a:p>
+            <a:pPr algn="ctr"/>
+            <a:r>
+              <a:rPr sz="1600" b="1">
+                <a:solidFill>
+                  <a:srgbClr val="202122"/>
+                </a:solidFill>
+                <a:latin typeface="Calibri"/>
+              </a:rPr>
+              <a:t>2</a:t>
+            </a:r>
+          </a:p>
+        </p:txBody>
+      </p:sp>
+      <p:sp>
+        <p:nvSpPr>
+          <p:cNvPr id="9" name="TextBox 8"/>
+          <p:cNvSpPr txBox="1"/>
+          <p:nvPr/>
+        </p:nvSpPr>
+        <p:spPr>
+          <a:xfrm>
+            <a:off x="1371600" y="3063240"/>
+            <a:ext cx="10271455" cy="1188720"/>
+          </a:xfrm>
+          <a:prstGeom prst="rect">
+            <a:avLst/>
+          </a:prstGeom>
+          <a:noFill/>
+        </p:spPr>
+        <p:txBody>
+          <a:bodyPr wrap="square" anchor="t" lIns="0" rIns="0" tIns="0" bIns="0"/>
+          <a:lstStyle/>
+          <a:p>
+            <a:pPr algn="l"/>
+            <a:r>
+              <a:rPr sz="2400" b="0" i="0">
+                <a:solidFill>
+                  <a:srgbClr val="202122"/>
+                </a:solidFill>
+                <a:latin typeface="Calibri"/>
+              </a:rPr>
+              <a:t>What might cause CRC errors?</a:t>
+            </a:r>
+          </a:p>
+        </p:txBody>
+      </p:sp>
+      <p:sp>
+        <p:nvSpPr>
+          <p:cNvPr id="10" name="Oval 9"/>
+          <p:cNvSpPr/>
+          <p:nvPr/>
+        </p:nvSpPr>
+        <p:spPr>
+          <a:xfrm>
+            <a:off x="548640" y="4526280"/>
+            <a:ext cx="502920" cy="502920"/>
+          </a:xfrm>
+          <a:prstGeom prst="ellipse">
+            <a:avLst/>
+          </a:prstGeom>
+          <a:solidFill>
+            <a:srgbClr val="F2B705"/>
+          </a:solidFill>
+          <a:ln>
+            <a:noFill/>
+          </a:ln>
+          <a:effectLst/>
+        </p:spPr>
+        <p:style>
+          <a:lnRef idx="1">
+            <a:schemeClr val="accent1"/>
+          </a:lnRef>
+          <a:fillRef idx="3">
+            <a:schemeClr val="accent1"/>
+          </a:fillRef>
+          <a:effectRef idx="2">
+            <a:schemeClr val="accent1"/>
+          </a:effectRef>
+          <a:fontRef idx="minor">
+            <a:schemeClr val="lt1"/>
+          </a:fontRef>
+        </p:style>
+        <p:txBody>
+          <a:bodyPr rtlCol="0" anchor="ctr" lIns="0" rIns="0" tIns="0" bIns="0"/>
+          <a:lstStyle/>
+          <a:p>
+            <a:pPr algn="ctr"/>
+            <a:r>
+              <a:rPr sz="1600" b="1">
+                <a:solidFill>
+                  <a:srgbClr val="202122"/>
+                </a:solidFill>
+                <a:latin typeface="Calibri"/>
+              </a:rPr>
+              <a:t>3</a:t>
+            </a:r>
+          </a:p>
+        </p:txBody>
+      </p:sp>
+      <p:sp>
+        <p:nvSpPr>
+          <p:cNvPr id="11" name="TextBox 10"/>
+          <p:cNvSpPr txBox="1"/>
+          <p:nvPr/>
+        </p:nvSpPr>
+        <p:spPr>
+          <a:xfrm>
+            <a:off x="1371600" y="4480560"/>
+            <a:ext cx="10271455" cy="1188720"/>
+          </a:xfrm>
+          <a:prstGeom prst="rect">
+            <a:avLst/>
+          </a:prstGeom>
+          <a:noFill/>
+        </p:spPr>
+        <p:txBody>
+          <a:bodyPr wrap="square" anchor="t" lIns="0" rIns="0" tIns="0" bIns="0"/>
+          <a:lstStyle/>
+          <a:p>
+            <a:pPr algn="l"/>
+            <a:r>
+              <a:rPr sz="2400" b="0" i="0">
+                <a:solidFill>
+                  <a:srgbClr val="202122"/>
+                </a:solidFill>
+                <a:latin typeface="Calibri"/>
+              </a:rPr>
+              <a:t>Why might a link fall back to 100 Mbps?</a:t>
+            </a:r>
+          </a:p>
+        </p:txBody>
+      </p:sp>
+      <p:sp>
+        <p:nvSpPr>
+          <p:cNvPr id="12" name="TextBox 11"/>
+          <p:cNvSpPr txBox="1"/>
+          <p:nvPr/>
+        </p:nvSpPr>
+        <p:spPr>
+          <a:xfrm>
+            <a:off x="548640" y="5852160"/>
+            <a:ext cx="11094415" cy="365760"/>
+          </a:xfrm>
+          <a:prstGeom prst="rect">
+            <a:avLst/>
+          </a:prstGeom>
+          <a:noFill/>
+        </p:spPr>
+        <p:txBody>
+          <a:bodyPr wrap="square" anchor="t" lIns="0" rIns="0" tIns="0" bIns="0"/>
+          <a:lstStyle/>
+          <a:p>
+            <a:pPr algn="l"/>
+            <a:r>
+              <a:rPr sz="1300" b="0" i="1">
+                <a:solidFill>
+                  <a:srgbClr val="54595D"/>
+                </a:solidFill>
+                <a:latin typeface="Calibri"/>
+              </a:rPr>
+              <a:t>Answer on mini whiteboards or in your book. Answers are in the speaker notes.</a:t>
+            </a:r>
+          </a:p>
+        </p:txBody>
+      </p:sp>
+    </p:spTree>
+  </p:cSld>
+  <p:clrMapOvr>
+    <a:masterClrMapping/>
+  </p:clrMapOvr>
+</p:sld>
+</file>
+
+<file path=ppt/slides/slide7.xml><?xml version="1.0" encoding="utf-8"?>
+<p:sld xmlns:a="http://schemas.openxmlformats.org/drawingml/2006/main" xmlns:p="http://schemas.openxmlformats.org/presentationml/2006/main" xmlns:r="http://schemas.openxmlformats.org/officeDocument/2006/relationships">
+  <p:cSld>
+    <p:bg>
+      <p:bgPr>
+        <a:solidFill>
+          <a:srgbClr val="FFFFFF"/>
+        </a:solidFill>
+        <a:effectLst/>
+      </p:bgPr>
+    </p:bg>
+    <p:spTree>
+      <p:nvGrpSpPr>
+        <p:cNvPr id="1" name=""/>
+        <p:cNvGrpSpPr/>
+        <p:nvPr/>
+      </p:nvGrpSpPr>
+      <p:grpSpPr/>
+      <p:sp>
+        <p:nvSpPr>
+          <p:cNvPr id="2" name="TextBox 1"/>
+          <p:cNvSpPr txBox="1"/>
+          <p:nvPr/>
+        </p:nvSpPr>
+        <p:spPr>
+          <a:xfrm>
+            <a:off x="548640" y="320040"/>
+            <a:ext cx="11094415" cy="274320"/>
+          </a:xfrm>
+          <a:prstGeom prst="rect">
+            <a:avLst/>
+          </a:prstGeom>
+          <a:noFill/>
+        </p:spPr>
+        <p:txBody>
+          <a:bodyPr wrap="square" anchor="t" lIns="0" rIns="0" tIns="0" bIns="0"/>
+          <a:lstStyle/>
+          <a:p>
+            <a:pPr algn="l"/>
+            <a:r>
+              <a:rPr sz="1100" b="1" i="0">
+                <a:solidFill>
+                  <a:srgbClr val="54595D"/>
+                </a:solidFill>
+                <a:latin typeface="Calibri"/>
+              </a:rPr>
+              <a:t>NETWORK CABLING  ·  Network Cabling Content Area 2</a:t>
+            </a:r>
+          </a:p>
+        </p:txBody>
+      </p:sp>
+      <p:sp>
+        <p:nvSpPr>
+          <p:cNvPr id="3" name="TextBox 2"/>
+          <p:cNvSpPr txBox="1"/>
+          <p:nvPr/>
+        </p:nvSpPr>
+        <p:spPr>
+          <a:xfrm>
+            <a:off x="548640" y="566928"/>
+            <a:ext cx="11094415" cy="822960"/>
+          </a:xfrm>
+          <a:prstGeom prst="rect">
+            <a:avLst/>
+          </a:prstGeom>
+          <a:noFill/>
+        </p:spPr>
+        <p:txBody>
+          <a:bodyPr wrap="square" anchor="ctr" lIns="0" rIns="0" tIns="0" bIns="0"/>
+          <a:lstStyle/>
+          <a:p>
+            <a:pPr algn="l"/>
+            <a:r>
+              <a:rPr sz="3200" b="1" i="0">
+                <a:solidFill>
+                  <a:srgbClr val="03306E"/>
+                </a:solidFill>
+                <a:latin typeface="Cambria"/>
+              </a:rPr>
+              <a:t>Testing standards</a:t>
+            </a:r>
+          </a:p>
+        </p:txBody>
+      </p:sp>
+      <p:sp>
+        <p:nvSpPr>
+          <p:cNvPr id="4" name="TextBox 3"/>
+          <p:cNvSpPr txBox="1"/>
+          <p:nvPr/>
+        </p:nvSpPr>
+        <p:spPr>
+          <a:xfrm>
+            <a:off x="548640" y="6446520"/>
+            <a:ext cx="8229600" cy="274320"/>
+          </a:xfrm>
+          <a:prstGeom prst="rect">
+            <a:avLst/>
+          </a:prstGeom>
+          <a:noFill/>
+        </p:spPr>
+        <p:txBody>
+          <a:bodyPr wrap="square" anchor="t" lIns="0" rIns="0" tIns="0" bIns="0"/>
+          <a:lstStyle/>
+          <a:p>
+            <a:pPr algn="l"/>
+            <a:r>
+              <a:rPr sz="1000" b="0" i="0">
+                <a:solidFill>
+                  <a:srgbClr val="54595D"/>
+                </a:solidFill>
+                <a:latin typeface="Calibri"/>
+              </a:rPr>
+              <a:t>Digital Support and Security T Level  ·  Testing, Certification and Troubleshooting</a:t>
+            </a:r>
+          </a:p>
+        </p:txBody>
+      </p:sp>
+      <p:sp>
+        <p:nvSpPr>
+          <p:cNvPr id="5" name="TextBox 4"/>
+          <p:cNvSpPr txBox="1"/>
+          <p:nvPr/>
+        </p:nvSpPr>
+        <p:spPr>
+          <a:xfrm>
+            <a:off x="10728655" y="6446520"/>
+            <a:ext cx="914400" cy="274320"/>
+          </a:xfrm>
+          <a:prstGeom prst="rect">
+            <a:avLst/>
+          </a:prstGeom>
+          <a:noFill/>
+        </p:spPr>
+        <p:txBody>
+          <a:bodyPr wrap="square" anchor="t" lIns="0" rIns="0" tIns="0" bIns="0"/>
+          <a:lstStyle/>
+          <a:p>
+            <a:pPr algn="r"/>
+            <a:r>
+              <a:rPr sz="1000" b="0" i="0">
+                <a:solidFill>
+                  <a:srgbClr val="54595D"/>
+                </a:solidFill>
+                <a:latin typeface="Calibri"/>
+              </a:rPr>
+              <a:t>7</a:t>
             </a:r>
           </a:p>
         </p:txBody>
@@ -8064,1234 +12333,6 @@
 </p:sld>
 </file>
 
-<file path=ppt/slides/slide6.xml><?xml version="1.0" encoding="utf-8"?>
-<p:sld xmlns:a="http://schemas.openxmlformats.org/drawingml/2006/main" xmlns:p="http://schemas.openxmlformats.org/presentationml/2006/main" xmlns:r="http://schemas.openxmlformats.org/officeDocument/2006/relationships">
-  <p:cSld>
-    <p:bg>
-      <p:bgPr>
-        <a:solidFill>
-          <a:srgbClr val="FFFFFF"/>
-        </a:solidFill>
-        <a:effectLst/>
-      </p:bgPr>
-    </p:bg>
-    <p:spTree>
-      <p:nvGrpSpPr>
-        <p:cNvPr id="1" name=""/>
-        <p:cNvGrpSpPr/>
-        <p:nvPr/>
-      </p:nvGrpSpPr>
-      <p:grpSpPr/>
-      <p:sp>
-        <p:nvSpPr>
-          <p:cNvPr id="2" name="TextBox 1"/>
-          <p:cNvSpPr txBox="1"/>
-          <p:nvPr/>
-        </p:nvSpPr>
-        <p:spPr>
-          <a:xfrm>
-            <a:off x="548640" y="320040"/>
-            <a:ext cx="11094415" cy="274320"/>
-          </a:xfrm>
-          <a:prstGeom prst="rect">
-            <a:avLst/>
-          </a:prstGeom>
-          <a:noFill/>
-        </p:spPr>
-        <p:txBody>
-          <a:bodyPr wrap="square" anchor="t" lIns="0" rIns="0" tIns="0" bIns="0"/>
-          <a:lstStyle/>
-          <a:p>
-            <a:pPr algn="l"/>
-            <a:r>
-              <a:rPr sz="1100" b="1" i="0">
-                <a:solidFill>
-                  <a:srgbClr val="54595D"/>
-                </a:solidFill>
-                <a:latin typeface="Calibri"/>
-              </a:rPr>
-              <a:t>NETWORK CABLING  ·  Network Cabling Content Area 2</a:t>
-            </a:r>
-          </a:p>
-        </p:txBody>
-      </p:sp>
-      <p:sp>
-        <p:nvSpPr>
-          <p:cNvPr id="3" name="TextBox 2"/>
-          <p:cNvSpPr txBox="1"/>
-          <p:nvPr/>
-        </p:nvSpPr>
-        <p:spPr>
-          <a:xfrm>
-            <a:off x="548640" y="566928"/>
-            <a:ext cx="11094415" cy="822960"/>
-          </a:xfrm>
-          <a:prstGeom prst="rect">
-            <a:avLst/>
-          </a:prstGeom>
-          <a:noFill/>
-        </p:spPr>
-        <p:txBody>
-          <a:bodyPr wrap="square" anchor="ctr" lIns="0" rIns="0" tIns="0" bIns="0"/>
-          <a:lstStyle/>
-          <a:p>
-            <a:pPr algn="l"/>
-            <a:r>
-              <a:rPr sz="3200" b="1" i="0">
-                <a:solidFill>
-                  <a:srgbClr val="03306E"/>
-                </a:solidFill>
-                <a:latin typeface="Cambria"/>
-              </a:rPr>
-              <a:t>Certifying copper and fibre</a:t>
-            </a:r>
-          </a:p>
-        </p:txBody>
-      </p:sp>
-      <p:sp>
-        <p:nvSpPr>
-          <p:cNvPr id="4" name="TextBox 3"/>
-          <p:cNvSpPr txBox="1"/>
-          <p:nvPr/>
-        </p:nvSpPr>
-        <p:spPr>
-          <a:xfrm>
-            <a:off x="548640" y="6446520"/>
-            <a:ext cx="8229600" cy="274320"/>
-          </a:xfrm>
-          <a:prstGeom prst="rect">
-            <a:avLst/>
-          </a:prstGeom>
-          <a:noFill/>
-        </p:spPr>
-        <p:txBody>
-          <a:bodyPr wrap="square" anchor="t" lIns="0" rIns="0" tIns="0" bIns="0"/>
-          <a:lstStyle/>
-          <a:p>
-            <a:pPr algn="l"/>
-            <a:r>
-              <a:rPr sz="1000" b="0" i="0">
-                <a:solidFill>
-                  <a:srgbClr val="54595D"/>
-                </a:solidFill>
-                <a:latin typeface="Calibri"/>
-              </a:rPr>
-              <a:t>Digital Support and Security T Level  ·  Testing, Certification and Troubleshooting</a:t>
-            </a:r>
-          </a:p>
-        </p:txBody>
-      </p:sp>
-      <p:sp>
-        <p:nvSpPr>
-          <p:cNvPr id="5" name="TextBox 4"/>
-          <p:cNvSpPr txBox="1"/>
-          <p:nvPr/>
-        </p:nvSpPr>
-        <p:spPr>
-          <a:xfrm>
-            <a:off x="10728655" y="6446520"/>
-            <a:ext cx="914400" cy="274320"/>
-          </a:xfrm>
-          <a:prstGeom prst="rect">
-            <a:avLst/>
-          </a:prstGeom>
-          <a:noFill/>
-        </p:spPr>
-        <p:txBody>
-          <a:bodyPr wrap="square" anchor="t" lIns="0" rIns="0" tIns="0" bIns="0"/>
-          <a:lstStyle/>
-          <a:p>
-            <a:pPr algn="r"/>
-            <a:r>
-              <a:rPr sz="1000" b="0" i="0">
-                <a:solidFill>
-                  <a:srgbClr val="54595D"/>
-                </a:solidFill>
-                <a:latin typeface="Calibri"/>
-              </a:rPr>
-              <a:t>6</a:t>
-            </a:r>
-          </a:p>
-        </p:txBody>
-      </p:sp>
-      <p:sp>
-        <p:nvSpPr>
-          <p:cNvPr id="6" name="Rounded Rectangle 5"/>
-          <p:cNvSpPr/>
-          <p:nvPr/>
-        </p:nvSpPr>
-        <p:spPr>
-          <a:xfrm>
-            <a:off x="548640" y="1600200"/>
-            <a:ext cx="5364327" cy="640080"/>
-          </a:xfrm>
-          <a:prstGeom prst="roundRect">
-            <a:avLst>
-              <a:gd name="adj" fmla="val 15000"/>
-            </a:avLst>
-          </a:prstGeom>
-          <a:solidFill>
-            <a:srgbClr val="03306E"/>
-          </a:solidFill>
-          <a:ln>
-            <a:noFill/>
-          </a:ln>
-          <a:effectLst/>
-        </p:spPr>
-        <p:style>
-          <a:lnRef idx="1">
-            <a:schemeClr val="accent1"/>
-          </a:lnRef>
-          <a:fillRef idx="3">
-            <a:schemeClr val="accent1"/>
-          </a:fillRef>
-          <a:effectRef idx="2">
-            <a:schemeClr val="accent1"/>
-          </a:effectRef>
-          <a:fontRef idx="minor">
-            <a:schemeClr val="lt1"/>
-          </a:fontRef>
-        </p:style>
-        <p:txBody>
-          <a:bodyPr rtlCol="0" anchor="ctr"/>
-          <a:lstStyle/>
-          <a:p/>
-        </p:txBody>
-      </p:sp>
-      <p:sp>
-        <p:nvSpPr>
-          <p:cNvPr id="7" name="TextBox 6"/>
-          <p:cNvSpPr txBox="1"/>
-          <p:nvPr/>
-        </p:nvSpPr>
-        <p:spPr>
-          <a:xfrm>
-            <a:off x="777240" y="1600200"/>
-            <a:ext cx="4907127" cy="640080"/>
-          </a:xfrm>
-          <a:prstGeom prst="rect">
-            <a:avLst/>
-          </a:prstGeom>
-          <a:noFill/>
-        </p:spPr>
-        <p:txBody>
-          <a:bodyPr wrap="square" anchor="ctr" lIns="0" rIns="0" tIns="0" bIns="0"/>
-          <a:lstStyle/>
-          <a:p>
-            <a:pPr algn="l"/>
-            <a:r>
-              <a:rPr sz="2000" b="1" i="0">
-                <a:solidFill>
-                  <a:srgbClr val="FFFFFF"/>
-                </a:solidFill>
-                <a:latin typeface="Calibri"/>
-              </a:rPr>
-              <a:t>Copper</a:t>
-            </a:r>
-          </a:p>
-        </p:txBody>
-      </p:sp>
-      <p:sp>
-        <p:nvSpPr>
-          <p:cNvPr id="8" name="Rounded Rectangle 7"/>
-          <p:cNvSpPr/>
-          <p:nvPr/>
-        </p:nvSpPr>
-        <p:spPr>
-          <a:xfrm>
-            <a:off x="548640" y="2377440"/>
-            <a:ext cx="5364327" cy="3794760"/>
-          </a:xfrm>
-          <a:prstGeom prst="roundRect">
-            <a:avLst>
-              <a:gd name="adj" fmla="val 4000"/>
-            </a:avLst>
-          </a:prstGeom>
-          <a:solidFill>
-            <a:srgbClr val="EAF3FF"/>
-          </a:solidFill>
-          <a:ln>
-            <a:noFill/>
-          </a:ln>
-          <a:effectLst/>
-        </p:spPr>
-        <p:style>
-          <a:lnRef idx="1">
-            <a:schemeClr val="accent1"/>
-          </a:lnRef>
-          <a:fillRef idx="3">
-            <a:schemeClr val="accent1"/>
-          </a:fillRef>
-          <a:effectRef idx="2">
-            <a:schemeClr val="accent1"/>
-          </a:effectRef>
-          <a:fontRef idx="minor">
-            <a:schemeClr val="lt1"/>
-          </a:fontRef>
-        </p:style>
-        <p:txBody>
-          <a:bodyPr rtlCol="0" anchor="ctr"/>
-          <a:lstStyle/>
-          <a:p/>
-        </p:txBody>
-      </p:sp>
-      <p:sp>
-        <p:nvSpPr>
-          <p:cNvPr id="9" name="TextBox 8"/>
-          <p:cNvSpPr txBox="1"/>
-          <p:nvPr/>
-        </p:nvSpPr>
-        <p:spPr>
-          <a:xfrm>
-            <a:off x="822959" y="2606040"/>
-            <a:ext cx="4815687" cy="3337560"/>
-          </a:xfrm>
-          <a:prstGeom prst="rect">
-            <a:avLst/>
-          </a:prstGeom>
-          <a:noFill/>
-        </p:spPr>
-        <p:txBody>
-          <a:bodyPr wrap="square" lIns="0" rIns="0" tIns="0" bIns="0">
-            <a:spAutoFit/>
-          </a:bodyPr>
-          <a:lstStyle/>
-          <a:p>
-            <a:pPr marL="274320" indent="-274320">
-              <a:spcAft>
-                <a:spcPts val="990"/>
-              </a:spcAft>
-              <a:buClr>
-                <a:srgbClr val="0645AD"/>
-              </a:buClr>
-              <a:buFont typeface="Arial"/>
-              <a:buChar char="•"/>
-            </a:pPr>
-            <a:r>
-              <a:rPr sz="2200" b="0">
-                <a:solidFill>
-                  <a:srgbClr val="202122"/>
-                </a:solidFill>
-                <a:latin typeface="Calibri"/>
-              </a:rPr>
-              <a:t>Continuity tester, performance tester, certifier</a:t>
-            </a:r>
-          </a:p>
-          <a:p>
-            <a:pPr marL="274320" indent="-274320">
-              <a:spcAft>
-                <a:spcPts val="990"/>
-              </a:spcAft>
-              <a:buClr>
-                <a:srgbClr val="0645AD"/>
-              </a:buClr>
-              <a:buFont typeface="Arial"/>
-              <a:buChar char="•"/>
-            </a:pPr>
-            <a:r>
-              <a:rPr sz="2200" b="0">
-                <a:solidFill>
-                  <a:srgbClr val="202122"/>
-                </a:solidFill>
-                <a:latin typeface="Calibri"/>
-              </a:rPr>
-              <a:t>Wiremap</a:t>
-            </a:r>
-          </a:p>
-          <a:p>
-            <a:pPr marL="274320" indent="-274320">
-              <a:spcAft>
-                <a:spcPts val="990"/>
-              </a:spcAft>
-              <a:buClr>
-                <a:srgbClr val="0645AD"/>
-              </a:buClr>
-              <a:buFont typeface="Arial"/>
-              <a:buChar char="•"/>
-            </a:pPr>
-            <a:r>
-              <a:rPr sz="2200" b="0">
-                <a:solidFill>
-                  <a:srgbClr val="202122"/>
-                </a:solidFill>
-                <a:latin typeface="Calibri"/>
-              </a:rPr>
-              <a:t>Cable length</a:t>
-            </a:r>
-          </a:p>
-          <a:p>
-            <a:pPr marL="274320" indent="-274320">
-              <a:spcAft>
-                <a:spcPts val="990"/>
-              </a:spcAft>
-              <a:buClr>
-                <a:srgbClr val="0645AD"/>
-              </a:buClr>
-              <a:buFont typeface="Arial"/>
-              <a:buChar char="•"/>
-            </a:pPr>
-            <a:r>
-              <a:rPr sz="2200" b="0">
-                <a:solidFill>
-                  <a:srgbClr val="202122"/>
-                </a:solidFill>
-                <a:latin typeface="Calibri"/>
-              </a:rPr>
-              <a:t>Near-end crosstalk (NEXT)</a:t>
-            </a:r>
-          </a:p>
-        </p:txBody>
-      </p:sp>
-      <p:sp>
-        <p:nvSpPr>
-          <p:cNvPr id="10" name="Rounded Rectangle 9"/>
-          <p:cNvSpPr/>
-          <p:nvPr/>
-        </p:nvSpPr>
-        <p:spPr>
-          <a:xfrm>
-            <a:off x="6278727" y="1600200"/>
-            <a:ext cx="5364327" cy="640080"/>
-          </a:xfrm>
-          <a:prstGeom prst="roundRect">
-            <a:avLst>
-              <a:gd name="adj" fmla="val 15000"/>
-            </a:avLst>
-          </a:prstGeom>
-          <a:solidFill>
-            <a:srgbClr val="0645AD"/>
-          </a:solidFill>
-          <a:ln>
-            <a:noFill/>
-          </a:ln>
-          <a:effectLst/>
-        </p:spPr>
-        <p:style>
-          <a:lnRef idx="1">
-            <a:schemeClr val="accent1"/>
-          </a:lnRef>
-          <a:fillRef idx="3">
-            <a:schemeClr val="accent1"/>
-          </a:fillRef>
-          <a:effectRef idx="2">
-            <a:schemeClr val="accent1"/>
-          </a:effectRef>
-          <a:fontRef idx="minor">
-            <a:schemeClr val="lt1"/>
-          </a:fontRef>
-        </p:style>
-        <p:txBody>
-          <a:bodyPr rtlCol="0" anchor="ctr"/>
-          <a:lstStyle/>
-          <a:p/>
-        </p:txBody>
-      </p:sp>
-      <p:sp>
-        <p:nvSpPr>
-          <p:cNvPr id="11" name="TextBox 10"/>
-          <p:cNvSpPr txBox="1"/>
-          <p:nvPr/>
-        </p:nvSpPr>
-        <p:spPr>
-          <a:xfrm>
-            <a:off x="6507327" y="1600200"/>
-            <a:ext cx="4907127" cy="640080"/>
-          </a:xfrm>
-          <a:prstGeom prst="rect">
-            <a:avLst/>
-          </a:prstGeom>
-          <a:noFill/>
-        </p:spPr>
-        <p:txBody>
-          <a:bodyPr wrap="square" anchor="ctr" lIns="0" rIns="0" tIns="0" bIns="0"/>
-          <a:lstStyle/>
-          <a:p>
-            <a:pPr algn="l"/>
-            <a:r>
-              <a:rPr sz="2000" b="1" i="0">
-                <a:solidFill>
-                  <a:srgbClr val="FFFFFF"/>
-                </a:solidFill>
-                <a:latin typeface="Calibri"/>
-              </a:rPr>
-              <a:t>Fibre</a:t>
-            </a:r>
-          </a:p>
-        </p:txBody>
-      </p:sp>
-      <p:sp>
-        <p:nvSpPr>
-          <p:cNvPr id="12" name="Rounded Rectangle 11"/>
-          <p:cNvSpPr/>
-          <p:nvPr/>
-        </p:nvSpPr>
-        <p:spPr>
-          <a:xfrm>
-            <a:off x="6278727" y="2377440"/>
-            <a:ext cx="5364327" cy="3794760"/>
-          </a:xfrm>
-          <a:prstGeom prst="roundRect">
-            <a:avLst>
-              <a:gd name="adj" fmla="val 4000"/>
-            </a:avLst>
-          </a:prstGeom>
-          <a:solidFill>
-            <a:srgbClr val="EAF3FF"/>
-          </a:solidFill>
-          <a:ln>
-            <a:noFill/>
-          </a:ln>
-          <a:effectLst/>
-        </p:spPr>
-        <p:style>
-          <a:lnRef idx="1">
-            <a:schemeClr val="accent1"/>
-          </a:lnRef>
-          <a:fillRef idx="3">
-            <a:schemeClr val="accent1"/>
-          </a:fillRef>
-          <a:effectRef idx="2">
-            <a:schemeClr val="accent1"/>
-          </a:effectRef>
-          <a:fontRef idx="minor">
-            <a:schemeClr val="lt1"/>
-          </a:fontRef>
-        </p:style>
-        <p:txBody>
-          <a:bodyPr rtlCol="0" anchor="ctr"/>
-          <a:lstStyle/>
-          <a:p/>
-        </p:txBody>
-      </p:sp>
-      <p:sp>
-        <p:nvSpPr>
-          <p:cNvPr id="13" name="TextBox 12"/>
-          <p:cNvSpPr txBox="1"/>
-          <p:nvPr/>
-        </p:nvSpPr>
-        <p:spPr>
-          <a:xfrm>
-            <a:off x="6553047" y="2606040"/>
-            <a:ext cx="4815687" cy="3337560"/>
-          </a:xfrm>
-          <a:prstGeom prst="rect">
-            <a:avLst/>
-          </a:prstGeom>
-          <a:noFill/>
-        </p:spPr>
-        <p:txBody>
-          <a:bodyPr wrap="square" lIns="0" rIns="0" tIns="0" bIns="0">
-            <a:spAutoFit/>
-          </a:bodyPr>
-          <a:lstStyle/>
-          <a:p>
-            <a:pPr marL="274320" indent="-274320">
-              <a:spcAft>
-                <a:spcPts val="990"/>
-              </a:spcAft>
-              <a:buClr>
-                <a:srgbClr val="0645AD"/>
-              </a:buClr>
-              <a:buFont typeface="Arial"/>
-              <a:buChar char="•"/>
-            </a:pPr>
-            <a:r>
-              <a:rPr sz="2200" b="0">
-                <a:solidFill>
-                  <a:srgbClr val="202122"/>
-                </a:solidFill>
-                <a:latin typeface="Calibri"/>
-              </a:rPr>
-              <a:t>OLTS, light source and power meter</a:t>
-            </a:r>
-          </a:p>
-          <a:p>
-            <a:pPr marL="274320" indent="-274320">
-              <a:spcAft>
-                <a:spcPts val="990"/>
-              </a:spcAft>
-              <a:buClr>
-                <a:srgbClr val="0645AD"/>
-              </a:buClr>
-              <a:buFont typeface="Arial"/>
-              <a:buChar char="•"/>
-            </a:pPr>
-            <a:r>
-              <a:rPr sz="2200" b="0">
-                <a:solidFill>
-                  <a:srgbClr val="202122"/>
-                </a:solidFill>
-                <a:latin typeface="Calibri"/>
-              </a:rPr>
-              <a:t>OTDR</a:t>
-            </a:r>
-          </a:p>
-          <a:p>
-            <a:pPr marL="274320" indent="-274320">
-              <a:spcAft>
-                <a:spcPts val="990"/>
-              </a:spcAft>
-              <a:buClr>
-                <a:srgbClr val="0645AD"/>
-              </a:buClr>
-              <a:buFont typeface="Arial"/>
-              <a:buChar char="•"/>
-            </a:pPr>
-            <a:r>
-              <a:rPr sz="2200" b="0">
-                <a:solidFill>
-                  <a:srgbClr val="202122"/>
-                </a:solidFill>
-                <a:latin typeface="Calibri"/>
-              </a:rPr>
-              <a:t>Fibre inspection scope</a:t>
-            </a:r>
-          </a:p>
-          <a:p>
-            <a:pPr marL="274320" indent="-274320">
-              <a:spcAft>
-                <a:spcPts val="990"/>
-              </a:spcAft>
-              <a:buClr>
-                <a:srgbClr val="0645AD"/>
-              </a:buClr>
-              <a:buFont typeface="Arial"/>
-              <a:buChar char="•"/>
-            </a:pPr>
-            <a:r>
-              <a:rPr sz="2200" b="0">
-                <a:solidFill>
-                  <a:srgbClr val="202122"/>
-                </a:solidFill>
-                <a:latin typeface="Calibri"/>
-              </a:rPr>
-              <a:t>Tier 1 and tier 2 testing</a:t>
-            </a:r>
-          </a:p>
-        </p:txBody>
-      </p:sp>
-    </p:spTree>
-  </p:cSld>
-  <p:clrMapOvr>
-    <a:masterClrMapping/>
-  </p:clrMapOvr>
-</p:sld>
-</file>
-
-<file path=ppt/slides/slide7.xml><?xml version="1.0" encoding="utf-8"?>
-<p:sld xmlns:a="http://schemas.openxmlformats.org/drawingml/2006/main" xmlns:p="http://schemas.openxmlformats.org/presentationml/2006/main" xmlns:r="http://schemas.openxmlformats.org/officeDocument/2006/relationships">
-  <p:cSld>
-    <p:bg>
-      <p:bgPr>
-        <a:solidFill>
-          <a:srgbClr val="FFFFFF"/>
-        </a:solidFill>
-        <a:effectLst/>
-      </p:bgPr>
-    </p:bg>
-    <p:spTree>
-      <p:nvGrpSpPr>
-        <p:cNvPr id="1" name=""/>
-        <p:cNvGrpSpPr/>
-        <p:nvPr/>
-      </p:nvGrpSpPr>
-      <p:grpSpPr/>
-      <p:sp>
-        <p:nvSpPr>
-          <p:cNvPr id="2" name="TextBox 1"/>
-          <p:cNvSpPr txBox="1"/>
-          <p:nvPr/>
-        </p:nvSpPr>
-        <p:spPr>
-          <a:xfrm>
-            <a:off x="548640" y="320040"/>
-            <a:ext cx="11094415" cy="274320"/>
-          </a:xfrm>
-          <a:prstGeom prst="rect">
-            <a:avLst/>
-          </a:prstGeom>
-          <a:noFill/>
-        </p:spPr>
-        <p:txBody>
-          <a:bodyPr wrap="square" anchor="t" lIns="0" rIns="0" tIns="0" bIns="0"/>
-          <a:lstStyle/>
-          <a:p>
-            <a:pPr algn="l"/>
-            <a:r>
-              <a:rPr sz="1100" b="1" i="0">
-                <a:solidFill>
-                  <a:srgbClr val="54595D"/>
-                </a:solidFill>
-                <a:latin typeface="Calibri"/>
-              </a:rPr>
-              <a:t>NETWORK CABLING  ·  Network Cabling Content Area 2</a:t>
-            </a:r>
-          </a:p>
-        </p:txBody>
-      </p:sp>
-      <p:sp>
-        <p:nvSpPr>
-          <p:cNvPr id="3" name="TextBox 2"/>
-          <p:cNvSpPr txBox="1"/>
-          <p:nvPr/>
-        </p:nvSpPr>
-        <p:spPr>
-          <a:xfrm>
-            <a:off x="548640" y="566928"/>
-            <a:ext cx="11094415" cy="822960"/>
-          </a:xfrm>
-          <a:prstGeom prst="rect">
-            <a:avLst/>
-          </a:prstGeom>
-          <a:noFill/>
-        </p:spPr>
-        <p:txBody>
-          <a:bodyPr wrap="square" anchor="ctr" lIns="0" rIns="0" tIns="0" bIns="0"/>
-          <a:lstStyle/>
-          <a:p>
-            <a:pPr algn="l"/>
-            <a:r>
-              <a:rPr sz="3200" b="1" i="0">
-                <a:solidFill>
-                  <a:srgbClr val="03306E"/>
-                </a:solidFill>
-                <a:latin typeface="Cambria"/>
-              </a:rPr>
-              <a:t>Why poor workmanship matters</a:t>
-            </a:r>
-          </a:p>
-        </p:txBody>
-      </p:sp>
-      <p:sp>
-        <p:nvSpPr>
-          <p:cNvPr id="4" name="TextBox 3"/>
-          <p:cNvSpPr txBox="1"/>
-          <p:nvPr/>
-        </p:nvSpPr>
-        <p:spPr>
-          <a:xfrm>
-            <a:off x="548640" y="6446520"/>
-            <a:ext cx="8229600" cy="274320"/>
-          </a:xfrm>
-          <a:prstGeom prst="rect">
-            <a:avLst/>
-          </a:prstGeom>
-          <a:noFill/>
-        </p:spPr>
-        <p:txBody>
-          <a:bodyPr wrap="square" anchor="t" lIns="0" rIns="0" tIns="0" bIns="0"/>
-          <a:lstStyle/>
-          <a:p>
-            <a:pPr algn="l"/>
-            <a:r>
-              <a:rPr sz="1000" b="0" i="0">
-                <a:solidFill>
-                  <a:srgbClr val="54595D"/>
-                </a:solidFill>
-                <a:latin typeface="Calibri"/>
-              </a:rPr>
-              <a:t>Digital Support and Security T Level  ·  Testing, Certification and Troubleshooting</a:t>
-            </a:r>
-          </a:p>
-        </p:txBody>
-      </p:sp>
-      <p:sp>
-        <p:nvSpPr>
-          <p:cNvPr id="5" name="TextBox 4"/>
-          <p:cNvSpPr txBox="1"/>
-          <p:nvPr/>
-        </p:nvSpPr>
-        <p:spPr>
-          <a:xfrm>
-            <a:off x="10728655" y="6446520"/>
-            <a:ext cx="914400" cy="274320"/>
-          </a:xfrm>
-          <a:prstGeom prst="rect">
-            <a:avLst/>
-          </a:prstGeom>
-          <a:noFill/>
-        </p:spPr>
-        <p:txBody>
-          <a:bodyPr wrap="square" anchor="t" lIns="0" rIns="0" tIns="0" bIns="0"/>
-          <a:lstStyle/>
-          <a:p>
-            <a:pPr algn="r"/>
-            <a:r>
-              <a:rPr sz="1000" b="0" i="0">
-                <a:solidFill>
-                  <a:srgbClr val="54595D"/>
-                </a:solidFill>
-                <a:latin typeface="Calibri"/>
-              </a:rPr>
-              <a:t>7</a:t>
-            </a:r>
-          </a:p>
-        </p:txBody>
-      </p:sp>
-      <p:sp>
-        <p:nvSpPr>
-          <p:cNvPr id="6" name="Rounded Rectangle 5"/>
-          <p:cNvSpPr/>
-          <p:nvPr/>
-        </p:nvSpPr>
-        <p:spPr>
-          <a:xfrm>
-            <a:off x="548640" y="1600200"/>
-            <a:ext cx="5364327" cy="640080"/>
-          </a:xfrm>
-          <a:prstGeom prst="roundRect">
-            <a:avLst>
-              <a:gd name="adj" fmla="val 15000"/>
-            </a:avLst>
-          </a:prstGeom>
-          <a:solidFill>
-            <a:srgbClr val="03306E"/>
-          </a:solidFill>
-          <a:ln>
-            <a:noFill/>
-          </a:ln>
-          <a:effectLst/>
-        </p:spPr>
-        <p:style>
-          <a:lnRef idx="1">
-            <a:schemeClr val="accent1"/>
-          </a:lnRef>
-          <a:fillRef idx="3">
-            <a:schemeClr val="accent1"/>
-          </a:fillRef>
-          <a:effectRef idx="2">
-            <a:schemeClr val="accent1"/>
-          </a:effectRef>
-          <a:fontRef idx="minor">
-            <a:schemeClr val="lt1"/>
-          </a:fontRef>
-        </p:style>
-        <p:txBody>
-          <a:bodyPr rtlCol="0" anchor="ctr"/>
-          <a:lstStyle/>
-          <a:p/>
-        </p:txBody>
-      </p:sp>
-      <p:sp>
-        <p:nvSpPr>
-          <p:cNvPr id="7" name="TextBox 6"/>
-          <p:cNvSpPr txBox="1"/>
-          <p:nvPr/>
-        </p:nvSpPr>
-        <p:spPr>
-          <a:xfrm>
-            <a:off x="777240" y="1600200"/>
-            <a:ext cx="4907127" cy="640080"/>
-          </a:xfrm>
-          <a:prstGeom prst="rect">
-            <a:avLst/>
-          </a:prstGeom>
-          <a:noFill/>
-        </p:spPr>
-        <p:txBody>
-          <a:bodyPr wrap="square" anchor="ctr" lIns="0" rIns="0" tIns="0" bIns="0"/>
-          <a:lstStyle/>
-          <a:p>
-            <a:pPr algn="l"/>
-            <a:r>
-              <a:rPr sz="2000" b="1" i="0">
-                <a:solidFill>
-                  <a:srgbClr val="FFFFFF"/>
-                </a:solidFill>
-                <a:latin typeface="Calibri"/>
-              </a:rPr>
-              <a:t>Network consequences</a:t>
-            </a:r>
-          </a:p>
-        </p:txBody>
-      </p:sp>
-      <p:sp>
-        <p:nvSpPr>
-          <p:cNvPr id="8" name="Rounded Rectangle 7"/>
-          <p:cNvSpPr/>
-          <p:nvPr/>
-        </p:nvSpPr>
-        <p:spPr>
-          <a:xfrm>
-            <a:off x="548640" y="2377440"/>
-            <a:ext cx="5364327" cy="3794760"/>
-          </a:xfrm>
-          <a:prstGeom prst="roundRect">
-            <a:avLst>
-              <a:gd name="adj" fmla="val 4000"/>
-            </a:avLst>
-          </a:prstGeom>
-          <a:solidFill>
-            <a:srgbClr val="EAF3FF"/>
-          </a:solidFill>
-          <a:ln>
-            <a:noFill/>
-          </a:ln>
-          <a:effectLst/>
-        </p:spPr>
-        <p:style>
-          <a:lnRef idx="1">
-            <a:schemeClr val="accent1"/>
-          </a:lnRef>
-          <a:fillRef idx="3">
-            <a:schemeClr val="accent1"/>
-          </a:fillRef>
-          <a:effectRef idx="2">
-            <a:schemeClr val="accent1"/>
-          </a:effectRef>
-          <a:fontRef idx="minor">
-            <a:schemeClr val="lt1"/>
-          </a:fontRef>
-        </p:style>
-        <p:txBody>
-          <a:bodyPr rtlCol="0" anchor="ctr"/>
-          <a:lstStyle/>
-          <a:p/>
-        </p:txBody>
-      </p:sp>
-      <p:sp>
-        <p:nvSpPr>
-          <p:cNvPr id="9" name="TextBox 8"/>
-          <p:cNvSpPr txBox="1"/>
-          <p:nvPr/>
-        </p:nvSpPr>
-        <p:spPr>
-          <a:xfrm>
-            <a:off x="822959" y="2606040"/>
-            <a:ext cx="4815687" cy="3337560"/>
-          </a:xfrm>
-          <a:prstGeom prst="rect">
-            <a:avLst/>
-          </a:prstGeom>
-          <a:noFill/>
-        </p:spPr>
-        <p:txBody>
-          <a:bodyPr wrap="square" lIns="0" rIns="0" tIns="0" bIns="0">
-            <a:spAutoFit/>
-          </a:bodyPr>
-          <a:lstStyle/>
-          <a:p>
-            <a:pPr marL="274320" indent="-274320">
-              <a:spcAft>
-                <a:spcPts val="990"/>
-              </a:spcAft>
-              <a:buClr>
-                <a:srgbClr val="0645AD"/>
-              </a:buClr>
-              <a:buFont typeface="Arial"/>
-              <a:buChar char="•"/>
-            </a:pPr>
-            <a:r>
-              <a:rPr sz="2200" b="0">
-                <a:solidFill>
-                  <a:srgbClr val="202122"/>
-                </a:solidFill>
-                <a:latin typeface="Calibri"/>
-              </a:rPr>
-              <a:t>Slower speeds and more interference</a:t>
-            </a:r>
-          </a:p>
-          <a:p>
-            <a:pPr marL="274320" indent="-274320">
-              <a:spcAft>
-                <a:spcPts val="990"/>
-              </a:spcAft>
-              <a:buClr>
-                <a:srgbClr val="0645AD"/>
-              </a:buClr>
-              <a:buFont typeface="Arial"/>
-              <a:buChar char="•"/>
-            </a:pPr>
-            <a:r>
-              <a:rPr sz="2200" b="0">
-                <a:solidFill>
-                  <a:srgbClr val="202122"/>
-                </a:solidFill>
-                <a:latin typeface="Calibri"/>
-              </a:rPr>
-              <a:t>Harder maintenance and shorter cable life</a:t>
-            </a:r>
-          </a:p>
-          <a:p>
-            <a:pPr marL="274320" indent="-274320">
-              <a:spcAft>
-                <a:spcPts val="990"/>
-              </a:spcAft>
-              <a:buClr>
-                <a:srgbClr val="0645AD"/>
-              </a:buClr>
-              <a:buFont typeface="Arial"/>
-              <a:buChar char="•"/>
-            </a:pPr>
-            <a:r>
-              <a:rPr sz="2200" b="0">
-                <a:solidFill>
-                  <a:srgbClr val="202122"/>
-                </a:solidFill>
-                <a:latin typeface="Calibri"/>
-              </a:rPr>
-              <a:t>Weaker security</a:t>
-            </a:r>
-          </a:p>
-          <a:p>
-            <a:pPr marL="274320" indent="-274320">
-              <a:spcAft>
-                <a:spcPts val="990"/>
-              </a:spcAft>
-              <a:buClr>
-                <a:srgbClr val="0645AD"/>
-              </a:buClr>
-              <a:buFont typeface="Arial"/>
-              <a:buChar char="•"/>
-            </a:pPr>
-            <a:r>
-              <a:rPr sz="2200" b="0">
-                <a:solidFill>
-                  <a:srgbClr val="202122"/>
-                </a:solidFill>
-                <a:latin typeface="Calibri"/>
-              </a:rPr>
-              <a:t>Bad labelling slows every future fault-find</a:t>
-            </a:r>
-          </a:p>
-        </p:txBody>
-      </p:sp>
-      <p:sp>
-        <p:nvSpPr>
-          <p:cNvPr id="10" name="Rounded Rectangle 9"/>
-          <p:cNvSpPr/>
-          <p:nvPr/>
-        </p:nvSpPr>
-        <p:spPr>
-          <a:xfrm>
-            <a:off x="6278727" y="1600200"/>
-            <a:ext cx="5364327" cy="640080"/>
-          </a:xfrm>
-          <a:prstGeom prst="roundRect">
-            <a:avLst>
-              <a:gd name="adj" fmla="val 15000"/>
-            </a:avLst>
-          </a:prstGeom>
-          <a:solidFill>
-            <a:srgbClr val="0645AD"/>
-          </a:solidFill>
-          <a:ln>
-            <a:noFill/>
-          </a:ln>
-          <a:effectLst/>
-        </p:spPr>
-        <p:style>
-          <a:lnRef idx="1">
-            <a:schemeClr val="accent1"/>
-          </a:lnRef>
-          <a:fillRef idx="3">
-            <a:schemeClr val="accent1"/>
-          </a:fillRef>
-          <a:effectRef idx="2">
-            <a:schemeClr val="accent1"/>
-          </a:effectRef>
-          <a:fontRef idx="minor">
-            <a:schemeClr val="lt1"/>
-          </a:fontRef>
-        </p:style>
-        <p:txBody>
-          <a:bodyPr rtlCol="0" anchor="ctr"/>
-          <a:lstStyle/>
-          <a:p/>
-        </p:txBody>
-      </p:sp>
-      <p:sp>
-        <p:nvSpPr>
-          <p:cNvPr id="11" name="TextBox 10"/>
-          <p:cNvSpPr txBox="1"/>
-          <p:nvPr/>
-        </p:nvSpPr>
-        <p:spPr>
-          <a:xfrm>
-            <a:off x="6507327" y="1600200"/>
-            <a:ext cx="4907127" cy="640080"/>
-          </a:xfrm>
-          <a:prstGeom prst="rect">
-            <a:avLst/>
-          </a:prstGeom>
-          <a:noFill/>
-        </p:spPr>
-        <p:txBody>
-          <a:bodyPr wrap="square" anchor="ctr" lIns="0" rIns="0" tIns="0" bIns="0"/>
-          <a:lstStyle/>
-          <a:p>
-            <a:pPr algn="l"/>
-            <a:r>
-              <a:rPr sz="2000" b="1" i="0">
-                <a:solidFill>
-                  <a:srgbClr val="FFFFFF"/>
-                </a:solidFill>
-                <a:latin typeface="Calibri"/>
-              </a:rPr>
-              <a:t>Business consequences</a:t>
-            </a:r>
-          </a:p>
-        </p:txBody>
-      </p:sp>
-      <p:sp>
-        <p:nvSpPr>
-          <p:cNvPr id="12" name="Rounded Rectangle 11"/>
-          <p:cNvSpPr/>
-          <p:nvPr/>
-        </p:nvSpPr>
-        <p:spPr>
-          <a:xfrm>
-            <a:off x="6278727" y="2377440"/>
-            <a:ext cx="5364327" cy="3794760"/>
-          </a:xfrm>
-          <a:prstGeom prst="roundRect">
-            <a:avLst>
-              <a:gd name="adj" fmla="val 4000"/>
-            </a:avLst>
-          </a:prstGeom>
-          <a:solidFill>
-            <a:srgbClr val="EAF3FF"/>
-          </a:solidFill>
-          <a:ln>
-            <a:noFill/>
-          </a:ln>
-          <a:effectLst/>
-        </p:spPr>
-        <p:style>
-          <a:lnRef idx="1">
-            <a:schemeClr val="accent1"/>
-          </a:lnRef>
-          <a:fillRef idx="3">
-            <a:schemeClr val="accent1"/>
-          </a:fillRef>
-          <a:effectRef idx="2">
-            <a:schemeClr val="accent1"/>
-          </a:effectRef>
-          <a:fontRef idx="minor">
-            <a:schemeClr val="lt1"/>
-          </a:fontRef>
-        </p:style>
-        <p:txBody>
-          <a:bodyPr rtlCol="0" anchor="ctr"/>
-          <a:lstStyle/>
-          <a:p/>
-        </p:txBody>
-      </p:sp>
-      <p:sp>
-        <p:nvSpPr>
-          <p:cNvPr id="13" name="TextBox 12"/>
-          <p:cNvSpPr txBox="1"/>
-          <p:nvPr/>
-        </p:nvSpPr>
-        <p:spPr>
-          <a:xfrm>
-            <a:off x="6553047" y="2606040"/>
-            <a:ext cx="4815687" cy="3337560"/>
-          </a:xfrm>
-          <a:prstGeom prst="rect">
-            <a:avLst/>
-          </a:prstGeom>
-          <a:noFill/>
-        </p:spPr>
-        <p:txBody>
-          <a:bodyPr wrap="square" lIns="0" rIns="0" tIns="0" bIns="0">
-            <a:spAutoFit/>
-          </a:bodyPr>
-          <a:lstStyle/>
-          <a:p>
-            <a:pPr marL="274320" indent="-274320">
-              <a:spcAft>
-                <a:spcPts val="990"/>
-              </a:spcAft>
-              <a:buClr>
-                <a:srgbClr val="0645AD"/>
-              </a:buClr>
-              <a:buFont typeface="Arial"/>
-              <a:buChar char="•"/>
-            </a:pPr>
-            <a:r>
-              <a:rPr sz="2200" b="0">
-                <a:solidFill>
-                  <a:srgbClr val="202122"/>
-                </a:solidFill>
-                <a:latin typeface="Calibri"/>
-              </a:rPr>
-              <a:t>Cost of revisits</a:t>
-            </a:r>
-          </a:p>
-          <a:p>
-            <a:pPr marL="274320" indent="-274320">
-              <a:spcAft>
-                <a:spcPts val="990"/>
-              </a:spcAft>
-              <a:buClr>
-                <a:srgbClr val="0645AD"/>
-              </a:buClr>
-              <a:buFont typeface="Arial"/>
-              <a:buChar char="•"/>
-            </a:pPr>
-            <a:r>
-              <a:rPr sz="2200" b="0">
-                <a:solidFill>
-                  <a:srgbClr val="202122"/>
-                </a:solidFill>
-                <a:latin typeface="Calibri"/>
-              </a:rPr>
-              <a:t>SLA and warranty penalties</a:t>
-            </a:r>
-          </a:p>
-          <a:p>
-            <a:pPr marL="274320" indent="-274320">
-              <a:spcAft>
-                <a:spcPts val="990"/>
-              </a:spcAft>
-              <a:buClr>
-                <a:srgbClr val="0645AD"/>
-              </a:buClr>
-              <a:buFont typeface="Arial"/>
-              <a:buChar char="•"/>
-            </a:pPr>
-            <a:r>
-              <a:rPr sz="2200" b="0">
-                <a:solidFill>
-                  <a:srgbClr val="202122"/>
-                </a:solidFill>
-                <a:latin typeface="Calibri"/>
-              </a:rPr>
-              <a:t>Reputational damage and delayed payment</a:t>
-            </a:r>
-          </a:p>
-          <a:p>
-            <a:pPr marL="274320" indent="-274320">
-              <a:spcAft>
-                <a:spcPts val="990"/>
-              </a:spcAft>
-              <a:buClr>
-                <a:srgbClr val="0645AD"/>
-              </a:buClr>
-              <a:buFont typeface="Arial"/>
-              <a:buChar char="•"/>
-            </a:pPr>
-            <a:r>
-              <a:rPr sz="2200" b="0">
-                <a:solidFill>
-                  <a:srgbClr val="202122"/>
-                </a:solidFill>
-                <a:latin typeface="Calibri"/>
-              </a:rPr>
-              <a:t>Failed audits</a:t>
-            </a:r>
-          </a:p>
-        </p:txBody>
-      </p:sp>
-    </p:spTree>
-  </p:cSld>
-  <p:clrMapOvr>
-    <a:masterClrMapping/>
-  </p:clrMapOvr>
-</p:sld>
-</file>
-
 <file path=ppt/slides/slide8.xml><?xml version="1.0" encoding="utf-8"?>
 <p:sld xmlns:a="http://schemas.openxmlformats.org/drawingml/2006/main" xmlns:p="http://schemas.openxmlformats.org/presentationml/2006/main" xmlns:r="http://schemas.openxmlformats.org/officeDocument/2006/relationships">
   <p:cSld>
@@ -9371,7 +12412,7 @@
                 </a:solidFill>
                 <a:latin typeface="Cambria"/>
               </a:rPr>
-              <a:t>Check your understanding</a:t>
+              <a:t>Certifying copper and fibre</a:t>
             </a:r>
           </a:p>
         </p:txBody>
@@ -9444,14 +12485,129 @@
       </p:sp>
       <p:sp>
         <p:nvSpPr>
-          <p:cNvPr id="6" name="Oval 5"/>
+          <p:cNvPr id="6" name="TextBox 5"/>
+          <p:cNvSpPr txBox="1"/>
+          <p:nvPr/>
+        </p:nvSpPr>
+        <p:spPr>
+          <a:xfrm>
+            <a:off x="548640" y="1554480"/>
+            <a:ext cx="6720840" cy="4617720"/>
+          </a:xfrm>
+          <a:prstGeom prst="rect">
+            <a:avLst/>
+          </a:prstGeom>
+          <a:noFill/>
+        </p:spPr>
+        <p:txBody>
+          <a:bodyPr wrap="square" lIns="0" rIns="0" tIns="0" bIns="0">
+            <a:spAutoFit/>
+          </a:bodyPr>
+          <a:lstStyle/>
+          <a:p>
+            <a:pPr>
+              <a:spcAft>
+                <a:spcPts val="1320"/>
+              </a:spcAft>
+            </a:pPr>
+            <a:r>
+              <a:rPr sz="2200" b="0">
+                <a:solidFill>
+                  <a:srgbClr val="202122"/>
+                </a:solidFill>
+                <a:latin typeface="Calibri"/>
+              </a:rPr>
+              <a:t>Certification proves an installation meets its standard, which the warranty depends on.</a:t>
+            </a:r>
+          </a:p>
+          <a:p>
+            <a:pPr>
+              <a:spcAft>
+                <a:spcPts val="1320"/>
+              </a:spcAft>
+            </a:pPr>
+            <a:r>
+              <a:rPr sz="2200" b="0">
+                <a:solidFill>
+                  <a:srgbClr val="202122"/>
+                </a:solidFill>
+                <a:latin typeface="Calibri"/>
+              </a:rPr>
+              <a:t>Follow a test plan setting out the scope, approach, resources and schedule. For copper, use a continuity tester, performance tester or cable certifier, checking the wiremap, cable length and near-end crosstalk (NEXT). For fibre, use an optical loss test set (light source and power meter), an OTDR and an inspection scope, running tier 1 (loss) and tier 2 (OTDR) tests.</a:t>
+            </a:r>
+          </a:p>
+          <a:p>
+            <a:pPr>
+              <a:spcAft>
+                <a:spcPts val="1320"/>
+              </a:spcAft>
+            </a:pPr>
+            <a:r>
+              <a:rPr sz="2200" b="0">
+                <a:solidFill>
+                  <a:srgbClr val="202122"/>
+                </a:solidFill>
+                <a:latin typeface="Calibri"/>
+              </a:rPr>
+              <a:t>Compare the results with the manufacturer's tolerances and record everything.</a:t>
+            </a:r>
+          </a:p>
+        </p:txBody>
+      </p:sp>
+      <p:sp>
+        <p:nvSpPr>
+          <p:cNvPr id="7" name="Rounded Rectangle 6"/>
           <p:cNvSpPr/>
           <p:nvPr/>
         </p:nvSpPr>
         <p:spPr>
           <a:xfrm>
-            <a:off x="548640" y="1618488"/>
-            <a:ext cx="411480" cy="411480"/>
+            <a:off x="7772400" y="1554480"/>
+            <a:ext cx="3867912" cy="4526280"/>
+          </a:xfrm>
+          <a:prstGeom prst="roundRect">
+            <a:avLst>
+              <a:gd name="adj" fmla="val 8000"/>
+            </a:avLst>
+          </a:prstGeom>
+          <a:solidFill>
+            <a:srgbClr val="03306E"/>
+          </a:solidFill>
+          <a:ln>
+            <a:noFill/>
+          </a:ln>
+          <a:effectLst/>
+        </p:spPr>
+        <p:style>
+          <a:lnRef idx="1">
+            <a:schemeClr val="accent1"/>
+          </a:lnRef>
+          <a:fillRef idx="3">
+            <a:schemeClr val="accent1"/>
+          </a:fillRef>
+          <a:effectRef idx="2">
+            <a:schemeClr val="accent1"/>
+          </a:effectRef>
+          <a:fontRef idx="minor">
+            <a:schemeClr val="lt1"/>
+          </a:fontRef>
+        </p:style>
+        <p:txBody>
+          <a:bodyPr rtlCol="0" anchor="ctr"/>
+          <a:lstStyle/>
+          <a:p/>
+        </p:txBody>
+      </p:sp>
+      <p:sp>
+        <p:nvSpPr>
+          <p:cNvPr id="8" name="Oval 7"/>
+          <p:cNvSpPr/>
+          <p:nvPr/>
+        </p:nvSpPr>
+        <p:spPr>
+          <a:xfrm>
+            <a:off x="8046720" y="1828800"/>
+            <a:ext cx="548640" cy="548640"/>
           </a:xfrm>
           <a:prstGeom prst="ellipse">
             <a:avLst/>
@@ -9484,27 +12640,27 @@
           <a:p>
             <a:pPr algn="ctr"/>
             <a:r>
-              <a:rPr sz="1400" b="1">
+              <a:rPr sz="1300" b="1">
                 <a:solidFill>
                   <a:srgbClr val="202122"/>
                 </a:solidFill>
                 <a:latin typeface="Calibri"/>
               </a:rPr>
-              <a:t>1</a:t>
-            </a:r>
-          </a:p>
-        </p:txBody>
-      </p:sp>
-      <p:sp>
-        <p:nvSpPr>
-          <p:cNvPr id="7" name="TextBox 6"/>
-          <p:cNvSpPr txBox="1"/>
-          <p:nvPr/>
-        </p:nvSpPr>
-        <p:spPr>
-          <a:xfrm>
-            <a:off x="1234440" y="1600200"/>
-            <a:ext cx="10408615" cy="791870"/>
+              <a:t>e.g.</a:t>
+            </a:r>
+          </a:p>
+        </p:txBody>
+      </p:sp>
+      <p:sp>
+        <p:nvSpPr>
+          <p:cNvPr id="9" name="TextBox 8"/>
+          <p:cNvSpPr txBox="1"/>
+          <p:nvPr/>
+        </p:nvSpPr>
+        <p:spPr>
+          <a:xfrm>
+            <a:off x="8046720" y="2560320"/>
+            <a:ext cx="3291840" cy="365760"/>
           </a:xfrm>
           <a:prstGeom prst="rect">
             <a:avLst/>
@@ -9517,80 +12673,27 @@
           <a:p>
             <a:pPr algn="l"/>
             <a:r>
-              <a:rPr sz="2200" b="0" i="0">
-                <a:solidFill>
-                  <a:srgbClr val="202122"/>
-                </a:solidFill>
-                <a:latin typeface="Calibri"/>
-              </a:rPr>
-              <a:t>What is the difference between predictive and reactive maintenance?</a:t>
-            </a:r>
-          </a:p>
-        </p:txBody>
-      </p:sp>
-      <p:sp>
-        <p:nvSpPr>
-          <p:cNvPr id="8" name="Oval 7"/>
-          <p:cNvSpPr/>
-          <p:nvPr/>
-        </p:nvSpPr>
-        <p:spPr>
-          <a:xfrm>
-            <a:off x="548640" y="2574950"/>
-            <a:ext cx="411480" cy="411480"/>
-          </a:xfrm>
-          <a:prstGeom prst="ellipse">
-            <a:avLst/>
-          </a:prstGeom>
-          <a:solidFill>
-            <a:srgbClr val="F2B705"/>
-          </a:solidFill>
-          <a:ln>
-            <a:noFill/>
-          </a:ln>
-          <a:effectLst/>
-        </p:spPr>
-        <p:style>
-          <a:lnRef idx="1">
-            <a:schemeClr val="accent1"/>
-          </a:lnRef>
-          <a:fillRef idx="3">
-            <a:schemeClr val="accent1"/>
-          </a:fillRef>
-          <a:effectRef idx="2">
-            <a:schemeClr val="accent1"/>
-          </a:effectRef>
-          <a:fontRef idx="minor">
-            <a:schemeClr val="lt1"/>
-          </a:fontRef>
-        </p:style>
-        <p:txBody>
-          <a:bodyPr rtlCol="0" anchor="ctr" lIns="0" rIns="0" tIns="0" bIns="0"/>
-          <a:lstStyle/>
-          <a:p>
-            <a:pPr algn="ctr"/>
-            <a:r>
-              <a:rPr sz="1400" b="1">
-                <a:solidFill>
-                  <a:srgbClr val="202122"/>
-                </a:solidFill>
-                <a:latin typeface="Calibri"/>
-              </a:rPr>
-              <a:t>2</a:t>
-            </a:r>
-          </a:p>
-        </p:txBody>
-      </p:sp>
-      <p:sp>
-        <p:nvSpPr>
-          <p:cNvPr id="9" name="TextBox 8"/>
-          <p:cNvSpPr txBox="1"/>
-          <p:nvPr/>
-        </p:nvSpPr>
-        <p:spPr>
-          <a:xfrm>
-            <a:off x="1234440" y="2556662"/>
-            <a:ext cx="10408615" cy="791870"/>
+              <a:rPr sz="1300" b="1" i="0">
+                <a:solidFill>
+                  <a:srgbClr val="A9C8F0"/>
+                </a:solidFill>
+                <a:latin typeface="Calibri"/>
+              </a:rPr>
+              <a:t>EXAMPLE</a:t>
+            </a:r>
+          </a:p>
+        </p:txBody>
+      </p:sp>
+      <p:sp>
+        <p:nvSpPr>
+          <p:cNvPr id="10" name="TextBox 9"/>
+          <p:cNvSpPr txBox="1"/>
+          <p:nvPr/>
+        </p:nvSpPr>
+        <p:spPr>
+          <a:xfrm>
+            <a:off x="8046720" y="2971800"/>
+            <a:ext cx="3291840" cy="2971800"/>
           </a:xfrm>
           <a:prstGeom prst="rect">
             <a:avLst/>
@@ -9603,271 +12706,13 @@
           <a:p>
             <a:pPr algn="l"/>
             <a:r>
-              <a:rPr sz="2200" b="0" i="0">
-                <a:solidFill>
-                  <a:srgbClr val="202122"/>
-                </a:solidFill>
-                <a:latin typeface="Calibri"/>
-              </a:rPr>
-              <a:t>Name two physical cabling failures.</a:t>
-            </a:r>
-          </a:p>
-        </p:txBody>
-      </p:sp>
-      <p:sp>
-        <p:nvSpPr>
-          <p:cNvPr id="10" name="Oval 9"/>
-          <p:cNvSpPr/>
-          <p:nvPr/>
-        </p:nvSpPr>
-        <p:spPr>
-          <a:xfrm>
-            <a:off x="548640" y="3531412"/>
-            <a:ext cx="411480" cy="411480"/>
-          </a:xfrm>
-          <a:prstGeom prst="ellipse">
-            <a:avLst/>
-          </a:prstGeom>
-          <a:solidFill>
-            <a:srgbClr val="F2B705"/>
-          </a:solidFill>
-          <a:ln>
-            <a:noFill/>
-          </a:ln>
-          <a:effectLst/>
-        </p:spPr>
-        <p:style>
-          <a:lnRef idx="1">
-            <a:schemeClr val="accent1"/>
-          </a:lnRef>
-          <a:fillRef idx="3">
-            <a:schemeClr val="accent1"/>
-          </a:fillRef>
-          <a:effectRef idx="2">
-            <a:schemeClr val="accent1"/>
-          </a:effectRef>
-          <a:fontRef idx="minor">
-            <a:schemeClr val="lt1"/>
-          </a:fontRef>
-        </p:style>
-        <p:txBody>
-          <a:bodyPr rtlCol="0" anchor="ctr" lIns="0" rIns="0" tIns="0" bIns="0"/>
-          <a:lstStyle/>
-          <a:p>
-            <a:pPr algn="ctr"/>
-            <a:r>
-              <a:rPr sz="1400" b="1">
-                <a:solidFill>
-                  <a:srgbClr val="202122"/>
-                </a:solidFill>
-                <a:latin typeface="Calibri"/>
-              </a:rPr>
-              <a:t>3</a:t>
-            </a:r>
-          </a:p>
-        </p:txBody>
-      </p:sp>
-      <p:sp>
-        <p:nvSpPr>
-          <p:cNvPr id="11" name="TextBox 10"/>
-          <p:cNvSpPr txBox="1"/>
-          <p:nvPr/>
-        </p:nvSpPr>
-        <p:spPr>
-          <a:xfrm>
-            <a:off x="1234440" y="3513124"/>
-            <a:ext cx="10408615" cy="791870"/>
-          </a:xfrm>
-          <a:prstGeom prst="rect">
-            <a:avLst/>
-          </a:prstGeom>
-          <a:noFill/>
-        </p:spPr>
-        <p:txBody>
-          <a:bodyPr wrap="square" anchor="t" lIns="0" rIns="0" tIns="0" bIns="0"/>
-          <a:lstStyle/>
-          <a:p>
-            <a:pPr algn="l"/>
-            <a:r>
-              <a:rPr sz="2200" b="0" i="0">
-                <a:solidFill>
-                  <a:srgbClr val="202122"/>
-                </a:solidFill>
-                <a:latin typeface="Calibri"/>
-              </a:rPr>
-              <a:t>What does NEXT stand for?</a:t>
-            </a:r>
-          </a:p>
-        </p:txBody>
-      </p:sp>
-      <p:sp>
-        <p:nvSpPr>
-          <p:cNvPr id="12" name="Oval 11"/>
-          <p:cNvSpPr/>
-          <p:nvPr/>
-        </p:nvSpPr>
-        <p:spPr>
-          <a:xfrm>
-            <a:off x="548640" y="4487875"/>
-            <a:ext cx="411480" cy="411480"/>
-          </a:xfrm>
-          <a:prstGeom prst="ellipse">
-            <a:avLst/>
-          </a:prstGeom>
-          <a:solidFill>
-            <a:srgbClr val="F2B705"/>
-          </a:solidFill>
-          <a:ln>
-            <a:noFill/>
-          </a:ln>
-          <a:effectLst/>
-        </p:spPr>
-        <p:style>
-          <a:lnRef idx="1">
-            <a:schemeClr val="accent1"/>
-          </a:lnRef>
-          <a:fillRef idx="3">
-            <a:schemeClr val="accent1"/>
-          </a:fillRef>
-          <a:effectRef idx="2">
-            <a:schemeClr val="accent1"/>
-          </a:effectRef>
-          <a:fontRef idx="minor">
-            <a:schemeClr val="lt1"/>
-          </a:fontRef>
-        </p:style>
-        <p:txBody>
-          <a:bodyPr rtlCol="0" anchor="ctr" lIns="0" rIns="0" tIns="0" bIns="0"/>
-          <a:lstStyle/>
-          <a:p>
-            <a:pPr algn="ctr"/>
-            <a:r>
-              <a:rPr sz="1400" b="1">
-                <a:solidFill>
-                  <a:srgbClr val="202122"/>
-                </a:solidFill>
-                <a:latin typeface="Calibri"/>
-              </a:rPr>
-              <a:t>4</a:t>
-            </a:r>
-          </a:p>
-        </p:txBody>
-      </p:sp>
-      <p:sp>
-        <p:nvSpPr>
-          <p:cNvPr id="13" name="TextBox 12"/>
-          <p:cNvSpPr txBox="1"/>
-          <p:nvPr/>
-        </p:nvSpPr>
-        <p:spPr>
-          <a:xfrm>
-            <a:off x="1234440" y="4469587"/>
-            <a:ext cx="10408615" cy="791870"/>
-          </a:xfrm>
-          <a:prstGeom prst="rect">
-            <a:avLst/>
-          </a:prstGeom>
-          <a:noFill/>
-        </p:spPr>
-        <p:txBody>
-          <a:bodyPr wrap="square" anchor="t" lIns="0" rIns="0" tIns="0" bIns="0"/>
-          <a:lstStyle/>
-          <a:p>
-            <a:pPr algn="l"/>
-            <a:r>
-              <a:rPr sz="2200" b="0" i="0">
-                <a:solidFill>
-                  <a:srgbClr val="202122"/>
-                </a:solidFill>
-                <a:latin typeface="Calibri"/>
-              </a:rPr>
-              <a:t>Which tool locates a break along a fibre?</a:t>
-            </a:r>
-          </a:p>
-        </p:txBody>
-      </p:sp>
-      <p:sp>
-        <p:nvSpPr>
-          <p:cNvPr id="14" name="Oval 13"/>
-          <p:cNvSpPr/>
-          <p:nvPr/>
-        </p:nvSpPr>
-        <p:spPr>
-          <a:xfrm>
-            <a:off x="548640" y="5444337"/>
-            <a:ext cx="411480" cy="411480"/>
-          </a:xfrm>
-          <a:prstGeom prst="ellipse">
-            <a:avLst/>
-          </a:prstGeom>
-          <a:solidFill>
-            <a:srgbClr val="F2B705"/>
-          </a:solidFill>
-          <a:ln>
-            <a:noFill/>
-          </a:ln>
-          <a:effectLst/>
-        </p:spPr>
-        <p:style>
-          <a:lnRef idx="1">
-            <a:schemeClr val="accent1"/>
-          </a:lnRef>
-          <a:fillRef idx="3">
-            <a:schemeClr val="accent1"/>
-          </a:fillRef>
-          <a:effectRef idx="2">
-            <a:schemeClr val="accent1"/>
-          </a:effectRef>
-          <a:fontRef idx="minor">
-            <a:schemeClr val="lt1"/>
-          </a:fontRef>
-        </p:style>
-        <p:txBody>
-          <a:bodyPr rtlCol="0" anchor="ctr" lIns="0" rIns="0" tIns="0" bIns="0"/>
-          <a:lstStyle/>
-          <a:p>
-            <a:pPr algn="ctr"/>
-            <a:r>
-              <a:rPr sz="1400" b="1">
-                <a:solidFill>
-                  <a:srgbClr val="202122"/>
-                </a:solidFill>
-                <a:latin typeface="Calibri"/>
-              </a:rPr>
-              <a:t>5</a:t>
-            </a:r>
-          </a:p>
-        </p:txBody>
-      </p:sp>
-      <p:sp>
-        <p:nvSpPr>
-          <p:cNvPr id="15" name="TextBox 14"/>
-          <p:cNvSpPr txBox="1"/>
-          <p:nvPr/>
-        </p:nvSpPr>
-        <p:spPr>
-          <a:xfrm>
-            <a:off x="1234440" y="5426049"/>
-            <a:ext cx="10408615" cy="791870"/>
-          </a:xfrm>
-          <a:prstGeom prst="rect">
-            <a:avLst/>
-          </a:prstGeom>
-          <a:noFill/>
-        </p:spPr>
-        <p:txBody>
-          <a:bodyPr wrap="square" anchor="t" lIns="0" rIns="0" tIns="0" bIns="0"/>
-          <a:lstStyle/>
-          <a:p>
-            <a:pPr algn="l"/>
-            <a:r>
-              <a:rPr sz="2200" b="0" i="0">
-                <a:solidFill>
-                  <a:srgbClr val="202122"/>
-                </a:solidFill>
-                <a:latin typeface="Calibri"/>
-              </a:rPr>
-              <a:t>Give one business consequence of failing certification.</a:t>
+              <a:rPr sz="1900" b="0" i="0">
+                <a:solidFill>
+                  <a:srgbClr val="FFFFFF"/>
+                </a:solidFill>
+                <a:latin typeface="Cambria"/>
+              </a:rPr>
+              <a:t>A cable certifier reports one link at 94 m: over the 90 m permanent link limit, so it fails and the outlet must be moved or the route shortened.</a:t>
             </a:r>
           </a:p>
         </p:txBody>
@@ -9959,7 +12804,7 @@
                 </a:solidFill>
                 <a:latin typeface="Cambria"/>
               </a:rPr>
-              <a:t>Answers</a:t>
+              <a:t>Certifying copper and fibre</a:t>
             </a:r>
           </a:p>
         </p:txBody>
@@ -10032,20 +12877,22 @@
       </p:sp>
       <p:sp>
         <p:nvSpPr>
-          <p:cNvPr id="6" name="Oval 5"/>
+          <p:cNvPr id="6" name="Rounded Rectangle 5"/>
           <p:cNvSpPr/>
           <p:nvPr/>
         </p:nvSpPr>
         <p:spPr>
           <a:xfrm>
-            <a:off x="548640" y="1618488"/>
-            <a:ext cx="411480" cy="411480"/>
-          </a:xfrm>
-          <a:prstGeom prst="ellipse">
-            <a:avLst/>
+            <a:off x="548640" y="1600200"/>
+            <a:ext cx="5364327" cy="640080"/>
+          </a:xfrm>
+          <a:prstGeom prst="roundRect">
+            <a:avLst>
+              <a:gd name="adj" fmla="val 15000"/>
+            </a:avLst>
           </a:prstGeom>
           <a:solidFill>
-            <a:srgbClr val="F2B705"/>
+            <a:srgbClr val="03306E"/>
           </a:solidFill>
           <a:ln>
             <a:noFill/>
@@ -10067,20 +12914,9 @@
           </a:fontRef>
         </p:style>
         <p:txBody>
-          <a:bodyPr rtlCol="0" anchor="ctr" lIns="0" rIns="0" tIns="0" bIns="0"/>
-          <a:lstStyle/>
-          <a:p>
-            <a:pPr algn="ctr"/>
-            <a:r>
-              <a:rPr sz="1400" b="1">
-                <a:solidFill>
-                  <a:srgbClr val="202122"/>
-                </a:solidFill>
-                <a:latin typeface="Calibri"/>
-              </a:rPr>
-              <a:t>1</a:t>
-            </a:r>
-          </a:p>
+          <a:bodyPr rtlCol="0" anchor="ctr"/>
+          <a:lstStyle/>
+          <a:p/>
         </p:txBody>
       </p:sp>
       <p:sp>
@@ -10091,58 +12927,49 @@
         </p:nvSpPr>
         <p:spPr>
           <a:xfrm>
-            <a:off x="1234440" y="1600200"/>
-            <a:ext cx="10408615" cy="791870"/>
-          </a:xfrm>
-          <a:prstGeom prst="rect">
-            <a:avLst/>
-          </a:prstGeom>
-          <a:noFill/>
-        </p:spPr>
-        <p:txBody>
-          <a:bodyPr wrap="square" anchor="t" lIns="0" rIns="0" tIns="0" bIns="0"/>
+            <a:off x="777240" y="1600200"/>
+            <a:ext cx="4907127" cy="640080"/>
+          </a:xfrm>
+          <a:prstGeom prst="rect">
+            <a:avLst/>
+          </a:prstGeom>
+          <a:noFill/>
+        </p:spPr>
+        <p:txBody>
+          <a:bodyPr wrap="square" anchor="ctr" lIns="0" rIns="0" tIns="0" bIns="0"/>
           <a:lstStyle/>
           <a:p>
             <a:pPr algn="l"/>
             <a:r>
-              <a:rPr sz="1800" b="0" i="0">
-                <a:solidFill>
-                  <a:srgbClr val="54595D"/>
-                </a:solidFill>
-                <a:latin typeface="Calibri"/>
-              </a:rPr>
-              <a:t>What is the difference between predictive and reactive maintenance?</a:t>
-            </a:r>
-          </a:p>
-          <a:p>
-            <a:r>
-              <a:rPr sz="1800" b="1">
-                <a:solidFill>
-                  <a:srgbClr val="03306E"/>
-                </a:solidFill>
-                <a:latin typeface="Calibri"/>
-              </a:rPr>
-              <a:t>Predictive replaces before failure; reactive runs to failure.</a:t>
-            </a:r>
-          </a:p>
-        </p:txBody>
-      </p:sp>
-      <p:sp>
-        <p:nvSpPr>
-          <p:cNvPr id="8" name="Oval 7"/>
+              <a:rPr sz="2000" b="1" i="0">
+                <a:solidFill>
+                  <a:srgbClr val="FFFFFF"/>
+                </a:solidFill>
+                <a:latin typeface="Calibri"/>
+              </a:rPr>
+              <a:t>Copper</a:t>
+            </a:r>
+          </a:p>
+        </p:txBody>
+      </p:sp>
+      <p:sp>
+        <p:nvSpPr>
+          <p:cNvPr id="8" name="Rounded Rectangle 7"/>
           <p:cNvSpPr/>
           <p:nvPr/>
         </p:nvSpPr>
         <p:spPr>
           <a:xfrm>
-            <a:off x="548640" y="2574950"/>
-            <a:ext cx="411480" cy="411480"/>
-          </a:xfrm>
-          <a:prstGeom prst="ellipse">
-            <a:avLst/>
+            <a:off x="548640" y="2377440"/>
+            <a:ext cx="5364327" cy="3794760"/>
+          </a:xfrm>
+          <a:prstGeom prst="roundRect">
+            <a:avLst>
+              <a:gd name="adj" fmla="val 4000"/>
+            </a:avLst>
           </a:prstGeom>
           <a:solidFill>
-            <a:srgbClr val="F2B705"/>
+            <a:srgbClr val="EAF3FF"/>
           </a:solidFill>
           <a:ln>
             <a:noFill/>
@@ -10164,82 +12991,136 @@
           </a:fontRef>
         </p:style>
         <p:txBody>
-          <a:bodyPr rtlCol="0" anchor="ctr" lIns="0" rIns="0" tIns="0" bIns="0"/>
-          <a:lstStyle/>
-          <a:p>
-            <a:pPr algn="ctr"/>
-            <a:r>
-              <a:rPr sz="1400" b="1">
+          <a:bodyPr rtlCol="0" anchor="ctr"/>
+          <a:lstStyle/>
+          <a:p/>
+        </p:txBody>
+      </p:sp>
+      <p:sp>
+        <p:nvSpPr>
+          <p:cNvPr id="9" name="TextBox 8"/>
+          <p:cNvSpPr txBox="1"/>
+          <p:nvPr/>
+        </p:nvSpPr>
+        <p:spPr>
+          <a:xfrm>
+            <a:off x="822959" y="2606040"/>
+            <a:ext cx="4815687" cy="3337560"/>
+          </a:xfrm>
+          <a:prstGeom prst="rect">
+            <a:avLst/>
+          </a:prstGeom>
+          <a:noFill/>
+        </p:spPr>
+        <p:txBody>
+          <a:bodyPr wrap="square" lIns="0" rIns="0" tIns="0" bIns="0">
+            <a:spAutoFit/>
+          </a:bodyPr>
+          <a:lstStyle/>
+          <a:p>
+            <a:pPr marL="274320" indent="-274320">
+              <a:spcAft>
+                <a:spcPts val="990"/>
+              </a:spcAft>
+              <a:buClr>
+                <a:srgbClr val="0645AD"/>
+              </a:buClr>
+              <a:buFont typeface="Arial"/>
+              <a:buChar char="•"/>
+            </a:pPr>
+            <a:r>
+              <a:rPr sz="2200" b="0">
                 <a:solidFill>
                   <a:srgbClr val="202122"/>
                 </a:solidFill>
                 <a:latin typeface="Calibri"/>
               </a:rPr>
-              <a:t>2</a:t>
-            </a:r>
-          </a:p>
-        </p:txBody>
-      </p:sp>
-      <p:sp>
-        <p:nvSpPr>
-          <p:cNvPr id="9" name="TextBox 8"/>
-          <p:cNvSpPr txBox="1"/>
-          <p:nvPr/>
-        </p:nvSpPr>
-        <p:spPr>
-          <a:xfrm>
-            <a:off x="1234440" y="2556662"/>
-            <a:ext cx="10408615" cy="791870"/>
-          </a:xfrm>
-          <a:prstGeom prst="rect">
-            <a:avLst/>
-          </a:prstGeom>
-          <a:noFill/>
-        </p:spPr>
-        <p:txBody>
-          <a:bodyPr wrap="square" anchor="t" lIns="0" rIns="0" tIns="0" bIns="0"/>
-          <a:lstStyle/>
-          <a:p>
-            <a:pPr algn="l"/>
-            <a:r>
-              <a:rPr sz="1800" b="0" i="0">
-                <a:solidFill>
-                  <a:srgbClr val="54595D"/>
-                </a:solidFill>
-                <a:latin typeface="Calibri"/>
-              </a:rPr>
-              <a:t>Name two physical cabling failures.</a:t>
-            </a:r>
-          </a:p>
-          <a:p>
-            <a:r>
-              <a:rPr sz="1800" b="1">
-                <a:solidFill>
-                  <a:srgbClr val="03306E"/>
-                </a:solidFill>
-                <a:latin typeface="Calibri"/>
-              </a:rPr>
-              <a:t>Any two, e.g. wrong pin-out, open circuit, bent pins.</a:t>
-            </a:r>
-          </a:p>
-        </p:txBody>
-      </p:sp>
-      <p:sp>
-        <p:nvSpPr>
-          <p:cNvPr id="10" name="Oval 9"/>
+              <a:t>Continuity tester, performance tester, certifier</a:t>
+            </a:r>
+          </a:p>
+          <a:p>
+            <a:pPr marL="274320" indent="-274320">
+              <a:spcAft>
+                <a:spcPts val="990"/>
+              </a:spcAft>
+              <a:buClr>
+                <a:srgbClr val="0645AD"/>
+              </a:buClr>
+              <a:buFont typeface="Arial"/>
+              <a:buChar char="•"/>
+            </a:pPr>
+            <a:r>
+              <a:rPr sz="2200" b="0">
+                <a:solidFill>
+                  <a:srgbClr val="202122"/>
+                </a:solidFill>
+                <a:latin typeface="Calibri"/>
+              </a:rPr>
+              <a:t>Wiremap</a:t>
+            </a:r>
+          </a:p>
+          <a:p>
+            <a:pPr marL="274320" indent="-274320">
+              <a:spcAft>
+                <a:spcPts val="990"/>
+              </a:spcAft>
+              <a:buClr>
+                <a:srgbClr val="0645AD"/>
+              </a:buClr>
+              <a:buFont typeface="Arial"/>
+              <a:buChar char="•"/>
+            </a:pPr>
+            <a:r>
+              <a:rPr sz="2200" b="0">
+                <a:solidFill>
+                  <a:srgbClr val="202122"/>
+                </a:solidFill>
+                <a:latin typeface="Calibri"/>
+              </a:rPr>
+              <a:t>Cable length</a:t>
+            </a:r>
+          </a:p>
+          <a:p>
+            <a:pPr marL="274320" indent="-274320">
+              <a:spcAft>
+                <a:spcPts val="990"/>
+              </a:spcAft>
+              <a:buClr>
+                <a:srgbClr val="0645AD"/>
+              </a:buClr>
+              <a:buFont typeface="Arial"/>
+              <a:buChar char="•"/>
+            </a:pPr>
+            <a:r>
+              <a:rPr sz="2200" b="0">
+                <a:solidFill>
+                  <a:srgbClr val="202122"/>
+                </a:solidFill>
+                <a:latin typeface="Calibri"/>
+              </a:rPr>
+              <a:t>Near-end crosstalk (NEXT)</a:t>
+            </a:r>
+          </a:p>
+        </p:txBody>
+      </p:sp>
+      <p:sp>
+        <p:nvSpPr>
+          <p:cNvPr id="10" name="Rounded Rectangle 9"/>
           <p:cNvSpPr/>
           <p:nvPr/>
         </p:nvSpPr>
         <p:spPr>
           <a:xfrm>
-            <a:off x="548640" y="3531412"/>
-            <a:ext cx="411480" cy="411480"/>
-          </a:xfrm>
-          <a:prstGeom prst="ellipse">
-            <a:avLst/>
+            <a:off x="6278727" y="1600200"/>
+            <a:ext cx="5364327" cy="640080"/>
+          </a:xfrm>
+          <a:prstGeom prst="roundRect">
+            <a:avLst>
+              <a:gd name="adj" fmla="val 15000"/>
+            </a:avLst>
           </a:prstGeom>
           <a:solidFill>
-            <a:srgbClr val="F2B705"/>
+            <a:srgbClr val="0645AD"/>
           </a:solidFill>
           <a:ln>
             <a:noFill/>
@@ -10261,20 +13142,9 @@
           </a:fontRef>
         </p:style>
         <p:txBody>
-          <a:bodyPr rtlCol="0" anchor="ctr" lIns="0" rIns="0" tIns="0" bIns="0"/>
-          <a:lstStyle/>
-          <a:p>
-            <a:pPr algn="ctr"/>
-            <a:r>
-              <a:rPr sz="1400" b="1">
-                <a:solidFill>
-                  <a:srgbClr val="202122"/>
-                </a:solidFill>
-                <a:latin typeface="Calibri"/>
-              </a:rPr>
-              <a:t>3</a:t>
-            </a:r>
-          </a:p>
+          <a:bodyPr rtlCol="0" anchor="ctr"/>
+          <a:lstStyle/>
+          <a:p/>
         </p:txBody>
       </p:sp>
       <p:sp>
@@ -10285,58 +13155,49 @@
         </p:nvSpPr>
         <p:spPr>
           <a:xfrm>
-            <a:off x="1234440" y="3513124"/>
-            <a:ext cx="10408615" cy="791870"/>
-          </a:xfrm>
-          <a:prstGeom prst="rect">
-            <a:avLst/>
-          </a:prstGeom>
-          <a:noFill/>
-        </p:spPr>
-        <p:txBody>
-          <a:bodyPr wrap="square" anchor="t" lIns="0" rIns="0" tIns="0" bIns="0"/>
+            <a:off x="6507327" y="1600200"/>
+            <a:ext cx="4907127" cy="640080"/>
+          </a:xfrm>
+          <a:prstGeom prst="rect">
+            <a:avLst/>
+          </a:prstGeom>
+          <a:noFill/>
+        </p:spPr>
+        <p:txBody>
+          <a:bodyPr wrap="square" anchor="ctr" lIns="0" rIns="0" tIns="0" bIns="0"/>
           <a:lstStyle/>
           <a:p>
             <a:pPr algn="l"/>
             <a:r>
-              <a:rPr sz="1800" b="0" i="0">
-                <a:solidFill>
-                  <a:srgbClr val="54595D"/>
-                </a:solidFill>
-                <a:latin typeface="Calibri"/>
-              </a:rPr>
-              <a:t>What does NEXT stand for?</a:t>
-            </a:r>
-          </a:p>
-          <a:p>
-            <a:r>
-              <a:rPr sz="1800" b="1">
-                <a:solidFill>
-                  <a:srgbClr val="03306E"/>
-                </a:solidFill>
-                <a:latin typeface="Calibri"/>
-              </a:rPr>
-              <a:t>Near-end crosstalk.</a:t>
-            </a:r>
-          </a:p>
-        </p:txBody>
-      </p:sp>
-      <p:sp>
-        <p:nvSpPr>
-          <p:cNvPr id="12" name="Oval 11"/>
+              <a:rPr sz="2000" b="1" i="0">
+                <a:solidFill>
+                  <a:srgbClr val="FFFFFF"/>
+                </a:solidFill>
+                <a:latin typeface="Calibri"/>
+              </a:rPr>
+              <a:t>Fibre</a:t>
+            </a:r>
+          </a:p>
+        </p:txBody>
+      </p:sp>
+      <p:sp>
+        <p:nvSpPr>
+          <p:cNvPr id="12" name="Rounded Rectangle 11"/>
           <p:cNvSpPr/>
           <p:nvPr/>
         </p:nvSpPr>
         <p:spPr>
           <a:xfrm>
-            <a:off x="548640" y="4487875"/>
-            <a:ext cx="411480" cy="411480"/>
-          </a:xfrm>
-          <a:prstGeom prst="ellipse">
-            <a:avLst/>
+            <a:off x="6278727" y="2377440"/>
+            <a:ext cx="5364327" cy="3794760"/>
+          </a:xfrm>
+          <a:prstGeom prst="roundRect">
+            <a:avLst>
+              <a:gd name="adj" fmla="val 4000"/>
+            </a:avLst>
           </a:prstGeom>
           <a:solidFill>
-            <a:srgbClr val="F2B705"/>
+            <a:srgbClr val="EAF3FF"/>
           </a:solidFill>
           <a:ln>
             <a:noFill/>
@@ -10358,159 +13219,114 @@
           </a:fontRef>
         </p:style>
         <p:txBody>
-          <a:bodyPr rtlCol="0" anchor="ctr" lIns="0" rIns="0" tIns="0" bIns="0"/>
-          <a:lstStyle/>
-          <a:p>
-            <a:pPr algn="ctr"/>
-            <a:r>
-              <a:rPr sz="1400" b="1">
+          <a:bodyPr rtlCol="0" anchor="ctr"/>
+          <a:lstStyle/>
+          <a:p/>
+        </p:txBody>
+      </p:sp>
+      <p:sp>
+        <p:nvSpPr>
+          <p:cNvPr id="13" name="TextBox 12"/>
+          <p:cNvSpPr txBox="1"/>
+          <p:nvPr/>
+        </p:nvSpPr>
+        <p:spPr>
+          <a:xfrm>
+            <a:off x="6553047" y="2606040"/>
+            <a:ext cx="4815687" cy="3337560"/>
+          </a:xfrm>
+          <a:prstGeom prst="rect">
+            <a:avLst/>
+          </a:prstGeom>
+          <a:noFill/>
+        </p:spPr>
+        <p:txBody>
+          <a:bodyPr wrap="square" lIns="0" rIns="0" tIns="0" bIns="0">
+            <a:spAutoFit/>
+          </a:bodyPr>
+          <a:lstStyle/>
+          <a:p>
+            <a:pPr marL="274320" indent="-274320">
+              <a:spcAft>
+                <a:spcPts val="990"/>
+              </a:spcAft>
+              <a:buClr>
+                <a:srgbClr val="0645AD"/>
+              </a:buClr>
+              <a:buFont typeface="Arial"/>
+              <a:buChar char="•"/>
+            </a:pPr>
+            <a:r>
+              <a:rPr sz="2200" b="0">
                 <a:solidFill>
                   <a:srgbClr val="202122"/>
                 </a:solidFill>
                 <a:latin typeface="Calibri"/>
               </a:rPr>
-              <a:t>4</a:t>
-            </a:r>
-          </a:p>
-        </p:txBody>
-      </p:sp>
-      <p:sp>
-        <p:nvSpPr>
-          <p:cNvPr id="13" name="TextBox 12"/>
-          <p:cNvSpPr txBox="1"/>
-          <p:nvPr/>
-        </p:nvSpPr>
-        <p:spPr>
-          <a:xfrm>
-            <a:off x="1234440" y="4469587"/>
-            <a:ext cx="10408615" cy="791870"/>
-          </a:xfrm>
-          <a:prstGeom prst="rect">
-            <a:avLst/>
-          </a:prstGeom>
-          <a:noFill/>
-        </p:spPr>
-        <p:txBody>
-          <a:bodyPr wrap="square" anchor="t" lIns="0" rIns="0" tIns="0" bIns="0"/>
-          <a:lstStyle/>
-          <a:p>
-            <a:pPr algn="l"/>
-            <a:r>
-              <a:rPr sz="1800" b="0" i="0">
-                <a:solidFill>
-                  <a:srgbClr val="54595D"/>
-                </a:solidFill>
-                <a:latin typeface="Calibri"/>
-              </a:rPr>
-              <a:t>Which tool locates a break along a fibre?</a:t>
-            </a:r>
-          </a:p>
-          <a:p>
-            <a:r>
-              <a:rPr sz="1800" b="1">
-                <a:solidFill>
-                  <a:srgbClr val="03306E"/>
-                </a:solidFill>
-                <a:latin typeface="Calibri"/>
-              </a:rPr>
-              <a:t>An OTDR.</a:t>
-            </a:r>
-          </a:p>
-        </p:txBody>
-      </p:sp>
-      <p:sp>
-        <p:nvSpPr>
-          <p:cNvPr id="14" name="Oval 13"/>
-          <p:cNvSpPr/>
-          <p:nvPr/>
-        </p:nvSpPr>
-        <p:spPr>
-          <a:xfrm>
-            <a:off x="548640" y="5444337"/>
-            <a:ext cx="411480" cy="411480"/>
-          </a:xfrm>
-          <a:prstGeom prst="ellipse">
-            <a:avLst/>
-          </a:prstGeom>
-          <a:solidFill>
-            <a:srgbClr val="F2B705"/>
-          </a:solidFill>
-          <a:ln>
-            <a:noFill/>
-          </a:ln>
-          <a:effectLst/>
-        </p:spPr>
-        <p:style>
-          <a:lnRef idx="1">
-            <a:schemeClr val="accent1"/>
-          </a:lnRef>
-          <a:fillRef idx="3">
-            <a:schemeClr val="accent1"/>
-          </a:fillRef>
-          <a:effectRef idx="2">
-            <a:schemeClr val="accent1"/>
-          </a:effectRef>
-          <a:fontRef idx="minor">
-            <a:schemeClr val="lt1"/>
-          </a:fontRef>
-        </p:style>
-        <p:txBody>
-          <a:bodyPr rtlCol="0" anchor="ctr" lIns="0" rIns="0" tIns="0" bIns="0"/>
-          <a:lstStyle/>
-          <a:p>
-            <a:pPr algn="ctr"/>
-            <a:r>
-              <a:rPr sz="1400" b="1">
+              <a:t>OLTS, light source and power meter</a:t>
+            </a:r>
+          </a:p>
+          <a:p>
+            <a:pPr marL="274320" indent="-274320">
+              <a:spcAft>
+                <a:spcPts val="990"/>
+              </a:spcAft>
+              <a:buClr>
+                <a:srgbClr val="0645AD"/>
+              </a:buClr>
+              <a:buFont typeface="Arial"/>
+              <a:buChar char="•"/>
+            </a:pPr>
+            <a:r>
+              <a:rPr sz="2200" b="0">
                 <a:solidFill>
                   <a:srgbClr val="202122"/>
                 </a:solidFill>
                 <a:latin typeface="Calibri"/>
               </a:rPr>
-              <a:t>5</a:t>
-            </a:r>
-          </a:p>
-        </p:txBody>
-      </p:sp>
-      <p:sp>
-        <p:nvSpPr>
-          <p:cNvPr id="15" name="TextBox 14"/>
-          <p:cNvSpPr txBox="1"/>
-          <p:nvPr/>
-        </p:nvSpPr>
-        <p:spPr>
-          <a:xfrm>
-            <a:off x="1234440" y="5426049"/>
-            <a:ext cx="10408615" cy="791870"/>
-          </a:xfrm>
-          <a:prstGeom prst="rect">
-            <a:avLst/>
-          </a:prstGeom>
-          <a:noFill/>
-        </p:spPr>
-        <p:txBody>
-          <a:bodyPr wrap="square" anchor="t" lIns="0" rIns="0" tIns="0" bIns="0"/>
-          <a:lstStyle/>
-          <a:p>
-            <a:pPr algn="l"/>
-            <a:r>
-              <a:rPr sz="1800" b="0" i="0">
-                <a:solidFill>
-                  <a:srgbClr val="54595D"/>
-                </a:solidFill>
-                <a:latin typeface="Calibri"/>
-              </a:rPr>
-              <a:t>Give one business consequence of failing certification.</a:t>
-            </a:r>
-          </a:p>
-          <a:p>
-            <a:r>
-              <a:rPr sz="1800" b="1">
-                <a:solidFill>
-                  <a:srgbClr val="03306E"/>
-                </a:solidFill>
-                <a:latin typeface="Calibri"/>
-              </a:rPr>
-              <a:t>E.g. revisit costs, SLA penalties, reputational damage.</a:t>
+              <a:t>OTDR</a:t>
+            </a:r>
+          </a:p>
+          <a:p>
+            <a:pPr marL="274320" indent="-274320">
+              <a:spcAft>
+                <a:spcPts val="990"/>
+              </a:spcAft>
+              <a:buClr>
+                <a:srgbClr val="0645AD"/>
+              </a:buClr>
+              <a:buFont typeface="Arial"/>
+              <a:buChar char="•"/>
+            </a:pPr>
+            <a:r>
+              <a:rPr sz="2200" b="0">
+                <a:solidFill>
+                  <a:srgbClr val="202122"/>
+                </a:solidFill>
+                <a:latin typeface="Calibri"/>
+              </a:rPr>
+              <a:t>Fibre inspection scope</a:t>
+            </a:r>
+          </a:p>
+          <a:p>
+            <a:pPr marL="274320" indent="-274320">
+              <a:spcAft>
+                <a:spcPts val="990"/>
+              </a:spcAft>
+              <a:buClr>
+                <a:srgbClr val="0645AD"/>
+              </a:buClr>
+              <a:buFont typeface="Arial"/>
+              <a:buChar char="•"/>
+            </a:pPr>
+            <a:r>
+              <a:rPr sz="2200" b="0">
+                <a:solidFill>
+                  <a:srgbClr val="202122"/>
+                </a:solidFill>
+                <a:latin typeface="Calibri"/>
+              </a:rPr>
+              <a:t>Tier 1 and tier 2 testing</a:t>
             </a:r>
           </a:p>
         </p:txBody>
